--- a/media/exports/reports/2025-10/program-cost.pptx
+++ b/media/exports/reports/2025-10/program-cost.pptx
@@ -301,7 +301,9 @@
     <a:lstStyle/>
     <a:p>
       <a:pPr>
-        <a:defRPr sz="1800"/>
+        <a:defRPr sz="1800">
+          <a:latin typeface="Roboto"/>
+        </a:defRPr>
       </a:pPr>
       <a:endParaRPr lang="en-US"/>
     </a:p>
@@ -497,7 +499,9 @@
     <a:lstStyle/>
     <a:p>
       <a:pPr>
-        <a:defRPr sz="1800"/>
+        <a:defRPr sz="1800">
+          <a:latin typeface="Roboto"/>
+        </a:defRPr>
       </a:pPr>
       <a:endParaRPr lang="en-US"/>
     </a:p>
@@ -727,7 +731,9 @@
     <a:lstStyle/>
     <a:p>
       <a:pPr>
-        <a:defRPr sz="1800"/>
+        <a:defRPr sz="1800">
+          <a:latin typeface="Roboto"/>
+        </a:defRPr>
       </a:pPr>
       <a:endParaRPr/>
     </a:p>
@@ -3758,11 +3764,17 @@
           <a:bodyPr rtlCol="0" anchor="ctr"/>
           <a:lstStyle/>
           <a:p>
+            <a:pPr>
+              <a:defRPr>
+                <a:latin typeface="Roboto"/>
+              </a:defRPr>
+            </a:pPr>
             <a:r>
               <a:rPr sz="1600" b="1">
                 <a:solidFill>
                   <a:srgbClr val="FFFFFF"/>
                 </a:solidFill>
+                <a:latin typeface="Roboto"/>
               </a:rPr>
               <a:t>4th</a:t>
             </a:r>
@@ -3791,14 +3803,19 @@
           </a:bodyPr>
           <a:lstStyle/>
           <a:p>
+            <a:pPr>
+              <a:defRPr>
+                <a:latin typeface="Roboto"/>
+              </a:defRPr>
+            </a:pPr>
             <a:r>
               <a:rPr sz="1800" b="1">
                 <a:solidFill>
                   <a:srgbClr val="25342A"/>
                 </a:solidFill>
-                <a:latin typeface="Arial"/>
+                <a:latin typeface="Roboto"/>
               </a:rPr>
-              <a:t>The 4th Sheet</a:t>
+              <a:t>The Fourth Sheet</a:t>
             </a:r>
           </a:p>
         </p:txBody>
@@ -3825,12 +3842,17 @@
           </a:bodyPr>
           <a:lstStyle/>
           <a:p>
+            <a:pPr>
+              <a:defRPr>
+                <a:latin typeface="Roboto"/>
+              </a:defRPr>
+            </a:pPr>
             <a:r>
               <a:rPr sz="1100" b="1">
                 <a:solidFill>
                   <a:srgbClr val="8A7A52"/>
                 </a:solidFill>
-                <a:latin typeface="Arial"/>
+                <a:latin typeface="Roboto"/>
               </a:rPr>
               <a:t>SAMPLE DATA · invented figures for demonstration</a:t>
             </a:r>
@@ -3859,12 +3881,17 @@
           </a:bodyPr>
           <a:lstStyle/>
           <a:p>
+            <a:pPr>
+              <a:defRPr>
+                <a:latin typeface="Roboto"/>
+              </a:defRPr>
+            </a:pPr>
             <a:r>
               <a:rPr sz="3400" b="1">
                 <a:solidFill>
                   <a:srgbClr val="25342A"/>
                 </a:solidFill>
-                <a:latin typeface="Arial"/>
+                <a:latin typeface="Roboto"/>
               </a:rPr>
               <a:t>What does each program really cost?</a:t>
             </a:r>
@@ -3893,12 +3920,17 @@
           </a:bodyPr>
           <a:lstStyle/>
           <a:p>
+            <a:pPr>
+              <a:defRPr>
+                <a:latin typeface="Roboto"/>
+              </a:defRPr>
+            </a:pPr>
             <a:r>
               <a:rPr sz="1600" b="0">
                 <a:solidFill>
                   <a:srgbClr val="5F6F63"/>
                 </a:solidFill>
-                <a:latin typeface="Arial"/>
+                <a:latin typeface="Roboto"/>
               </a:rPr>
               <a:t>Sample Community Services Ltd</a:t>
             </a:r>
@@ -3927,12 +3959,17 @@
           </a:bodyPr>
           <a:lstStyle/>
           <a:p>
+            <a:pPr>
+              <a:defRPr>
+                <a:latin typeface="Roboto"/>
+              </a:defRPr>
+            </a:pPr>
             <a:r>
               <a:rPr sz="1400" b="0">
                 <a:solidFill>
                   <a:srgbClr val="25342A"/>
                 </a:solidFill>
-                <a:latin typeface="Arial"/>
+                <a:latin typeface="Roboto"/>
               </a:rPr>
               <a:t>Period: October 2025. Each program's full cost: what its grant pays for, plus its fair share of the costs no single grant covers (untied program costs and administration, shared by grant spending). Pick a program and every chart and note follows it.</a:t>
             </a:r>
@@ -3961,45 +3998,65 @@
           </a:bodyPr>
           <a:lstStyle/>
           <a:p>
+            <a:pPr>
+              <a:defRPr>
+                <a:latin typeface="Roboto"/>
+              </a:defRPr>
+            </a:pPr>
             <a:r>
               <a:rPr sz="1100" b="0">
                 <a:solidFill>
                   <a:srgbClr val="5F6F63"/>
                 </a:solidFill>
-                <a:latin typeface="Arial"/>
+                <a:latin typeface="Roboto"/>
               </a:rPr>
               <a:t>How final is this data?</a:t>
             </a:r>
           </a:p>
           <a:p>
+            <a:pPr>
+              <a:defRPr>
+                <a:latin typeface="Roboto"/>
+              </a:defRPr>
+            </a:pPr>
             <a:r>
               <a:rPr sz="1100" b="0">
                 <a:solidFill>
                   <a:srgbClr val="5F6F63"/>
                 </a:solidFill>
-                <a:latin typeface="Arial"/>
+                <a:latin typeface="Roboto"/>
               </a:rPr>
               <a:t>September 2025: Locked. September 2025 is locked (closed 2 Oct 2025). These numbers won't change.</a:t>
             </a:r>
           </a:p>
           <a:p>
+            <a:pPr>
+              <a:defRPr>
+                <a:latin typeface="Roboto"/>
+              </a:defRPr>
+            </a:pPr>
             <a:r>
               <a:rPr sz="1100" b="0">
                 <a:solidFill>
                   <a:srgbClr val="5F6F63"/>
                 </a:solidFill>
-                <a:latin typeface="Arial"/>
+                <a:latin typeface="Roboto"/>
               </a:rPr>
               <a:t>October 2025: Locked. October 2025 is locked (closed 4 Nov 2025). These numbers won't change.</a:t>
             </a:r>
           </a:p>
           <a:p>
+            <a:pPr>
+              <a:defRPr>
+                <a:latin typeface="Roboto"/>
+              </a:defRPr>
+            </a:pPr>
             <a:r>
               <a:rPr sz="1100" b="0">
                 <a:solidFill>
                   <a:srgbClr val="5F6F63"/>
                 </a:solidFill>
-                <a:latin typeface="Arial"/>
+                <a:latin typeface="Roboto"/>
               </a:rPr>
               <a:t>October 2026: Incomplete. October 2026 is still in progress: figures to 6 Oct only.</a:t>
             </a:r>
@@ -4028,12 +4085,17 @@
           </a:bodyPr>
           <a:lstStyle/>
           <a:p>
+            <a:pPr>
+              <a:defRPr>
+                <a:latin typeface="Roboto"/>
+              </a:defRPr>
+            </a:pPr>
             <a:r>
               <a:rPr sz="900" b="0">
                 <a:solidFill>
                   <a:srgbClr val="5F6F63"/>
                 </a:solidFill>
-                <a:latin typeface="Arial"/>
+                <a:latin typeface="Roboto"/>
               </a:rPr>
               <a:t>program-cost.pptx</a:t>
             </a:r>
@@ -4062,13 +4124,17 @@
           </a:bodyPr>
           <a:lstStyle/>
           <a:p>
-            <a:pPr algn="ctr"/>
+            <a:pPr algn="ctr">
+              <a:defRPr>
+                <a:latin typeface="Roboto"/>
+              </a:defRPr>
+            </a:pPr>
             <a:r>
               <a:rPr sz="900" b="0">
                 <a:solidFill>
                   <a:srgbClr val="5F6F63"/>
                 </a:solidFill>
-                <a:latin typeface="Arial"/>
+                <a:latin typeface="Roboto"/>
               </a:rPr>
               <a:t>Data retrieved 2pm, Tue 6 Oct 2026 · Sample data</a:t>
             </a:r>
@@ -4097,13 +4163,17 @@
           </a:bodyPr>
           <a:lstStyle/>
           <a:p>
-            <a:pPr algn="r"/>
+            <a:pPr algn="r">
+              <a:defRPr>
+                <a:latin typeface="Roboto"/>
+              </a:defRPr>
+            </a:pPr>
             <a:r>
               <a:rPr sz="900" b="0">
                 <a:solidFill>
                   <a:srgbClr val="5F6F63"/>
                 </a:solidFill>
-                <a:latin typeface="Arial"/>
+                <a:latin typeface="Roboto"/>
               </a:rPr>
               <a:t>Slide 1 of 10</a:t>
             </a:r>
@@ -4167,7 +4237,11 @@
           <a:bodyPr rtlCol="0" anchor="ctr"/>
           <a:lstStyle/>
           <a:p>
-            <a:pPr algn="ctr"/>
+            <a:pPr algn="ctr">
+              <a:defRPr>
+                <a:latin typeface="Roboto"/>
+              </a:defRPr>
+            </a:pPr>
           </a:p>
         </p:txBody>
       </p:sp>
@@ -4193,12 +4267,17 @@
           </a:bodyPr>
           <a:lstStyle/>
           <a:p>
+            <a:pPr>
+              <a:defRPr>
+                <a:latin typeface="Roboto"/>
+              </a:defRPr>
+            </a:pPr>
             <a:r>
               <a:rPr sz="1000" b="0">
                 <a:solidFill>
                   <a:srgbClr val="5F6F63"/>
                 </a:solidFill>
-                <a:latin typeface="Arial"/>
+                <a:latin typeface="Roboto"/>
               </a:rPr>
               <a:t>Sample Community Services Ltd · What does each program really cost?</a:t>
             </a:r>
@@ -4227,12 +4306,17 @@
           </a:bodyPr>
           <a:lstStyle/>
           <a:p>
+            <a:pPr>
+              <a:defRPr>
+                <a:latin typeface="Roboto"/>
+              </a:defRPr>
+            </a:pPr>
             <a:r>
               <a:rPr sz="2400" b="1">
                 <a:solidFill>
                   <a:srgbClr val="25342A"/>
                 </a:solidFill>
-                <a:latin typeface="Arial"/>
+                <a:latin typeface="Roboto"/>
               </a:rPr>
               <a:t>Grant spending, by month · Spend $ · Every program at once</a:t>
             </a:r>
@@ -4261,12 +4345,17 @@
           </a:bodyPr>
           <a:lstStyle/>
           <a:p>
+            <a:pPr>
+              <a:defRPr>
+                <a:latin typeface="Roboto"/>
+              </a:defRPr>
+            </a:pPr>
             <a:r>
               <a:rPr sz="1200" b="0">
                 <a:solidFill>
                   <a:srgbClr val="5F6F63"/>
                 </a:solidFill>
-                <a:latin typeface="Arial"/>
+                <a:latin typeface="Roboto"/>
               </a:rPr>
               <a:t>Grant spending only (the program's direct cost). All programs includes grants that have finished.</a:t>
             </a:r>
@@ -4313,12 +4402,17 @@
           </a:bodyPr>
           <a:lstStyle/>
           <a:p>
+            <a:pPr>
+              <a:defRPr>
+                <a:latin typeface="Roboto"/>
+              </a:defRPr>
+            </a:pPr>
             <a:r>
               <a:rPr sz="900" b="0">
                 <a:solidFill>
                   <a:srgbClr val="5F6F63"/>
                 </a:solidFill>
-                <a:latin typeface="Arial"/>
+                <a:latin typeface="Roboto"/>
               </a:rPr>
               <a:t>program-cost.pptx</a:t>
             </a:r>
@@ -4347,13 +4441,17 @@
           </a:bodyPr>
           <a:lstStyle/>
           <a:p>
-            <a:pPr algn="ctr"/>
+            <a:pPr algn="ctr">
+              <a:defRPr>
+                <a:latin typeface="Roboto"/>
+              </a:defRPr>
+            </a:pPr>
             <a:r>
               <a:rPr sz="900" b="0">
                 <a:solidFill>
                   <a:srgbClr val="5F6F63"/>
                 </a:solidFill>
-                <a:latin typeface="Arial"/>
+                <a:latin typeface="Roboto"/>
               </a:rPr>
               <a:t>Data retrieved 2pm, Tue 6 Oct 2026 · Sample data</a:t>
             </a:r>
@@ -4382,13 +4480,17 @@
           </a:bodyPr>
           <a:lstStyle/>
           <a:p>
-            <a:pPr algn="r"/>
+            <a:pPr algn="r">
+              <a:defRPr>
+                <a:latin typeface="Roboto"/>
+              </a:defRPr>
+            </a:pPr>
             <a:r>
               <a:rPr sz="900" b="0">
                 <a:solidFill>
                   <a:srgbClr val="5F6F63"/>
                 </a:solidFill>
-                <a:latin typeface="Arial"/>
+                <a:latin typeface="Roboto"/>
               </a:rPr>
               <a:t>Slide 10 of 10</a:t>
             </a:r>
@@ -4452,7 +4554,11 @@
           <a:bodyPr rtlCol="0" anchor="ctr"/>
           <a:lstStyle/>
           <a:p>
-            <a:pPr algn="ctr"/>
+            <a:pPr algn="ctr">
+              <a:defRPr>
+                <a:latin typeface="Roboto"/>
+              </a:defRPr>
+            </a:pPr>
           </a:p>
         </p:txBody>
       </p:sp>
@@ -4478,12 +4584,17 @@
           </a:bodyPr>
           <a:lstStyle/>
           <a:p>
+            <a:pPr>
+              <a:defRPr>
+                <a:latin typeface="Roboto"/>
+              </a:defRPr>
+            </a:pPr>
             <a:r>
               <a:rPr sz="1000" b="0">
                 <a:solidFill>
                   <a:srgbClr val="5F6F63"/>
                 </a:solidFill>
-                <a:latin typeface="Arial"/>
+                <a:latin typeface="Roboto"/>
               </a:rPr>
               <a:t>Sample Community Services Ltd · What does each program really cost?</a:t>
             </a:r>
@@ -4512,12 +4623,17 @@
           </a:bodyPr>
           <a:lstStyle/>
           <a:p>
+            <a:pPr>
+              <a:defRPr>
+                <a:latin typeface="Roboto"/>
+              </a:defRPr>
+            </a:pPr>
             <a:r>
               <a:rPr sz="2400" b="1">
                 <a:solidFill>
                   <a:srgbClr val="25342A"/>
                 </a:solidFill>
-                <a:latin typeface="Arial"/>
+                <a:latin typeface="Roboto"/>
               </a:rPr>
               <a:t>Full cost of each program, October 2025 · $ · Program: All programs</a:t>
             </a:r>
@@ -4564,12 +4680,17 @@
           </a:bodyPr>
           <a:lstStyle/>
           <a:p>
+            <a:pPr>
+              <a:defRPr>
+                <a:latin typeface="Roboto"/>
+              </a:defRPr>
+            </a:pPr>
             <a:r>
               <a:rPr sz="900" b="0">
                 <a:solidFill>
                   <a:srgbClr val="5F6F63"/>
                 </a:solidFill>
-                <a:latin typeface="Arial"/>
+                <a:latin typeface="Roboto"/>
               </a:rPr>
               <a:t>program-cost.pptx</a:t>
             </a:r>
@@ -4598,13 +4719,17 @@
           </a:bodyPr>
           <a:lstStyle/>
           <a:p>
-            <a:pPr algn="ctr"/>
+            <a:pPr algn="ctr">
+              <a:defRPr>
+                <a:latin typeface="Roboto"/>
+              </a:defRPr>
+            </a:pPr>
             <a:r>
               <a:rPr sz="900" b="0">
                 <a:solidFill>
                   <a:srgbClr val="5F6F63"/>
                 </a:solidFill>
-                <a:latin typeface="Arial"/>
+                <a:latin typeface="Roboto"/>
               </a:rPr>
               <a:t>Data retrieved 2pm, Tue 6 Oct 2026 · Sample data</a:t>
             </a:r>
@@ -4633,13 +4758,17 @@
           </a:bodyPr>
           <a:lstStyle/>
           <a:p>
-            <a:pPr algn="r"/>
+            <a:pPr algn="r">
+              <a:defRPr>
+                <a:latin typeface="Roboto"/>
+              </a:defRPr>
+            </a:pPr>
             <a:r>
               <a:rPr sz="900" b="0">
                 <a:solidFill>
                   <a:srgbClr val="5F6F63"/>
                 </a:solidFill>
-                <a:latin typeface="Arial"/>
+                <a:latin typeface="Roboto"/>
               </a:rPr>
               <a:t>Slide 2 of 10</a:t>
             </a:r>
@@ -4703,7 +4832,11 @@
           <a:bodyPr rtlCol="0" anchor="ctr"/>
           <a:lstStyle/>
           <a:p>
-            <a:pPr algn="ctr"/>
+            <a:pPr algn="ctr">
+              <a:defRPr>
+                <a:latin typeface="Roboto"/>
+              </a:defRPr>
+            </a:pPr>
           </a:p>
         </p:txBody>
       </p:sp>
@@ -4729,12 +4862,17 @@
           </a:bodyPr>
           <a:lstStyle/>
           <a:p>
+            <a:pPr>
+              <a:defRPr>
+                <a:latin typeface="Roboto"/>
+              </a:defRPr>
+            </a:pPr>
             <a:r>
               <a:rPr sz="1000" b="0">
                 <a:solidFill>
                   <a:srgbClr val="5F6F63"/>
                 </a:solidFill>
-                <a:latin typeface="Arial"/>
+                <a:latin typeface="Roboto"/>
               </a:rPr>
               <a:t>Sample Community Services Ltd · What does each program really cost?</a:t>
             </a:r>
@@ -4763,12 +4901,17 @@
           </a:bodyPr>
           <a:lstStyle/>
           <a:p>
+            <a:pPr>
+              <a:defRPr>
+                <a:latin typeface="Roboto"/>
+              </a:defRPr>
+            </a:pPr>
             <a:r>
               <a:rPr sz="2400" b="1">
                 <a:solidFill>
                   <a:srgbClr val="25342A"/>
                 </a:solidFill>
-                <a:latin typeface="Arial"/>
+                <a:latin typeface="Roboto"/>
               </a:rPr>
               <a:t>Full cost of each program, October 2025 · % of total · Program: All programs</a:t>
             </a:r>
@@ -4815,12 +4958,17 @@
           </a:bodyPr>
           <a:lstStyle/>
           <a:p>
+            <a:pPr>
+              <a:defRPr>
+                <a:latin typeface="Roboto"/>
+              </a:defRPr>
+            </a:pPr>
             <a:r>
               <a:rPr sz="900" b="0">
                 <a:solidFill>
                   <a:srgbClr val="5F6F63"/>
                 </a:solidFill>
-                <a:latin typeface="Arial"/>
+                <a:latin typeface="Roboto"/>
               </a:rPr>
               <a:t>program-cost.pptx</a:t>
             </a:r>
@@ -4849,13 +4997,17 @@
           </a:bodyPr>
           <a:lstStyle/>
           <a:p>
-            <a:pPr algn="ctr"/>
+            <a:pPr algn="ctr">
+              <a:defRPr>
+                <a:latin typeface="Roboto"/>
+              </a:defRPr>
+            </a:pPr>
             <a:r>
               <a:rPr sz="900" b="0">
                 <a:solidFill>
                   <a:srgbClr val="5F6F63"/>
                 </a:solidFill>
-                <a:latin typeface="Arial"/>
+                <a:latin typeface="Roboto"/>
               </a:rPr>
               <a:t>Data retrieved 2pm, Tue 6 Oct 2026 · Sample data</a:t>
             </a:r>
@@ -4884,13 +5036,17 @@
           </a:bodyPr>
           <a:lstStyle/>
           <a:p>
-            <a:pPr algn="r"/>
+            <a:pPr algn="r">
+              <a:defRPr>
+                <a:latin typeface="Roboto"/>
+              </a:defRPr>
+            </a:pPr>
             <a:r>
               <a:rPr sz="900" b="0">
                 <a:solidFill>
                   <a:srgbClr val="5F6F63"/>
                 </a:solidFill>
-                <a:latin typeface="Arial"/>
+                <a:latin typeface="Roboto"/>
               </a:rPr>
               <a:t>Slide 3 of 10</a:t>
             </a:r>
@@ -4954,7 +5110,11 @@
           <a:bodyPr rtlCol="0" anchor="ctr"/>
           <a:lstStyle/>
           <a:p>
-            <a:pPr algn="ctr"/>
+            <a:pPr algn="ctr">
+              <a:defRPr>
+                <a:latin typeface="Roboto"/>
+              </a:defRPr>
+            </a:pPr>
           </a:p>
         </p:txBody>
       </p:sp>
@@ -4980,12 +5140,17 @@
           </a:bodyPr>
           <a:lstStyle/>
           <a:p>
+            <a:pPr>
+              <a:defRPr>
+                <a:latin typeface="Roboto"/>
+              </a:defRPr>
+            </a:pPr>
             <a:r>
               <a:rPr sz="1000" b="0">
                 <a:solidFill>
                   <a:srgbClr val="5F6F63"/>
                 </a:solidFill>
-                <a:latin typeface="Arial"/>
+                <a:latin typeface="Roboto"/>
               </a:rPr>
               <a:t>Sample Community Services Ltd · What does each program really cost?</a:t>
             </a:r>
@@ -5014,12 +5179,17 @@
           </a:bodyPr>
           <a:lstStyle/>
           <a:p>
+            <a:pPr>
+              <a:defRPr>
+                <a:latin typeface="Roboto"/>
+              </a:defRPr>
+            </a:pPr>
             <a:r>
               <a:rPr sz="2400" b="1">
                 <a:solidFill>
                   <a:srgbClr val="25342A"/>
                 </a:solidFill>
-                <a:latin typeface="Arial"/>
+                <a:latin typeface="Roboto"/>
               </a:rPr>
               <a:t>What it shows · Program: All programs</a:t>
             </a:r>
@@ -5067,7 +5237,11 @@
           <a:bodyPr rtlCol="0" anchor="ctr"/>
           <a:lstStyle/>
           <a:p>
-            <a:pPr algn="ctr"/>
+            <a:pPr algn="ctr">
+              <a:defRPr>
+                <a:latin typeface="Roboto"/>
+              </a:defRPr>
+            </a:pPr>
           </a:p>
         </p:txBody>
       </p:sp>
@@ -5093,12 +5267,17 @@
           </a:bodyPr>
           <a:lstStyle/>
           <a:p>
+            <a:pPr>
+              <a:defRPr>
+                <a:latin typeface="Roboto"/>
+              </a:defRPr>
+            </a:pPr>
             <a:r>
               <a:rPr sz="1100" b="1">
                 <a:solidFill>
                   <a:srgbClr val="5F6F63"/>
                 </a:solidFill>
-                <a:latin typeface="Arial"/>
+                <a:latin typeface="Roboto"/>
               </a:rPr>
               <a:t>WHAT IT SHOWS</a:t>
             </a:r>
@@ -5127,12 +5306,17 @@
           </a:bodyPr>
           <a:lstStyle/>
           <a:p>
+            <a:pPr>
+              <a:defRPr>
+                <a:latin typeface="Roboto"/>
+              </a:defRPr>
+            </a:pPr>
             <a:r>
               <a:rPr sz="1600" b="0">
                 <a:solidFill>
                   <a:srgbClr val="25342A"/>
                 </a:solidFill>
-                <a:latin typeface="Arial"/>
+                <a:latin typeface="Roboto"/>
               </a:rPr>
               <a:t>Housing support (2025) is the biggest program: $46,631 in October once its share of untied program costs and administration is added to $26,600 of grant spending. Shared costs add 75.3% on top of grant spending across all programs.</a:t>
             </a:r>
@@ -5180,7 +5364,11 @@
           <a:bodyPr rtlCol="0" anchor="ctr"/>
           <a:lstStyle/>
           <a:p>
-            <a:pPr algn="ctr"/>
+            <a:pPr algn="ctr">
+              <a:defRPr>
+                <a:latin typeface="Roboto"/>
+              </a:defRPr>
+            </a:pPr>
           </a:p>
         </p:txBody>
       </p:sp>
@@ -5206,12 +5394,17 @@
           </a:bodyPr>
           <a:lstStyle/>
           <a:p>
+            <a:pPr>
+              <a:defRPr>
+                <a:latin typeface="Roboto"/>
+              </a:defRPr>
+            </a:pPr>
             <a:r>
               <a:rPr sz="1100" b="1">
                 <a:solidFill>
                   <a:srgbClr val="5F6F63"/>
                 </a:solidFill>
-                <a:latin typeface="Arial"/>
+                <a:latin typeface="Roboto"/>
               </a:rPr>
               <a:t>WHAT YOU'D DO ABOUT IT</a:t>
             </a:r>
@@ -5240,12 +5433,17 @@
           </a:bodyPr>
           <a:lstStyle/>
           <a:p>
+            <a:pPr>
+              <a:defRPr>
+                <a:latin typeface="Roboto"/>
+              </a:defRPr>
+            </a:pPr>
             <a:r>
               <a:rPr sz="1600" b="0">
                 <a:solidFill>
                   <a:srgbClr val="25342A"/>
                 </a:solidFill>
-                <a:latin typeface="Arial"/>
+                <a:latin typeface="Roboto"/>
               </a:rPr>
               <a:t>The full cost (not just the grant line) is the number for renewal applications, where the funder lets you recover a share of overheads. Pick a program above to see it on its own.</a:t>
             </a:r>
@@ -5274,12 +5472,17 @@
           </a:bodyPr>
           <a:lstStyle/>
           <a:p>
+            <a:pPr>
+              <a:defRPr>
+                <a:latin typeface="Roboto"/>
+              </a:defRPr>
+            </a:pPr>
             <a:r>
               <a:rPr sz="900" b="0">
                 <a:solidFill>
                   <a:srgbClr val="5F6F63"/>
                 </a:solidFill>
-                <a:latin typeface="Arial"/>
+                <a:latin typeface="Roboto"/>
               </a:rPr>
               <a:t>program-cost.pptx</a:t>
             </a:r>
@@ -5308,13 +5511,17 @@
           </a:bodyPr>
           <a:lstStyle/>
           <a:p>
-            <a:pPr algn="ctr"/>
+            <a:pPr algn="ctr">
+              <a:defRPr>
+                <a:latin typeface="Roboto"/>
+              </a:defRPr>
+            </a:pPr>
             <a:r>
               <a:rPr sz="900" b="0">
                 <a:solidFill>
                   <a:srgbClr val="5F6F63"/>
                 </a:solidFill>
-                <a:latin typeface="Arial"/>
+                <a:latin typeface="Roboto"/>
               </a:rPr>
               <a:t>Data retrieved 2pm, Tue 6 Oct 2026 · Sample data</a:t>
             </a:r>
@@ -5343,13 +5550,17 @@
           </a:bodyPr>
           <a:lstStyle/>
           <a:p>
-            <a:pPr algn="r"/>
+            <a:pPr algn="r">
+              <a:defRPr>
+                <a:latin typeface="Roboto"/>
+              </a:defRPr>
+            </a:pPr>
             <a:r>
               <a:rPr sz="900" b="0">
                 <a:solidFill>
                   <a:srgbClr val="5F6F63"/>
                 </a:solidFill>
-                <a:latin typeface="Arial"/>
+                <a:latin typeface="Roboto"/>
               </a:rPr>
               <a:t>Slide 4 of 10</a:t>
             </a:r>
@@ -5413,7 +5624,11 @@
           <a:bodyPr rtlCol="0" anchor="ctr"/>
           <a:lstStyle/>
           <a:p>
-            <a:pPr algn="ctr"/>
+            <a:pPr algn="ctr">
+              <a:defRPr>
+                <a:latin typeface="Roboto"/>
+              </a:defRPr>
+            </a:pPr>
           </a:p>
         </p:txBody>
       </p:sp>
@@ -5439,12 +5654,17 @@
           </a:bodyPr>
           <a:lstStyle/>
           <a:p>
+            <a:pPr>
+              <a:defRPr>
+                <a:latin typeface="Roboto"/>
+              </a:defRPr>
+            </a:pPr>
             <a:r>
               <a:rPr sz="1000" b="0">
                 <a:solidFill>
                   <a:srgbClr val="5F6F63"/>
                 </a:solidFill>
-                <a:latin typeface="Arial"/>
+                <a:latin typeface="Roboto"/>
               </a:rPr>
               <a:t>Sample Community Services Ltd · What does each program really cost?</a:t>
             </a:r>
@@ -5473,12 +5693,17 @@
           </a:bodyPr>
           <a:lstStyle/>
           <a:p>
+            <a:pPr>
+              <a:defRPr>
+                <a:latin typeface="Roboto"/>
+              </a:defRPr>
+            </a:pPr>
             <a:r>
               <a:rPr sz="2400" b="1">
                 <a:solidFill>
                   <a:srgbClr val="25342A"/>
                 </a:solidFill>
-                <a:latin typeface="Arial"/>
+                <a:latin typeface="Roboto"/>
               </a:rPr>
               <a:t>What it shows · Program: Housing support (2025)</a:t>
             </a:r>
@@ -5526,7 +5751,11 @@
           <a:bodyPr rtlCol="0" anchor="ctr"/>
           <a:lstStyle/>
           <a:p>
-            <a:pPr algn="ctr"/>
+            <a:pPr algn="ctr">
+              <a:defRPr>
+                <a:latin typeface="Roboto"/>
+              </a:defRPr>
+            </a:pPr>
           </a:p>
         </p:txBody>
       </p:sp>
@@ -5552,12 +5781,17 @@
           </a:bodyPr>
           <a:lstStyle/>
           <a:p>
+            <a:pPr>
+              <a:defRPr>
+                <a:latin typeface="Roboto"/>
+              </a:defRPr>
+            </a:pPr>
             <a:r>
               <a:rPr sz="1100" b="1">
                 <a:solidFill>
                   <a:srgbClr val="5F6F63"/>
                 </a:solidFill>
-                <a:latin typeface="Arial"/>
+                <a:latin typeface="Roboto"/>
               </a:rPr>
               <a:t>WHAT IT SHOWS</a:t>
             </a:r>
@@ -5586,12 +5820,17 @@
           </a:bodyPr>
           <a:lstStyle/>
           <a:p>
+            <a:pPr>
+              <a:defRPr>
+                <a:latin typeface="Roboto"/>
+              </a:defRPr>
+            </a:pPr>
             <a:r>
               <a:rPr sz="1600" b="0">
                 <a:solidFill>
                   <a:srgbClr val="25342A"/>
                 </a:solidFill>
-                <a:latin typeface="Arial"/>
+                <a:latin typeface="Roboto"/>
               </a:rPr>
               <a:t>Housing support (2025) cost $46,631 in full in October: $26,600 paid by the State Housing Program grant, and $20,031 of shared costs no grant covers. It has spent 98.9% of its budget to date, with $59,100 left and 2 months to go.</a:t>
             </a:r>
@@ -5639,7 +5878,11 @@
           <a:bodyPr rtlCol="0" anchor="ctr"/>
           <a:lstStyle/>
           <a:p>
-            <a:pPr algn="ctr"/>
+            <a:pPr algn="ctr">
+              <a:defRPr>
+                <a:latin typeface="Roboto"/>
+              </a:defRPr>
+            </a:pPr>
           </a:p>
         </p:txBody>
       </p:sp>
@@ -5665,12 +5908,17 @@
           </a:bodyPr>
           <a:lstStyle/>
           <a:p>
+            <a:pPr>
+              <a:defRPr>
+                <a:latin typeface="Roboto"/>
+              </a:defRPr>
+            </a:pPr>
             <a:r>
               <a:rPr sz="1100" b="1">
                 <a:solidFill>
                   <a:srgbClr val="5F6F63"/>
                 </a:solidFill>
-                <a:latin typeface="Arial"/>
+                <a:latin typeface="Roboto"/>
               </a:rPr>
               <a:t>WHAT YOU'D DO ABOUT IT</a:t>
             </a:r>
@@ -5699,12 +5947,17 @@
           </a:bodyPr>
           <a:lstStyle/>
           <a:p>
+            <a:pPr>
+              <a:defRPr>
+                <a:latin typeface="Roboto"/>
+              </a:defRPr>
+            </a:pPr>
             <a:r>
               <a:rPr sz="1600" b="0">
                 <a:solidFill>
                   <a:srgbClr val="25342A"/>
                 </a:solidFill>
-                <a:latin typeface="Arial"/>
+                <a:latin typeface="Roboto"/>
               </a:rPr>
               <a:t>The full cost is $46,631 a month; $20,031 of it is shared cost the grant doesn't pay for. Worth asking for as much of it as the funder allows at renewal.</a:t>
             </a:r>
@@ -5733,12 +5986,17 @@
           </a:bodyPr>
           <a:lstStyle/>
           <a:p>
+            <a:pPr>
+              <a:defRPr>
+                <a:latin typeface="Roboto"/>
+              </a:defRPr>
+            </a:pPr>
             <a:r>
               <a:rPr sz="900" b="0">
                 <a:solidFill>
                   <a:srgbClr val="5F6F63"/>
                 </a:solidFill>
-                <a:latin typeface="Arial"/>
+                <a:latin typeface="Roboto"/>
               </a:rPr>
               <a:t>program-cost.pptx</a:t>
             </a:r>
@@ -5767,13 +6025,17 @@
           </a:bodyPr>
           <a:lstStyle/>
           <a:p>
-            <a:pPr algn="ctr"/>
+            <a:pPr algn="ctr">
+              <a:defRPr>
+                <a:latin typeface="Roboto"/>
+              </a:defRPr>
+            </a:pPr>
             <a:r>
               <a:rPr sz="900" b="0">
                 <a:solidFill>
                   <a:srgbClr val="5F6F63"/>
                 </a:solidFill>
-                <a:latin typeface="Arial"/>
+                <a:latin typeface="Roboto"/>
               </a:rPr>
               <a:t>Data retrieved 2pm, Tue 6 Oct 2026 · Sample data</a:t>
             </a:r>
@@ -5802,13 +6064,17 @@
           </a:bodyPr>
           <a:lstStyle/>
           <a:p>
-            <a:pPr algn="r"/>
+            <a:pPr algn="r">
+              <a:defRPr>
+                <a:latin typeface="Roboto"/>
+              </a:defRPr>
+            </a:pPr>
             <a:r>
               <a:rPr sz="900" b="0">
                 <a:solidFill>
                   <a:srgbClr val="5F6F63"/>
                 </a:solidFill>
-                <a:latin typeface="Arial"/>
+                <a:latin typeface="Roboto"/>
               </a:rPr>
               <a:t>Slide 5 of 10</a:t>
             </a:r>
@@ -5872,7 +6138,11 @@
           <a:bodyPr rtlCol="0" anchor="ctr"/>
           <a:lstStyle/>
           <a:p>
-            <a:pPr algn="ctr"/>
+            <a:pPr algn="ctr">
+              <a:defRPr>
+                <a:latin typeface="Roboto"/>
+              </a:defRPr>
+            </a:pPr>
           </a:p>
         </p:txBody>
       </p:sp>
@@ -5898,12 +6168,17 @@
           </a:bodyPr>
           <a:lstStyle/>
           <a:p>
+            <a:pPr>
+              <a:defRPr>
+                <a:latin typeface="Roboto"/>
+              </a:defRPr>
+            </a:pPr>
             <a:r>
               <a:rPr sz="1000" b="0">
                 <a:solidFill>
                   <a:srgbClr val="5F6F63"/>
                 </a:solidFill>
-                <a:latin typeface="Arial"/>
+                <a:latin typeface="Roboto"/>
               </a:rPr>
               <a:t>Sample Community Services Ltd · What does each program really cost?</a:t>
             </a:r>
@@ -5932,12 +6207,17 @@
           </a:bodyPr>
           <a:lstStyle/>
           <a:p>
+            <a:pPr>
+              <a:defRPr>
+                <a:latin typeface="Roboto"/>
+              </a:defRPr>
+            </a:pPr>
             <a:r>
               <a:rPr sz="2400" b="1">
                 <a:solidFill>
                   <a:srgbClr val="25342A"/>
                 </a:solidFill>
-                <a:latin typeface="Arial"/>
+                <a:latin typeface="Roboto"/>
               </a:rPr>
               <a:t>What it shows · Program: Youth outreach</a:t>
             </a:r>
@@ -5985,7 +6265,11 @@
           <a:bodyPr rtlCol="0" anchor="ctr"/>
           <a:lstStyle/>
           <a:p>
-            <a:pPr algn="ctr"/>
+            <a:pPr algn="ctr">
+              <a:defRPr>
+                <a:latin typeface="Roboto"/>
+              </a:defRPr>
+            </a:pPr>
           </a:p>
         </p:txBody>
       </p:sp>
@@ -6011,12 +6295,17 @@
           </a:bodyPr>
           <a:lstStyle/>
           <a:p>
+            <a:pPr>
+              <a:defRPr>
+                <a:latin typeface="Roboto"/>
+              </a:defRPr>
+            </a:pPr>
             <a:r>
               <a:rPr sz="1100" b="1">
                 <a:solidFill>
                   <a:srgbClr val="5F6F63"/>
                 </a:solidFill>
-                <a:latin typeface="Arial"/>
+                <a:latin typeface="Roboto"/>
               </a:rPr>
               <a:t>WHAT IT SHOWS</a:t>
             </a:r>
@@ -6045,12 +6334,17 @@
           </a:bodyPr>
           <a:lstStyle/>
           <a:p>
+            <a:pPr>
+              <a:defRPr>
+                <a:latin typeface="Roboto"/>
+              </a:defRPr>
+            </a:pPr>
             <a:r>
               <a:rPr sz="1600" b="0">
                 <a:solidFill>
                   <a:srgbClr val="25342A"/>
                 </a:solidFill>
-                <a:latin typeface="Arial"/>
+                <a:latin typeface="Roboto"/>
               </a:rPr>
               <a:t>Youth outreach cost $38,436 in full in October: $21,925 paid by the State Department of Families grant, and $16,511 of shared costs no grant covers. It has spent 97.5% of its budget to date, with $402,031 left and 20 months to go.</a:t>
             </a:r>
@@ -6098,7 +6392,11 @@
           <a:bodyPr rtlCol="0" anchor="ctr"/>
           <a:lstStyle/>
           <a:p>
-            <a:pPr algn="ctr"/>
+            <a:pPr algn="ctr">
+              <a:defRPr>
+                <a:latin typeface="Roboto"/>
+              </a:defRPr>
+            </a:pPr>
           </a:p>
         </p:txBody>
       </p:sp>
@@ -6124,12 +6422,17 @@
           </a:bodyPr>
           <a:lstStyle/>
           <a:p>
+            <a:pPr>
+              <a:defRPr>
+                <a:latin typeface="Roboto"/>
+              </a:defRPr>
+            </a:pPr>
             <a:r>
               <a:rPr sz="1100" b="1">
                 <a:solidFill>
                   <a:srgbClr val="5F6F63"/>
                 </a:solidFill>
-                <a:latin typeface="Arial"/>
+                <a:latin typeface="Roboto"/>
               </a:rPr>
               <a:t>WHAT YOU'D DO ABOUT IT</a:t>
             </a:r>
@@ -6158,12 +6461,17 @@
           </a:bodyPr>
           <a:lstStyle/>
           <a:p>
+            <a:pPr>
+              <a:defRPr>
+                <a:latin typeface="Roboto"/>
+              </a:defRPr>
+            </a:pPr>
             <a:r>
               <a:rPr sz="1600" b="0">
                 <a:solidFill>
                   <a:srgbClr val="25342A"/>
                 </a:solidFill>
-                <a:latin typeface="Arial"/>
+                <a:latin typeface="Roboto"/>
               </a:rPr>
               <a:t>The full cost is $38,436 a month; $16,511 of it is shared cost the grant doesn't pay for. Worth asking for as much of it as the funder allows at renewal.</a:t>
             </a:r>
@@ -6192,12 +6500,17 @@
           </a:bodyPr>
           <a:lstStyle/>
           <a:p>
+            <a:pPr>
+              <a:defRPr>
+                <a:latin typeface="Roboto"/>
+              </a:defRPr>
+            </a:pPr>
             <a:r>
               <a:rPr sz="900" b="0">
                 <a:solidFill>
                   <a:srgbClr val="5F6F63"/>
                 </a:solidFill>
-                <a:latin typeface="Arial"/>
+                <a:latin typeface="Roboto"/>
               </a:rPr>
               <a:t>program-cost.pptx</a:t>
             </a:r>
@@ -6226,13 +6539,17 @@
           </a:bodyPr>
           <a:lstStyle/>
           <a:p>
-            <a:pPr algn="ctr"/>
+            <a:pPr algn="ctr">
+              <a:defRPr>
+                <a:latin typeface="Roboto"/>
+              </a:defRPr>
+            </a:pPr>
             <a:r>
               <a:rPr sz="900" b="0">
                 <a:solidFill>
                   <a:srgbClr val="5F6F63"/>
                 </a:solidFill>
-                <a:latin typeface="Arial"/>
+                <a:latin typeface="Roboto"/>
               </a:rPr>
               <a:t>Data retrieved 2pm, Tue 6 Oct 2026 · Sample data</a:t>
             </a:r>
@@ -6261,13 +6578,17 @@
           </a:bodyPr>
           <a:lstStyle/>
           <a:p>
-            <a:pPr algn="r"/>
+            <a:pPr algn="r">
+              <a:defRPr>
+                <a:latin typeface="Roboto"/>
+              </a:defRPr>
+            </a:pPr>
             <a:r>
               <a:rPr sz="900" b="0">
                 <a:solidFill>
                   <a:srgbClr val="5F6F63"/>
                 </a:solidFill>
-                <a:latin typeface="Arial"/>
+                <a:latin typeface="Roboto"/>
               </a:rPr>
               <a:t>Slide 6 of 10</a:t>
             </a:r>
@@ -6331,7 +6652,11 @@
           <a:bodyPr rtlCol="0" anchor="ctr"/>
           <a:lstStyle/>
           <a:p>
-            <a:pPr algn="ctr"/>
+            <a:pPr algn="ctr">
+              <a:defRPr>
+                <a:latin typeface="Roboto"/>
+              </a:defRPr>
+            </a:pPr>
           </a:p>
         </p:txBody>
       </p:sp>
@@ -6357,12 +6682,17 @@
           </a:bodyPr>
           <a:lstStyle/>
           <a:p>
+            <a:pPr>
+              <a:defRPr>
+                <a:latin typeface="Roboto"/>
+              </a:defRPr>
+            </a:pPr>
             <a:r>
               <a:rPr sz="1000" b="0">
                 <a:solidFill>
                   <a:srgbClr val="5F6F63"/>
                 </a:solidFill>
-                <a:latin typeface="Arial"/>
+                <a:latin typeface="Roboto"/>
               </a:rPr>
               <a:t>Sample Community Services Ltd · What does each program really cost?</a:t>
             </a:r>
@@ -6391,12 +6721,17 @@
           </a:bodyPr>
           <a:lstStyle/>
           <a:p>
+            <a:pPr>
+              <a:defRPr>
+                <a:latin typeface="Roboto"/>
+              </a:defRPr>
+            </a:pPr>
             <a:r>
               <a:rPr sz="2400" b="1">
                 <a:solidFill>
                   <a:srgbClr val="25342A"/>
                 </a:solidFill>
-                <a:latin typeface="Arial"/>
+                <a:latin typeface="Roboto"/>
               </a:rPr>
               <a:t>What it shows · Program: Emergency relief</a:t>
             </a:r>
@@ -6444,7 +6779,11 @@
           <a:bodyPr rtlCol="0" anchor="ctr"/>
           <a:lstStyle/>
           <a:p>
-            <a:pPr algn="ctr"/>
+            <a:pPr algn="ctr">
+              <a:defRPr>
+                <a:latin typeface="Roboto"/>
+              </a:defRPr>
+            </a:pPr>
           </a:p>
         </p:txBody>
       </p:sp>
@@ -6470,12 +6809,17 @@
           </a:bodyPr>
           <a:lstStyle/>
           <a:p>
+            <a:pPr>
+              <a:defRPr>
+                <a:latin typeface="Roboto"/>
+              </a:defRPr>
+            </a:pPr>
             <a:r>
               <a:rPr sz="1100" b="1">
                 <a:solidFill>
                   <a:srgbClr val="5F6F63"/>
                 </a:solidFill>
-                <a:latin typeface="Arial"/>
+                <a:latin typeface="Roboto"/>
               </a:rPr>
               <a:t>WHAT IT SHOWS</a:t>
             </a:r>
@@ -6504,12 +6848,17 @@
           </a:bodyPr>
           <a:lstStyle/>
           <a:p>
+            <a:pPr>
+              <a:defRPr>
+                <a:latin typeface="Roboto"/>
+              </a:defRPr>
+            </a:pPr>
             <a:r>
               <a:rPr sz="1600" b="0">
                 <a:solidFill>
                   <a:srgbClr val="25342A"/>
                 </a:solidFill>
-                <a:latin typeface="Arial"/>
+                <a:latin typeface="Roboto"/>
               </a:rPr>
               <a:t>Emergency relief cost $21,563 in full in October: $12,300 paid by the Federal community grant grant, and $9,263 of shared costs no grant covers. It has spent 99.9% of its budget to date (spending before October 2024 taken at budget), with $24,300 left and 2 months to go.</a:t>
             </a:r>
@@ -6557,7 +6906,11 @@
           <a:bodyPr rtlCol="0" anchor="ctr"/>
           <a:lstStyle/>
           <a:p>
-            <a:pPr algn="ctr"/>
+            <a:pPr algn="ctr">
+              <a:defRPr>
+                <a:latin typeface="Roboto"/>
+              </a:defRPr>
+            </a:pPr>
           </a:p>
         </p:txBody>
       </p:sp>
@@ -6583,12 +6936,17 @@
           </a:bodyPr>
           <a:lstStyle/>
           <a:p>
+            <a:pPr>
+              <a:defRPr>
+                <a:latin typeface="Roboto"/>
+              </a:defRPr>
+            </a:pPr>
             <a:r>
               <a:rPr sz="1100" b="1">
                 <a:solidFill>
                   <a:srgbClr val="5F6F63"/>
                 </a:solidFill>
-                <a:latin typeface="Arial"/>
+                <a:latin typeface="Roboto"/>
               </a:rPr>
               <a:t>WHAT YOU'D DO ABOUT IT</a:t>
             </a:r>
@@ -6617,12 +6975,17 @@
           </a:bodyPr>
           <a:lstStyle/>
           <a:p>
+            <a:pPr>
+              <a:defRPr>
+                <a:latin typeface="Roboto"/>
+              </a:defRPr>
+            </a:pPr>
             <a:r>
               <a:rPr sz="1600" b="0">
                 <a:solidFill>
                   <a:srgbClr val="25342A"/>
                 </a:solidFill>
-                <a:latin typeface="Arial"/>
+                <a:latin typeface="Roboto"/>
               </a:rPr>
               <a:t>The full cost is $21,563 a month; $9,263 of it is shared cost the grant doesn't pay for. Worth asking for as much of it as the funder allows at renewal.</a:t>
             </a:r>
@@ -6651,12 +7014,17 @@
           </a:bodyPr>
           <a:lstStyle/>
           <a:p>
+            <a:pPr>
+              <a:defRPr>
+                <a:latin typeface="Roboto"/>
+              </a:defRPr>
+            </a:pPr>
             <a:r>
               <a:rPr sz="900" b="0">
                 <a:solidFill>
                   <a:srgbClr val="5F6F63"/>
                 </a:solidFill>
-                <a:latin typeface="Arial"/>
+                <a:latin typeface="Roboto"/>
               </a:rPr>
               <a:t>program-cost.pptx</a:t>
             </a:r>
@@ -6685,13 +7053,17 @@
           </a:bodyPr>
           <a:lstStyle/>
           <a:p>
-            <a:pPr algn="ctr"/>
+            <a:pPr algn="ctr">
+              <a:defRPr>
+                <a:latin typeface="Roboto"/>
+              </a:defRPr>
+            </a:pPr>
             <a:r>
               <a:rPr sz="900" b="0">
                 <a:solidFill>
                   <a:srgbClr val="5F6F63"/>
                 </a:solidFill>
-                <a:latin typeface="Arial"/>
+                <a:latin typeface="Roboto"/>
               </a:rPr>
               <a:t>Data retrieved 2pm, Tue 6 Oct 2026 · Sample data</a:t>
             </a:r>
@@ -6720,13 +7092,17 @@
           </a:bodyPr>
           <a:lstStyle/>
           <a:p>
-            <a:pPr algn="r"/>
+            <a:pPr algn="r">
+              <a:defRPr>
+                <a:latin typeface="Roboto"/>
+              </a:defRPr>
+            </a:pPr>
             <a:r>
               <a:rPr sz="900" b="0">
                 <a:solidFill>
                   <a:srgbClr val="5F6F63"/>
                 </a:solidFill>
-                <a:latin typeface="Arial"/>
+                <a:latin typeface="Roboto"/>
               </a:rPr>
               <a:t>Slide 7 of 10</a:t>
             </a:r>
@@ -6790,7 +7166,11 @@
           <a:bodyPr rtlCol="0" anchor="ctr"/>
           <a:lstStyle/>
           <a:p>
-            <a:pPr algn="ctr"/>
+            <a:pPr algn="ctr">
+              <a:defRPr>
+                <a:latin typeface="Roboto"/>
+              </a:defRPr>
+            </a:pPr>
           </a:p>
         </p:txBody>
       </p:sp>
@@ -6816,12 +7196,17 @@
           </a:bodyPr>
           <a:lstStyle/>
           <a:p>
+            <a:pPr>
+              <a:defRPr>
+                <a:latin typeface="Roboto"/>
+              </a:defRPr>
+            </a:pPr>
             <a:r>
               <a:rPr sz="1000" b="0">
                 <a:solidFill>
                   <a:srgbClr val="5F6F63"/>
                 </a:solidFill>
-                <a:latin typeface="Arial"/>
+                <a:latin typeface="Roboto"/>
               </a:rPr>
               <a:t>Sample Community Services Ltd · What does each program really cost?</a:t>
             </a:r>
@@ -6850,12 +7235,17 @@
           </a:bodyPr>
           <a:lstStyle/>
           <a:p>
+            <a:pPr>
+              <a:defRPr>
+                <a:latin typeface="Roboto"/>
+              </a:defRPr>
+            </a:pPr>
             <a:r>
               <a:rPr sz="2400" b="1">
                 <a:solidFill>
                   <a:srgbClr val="25342A"/>
                 </a:solidFill>
-                <a:latin typeface="Arial"/>
+                <a:latin typeface="Roboto"/>
               </a:rPr>
               <a:t>What it shows · Program: Digital literacy</a:t>
             </a:r>
@@ -6903,7 +7293,11 @@
           <a:bodyPr rtlCol="0" anchor="ctr"/>
           <a:lstStyle/>
           <a:p>
-            <a:pPr algn="ctr"/>
+            <a:pPr algn="ctr">
+              <a:defRPr>
+                <a:latin typeface="Roboto"/>
+              </a:defRPr>
+            </a:pPr>
           </a:p>
         </p:txBody>
       </p:sp>
@@ -6929,12 +7323,17 @@
           </a:bodyPr>
           <a:lstStyle/>
           <a:p>
+            <a:pPr>
+              <a:defRPr>
+                <a:latin typeface="Roboto"/>
+              </a:defRPr>
+            </a:pPr>
             <a:r>
               <a:rPr sz="1100" b="1">
                 <a:solidFill>
                   <a:srgbClr val="5F6F63"/>
                 </a:solidFill>
-                <a:latin typeface="Arial"/>
+                <a:latin typeface="Roboto"/>
               </a:rPr>
               <a:t>WHAT IT SHOWS</a:t>
             </a:r>
@@ -6963,12 +7362,17 @@
           </a:bodyPr>
           <a:lstStyle/>
           <a:p>
+            <a:pPr>
+              <a:defRPr>
+                <a:latin typeface="Roboto"/>
+              </a:defRPr>
+            </a:pPr>
             <a:r>
               <a:rPr sz="1600" b="0">
                 <a:solidFill>
                   <a:srgbClr val="25342A"/>
                 </a:solidFill>
-                <a:latin typeface="Arial"/>
+                <a:latin typeface="Roboto"/>
               </a:rPr>
               <a:t>Digital literacy cost $9,046 in full in October: $5,160 paid by the Philanthropic foundation grant, and $3,886 of shared costs no grant covers. It has spent 103.2% of its budget to date, with $84,840 left and 17 months to go.</a:t>
             </a:r>
@@ -7016,7 +7420,11 @@
           <a:bodyPr rtlCol="0" anchor="ctr"/>
           <a:lstStyle/>
           <a:p>
-            <a:pPr algn="ctr"/>
+            <a:pPr algn="ctr">
+              <a:defRPr>
+                <a:latin typeface="Roboto"/>
+              </a:defRPr>
+            </a:pPr>
           </a:p>
         </p:txBody>
       </p:sp>
@@ -7042,12 +7450,17 @@
           </a:bodyPr>
           <a:lstStyle/>
           <a:p>
+            <a:pPr>
+              <a:defRPr>
+                <a:latin typeface="Roboto"/>
+              </a:defRPr>
+            </a:pPr>
             <a:r>
               <a:rPr sz="1100" b="1">
                 <a:solidFill>
                   <a:srgbClr val="5F6F63"/>
                 </a:solidFill>
-                <a:latin typeface="Arial"/>
+                <a:latin typeface="Roboto"/>
               </a:rPr>
               <a:t>WHAT YOU'D DO ABOUT IT</a:t>
             </a:r>
@@ -7076,12 +7489,17 @@
           </a:bodyPr>
           <a:lstStyle/>
           <a:p>
+            <a:pPr>
+              <a:defRPr>
+                <a:latin typeface="Roboto"/>
+              </a:defRPr>
+            </a:pPr>
             <a:r>
               <a:rPr sz="1600" b="0">
                 <a:solidFill>
                   <a:srgbClr val="25342A"/>
                 </a:solidFill>
-                <a:latin typeface="Arial"/>
+                <a:latin typeface="Roboto"/>
               </a:rPr>
               <a:t>The full cost is $9,046 a month; $3,886 of it is shared cost the grant doesn't pay for. Worth asking for as much of it as the funder allows at renewal.</a:t>
             </a:r>
@@ -7110,12 +7528,17 @@
           </a:bodyPr>
           <a:lstStyle/>
           <a:p>
+            <a:pPr>
+              <a:defRPr>
+                <a:latin typeface="Roboto"/>
+              </a:defRPr>
+            </a:pPr>
             <a:r>
               <a:rPr sz="900" b="0">
                 <a:solidFill>
                   <a:srgbClr val="5F6F63"/>
                 </a:solidFill>
-                <a:latin typeface="Arial"/>
+                <a:latin typeface="Roboto"/>
               </a:rPr>
               <a:t>program-cost.pptx</a:t>
             </a:r>
@@ -7144,13 +7567,17 @@
           </a:bodyPr>
           <a:lstStyle/>
           <a:p>
-            <a:pPr algn="ctr"/>
+            <a:pPr algn="ctr">
+              <a:defRPr>
+                <a:latin typeface="Roboto"/>
+              </a:defRPr>
+            </a:pPr>
             <a:r>
               <a:rPr sz="900" b="0">
                 <a:solidFill>
                   <a:srgbClr val="5F6F63"/>
                 </a:solidFill>
-                <a:latin typeface="Arial"/>
+                <a:latin typeface="Roboto"/>
               </a:rPr>
               <a:t>Data retrieved 2pm, Tue 6 Oct 2026 · Sample data</a:t>
             </a:r>
@@ -7179,13 +7606,17 @@
           </a:bodyPr>
           <a:lstStyle/>
           <a:p>
-            <a:pPr algn="r"/>
+            <a:pPr algn="r">
+              <a:defRPr>
+                <a:latin typeface="Roboto"/>
+              </a:defRPr>
+            </a:pPr>
             <a:r>
               <a:rPr sz="900" b="0">
                 <a:solidFill>
                   <a:srgbClr val="5F6F63"/>
                 </a:solidFill>
-                <a:latin typeface="Arial"/>
+                <a:latin typeface="Roboto"/>
               </a:rPr>
               <a:t>Slide 8 of 10</a:t>
             </a:r>
@@ -7249,7 +7680,11 @@
           <a:bodyPr rtlCol="0" anchor="ctr"/>
           <a:lstStyle/>
           <a:p>
-            <a:pPr algn="ctr"/>
+            <a:pPr algn="ctr">
+              <a:defRPr>
+                <a:latin typeface="Roboto"/>
+              </a:defRPr>
+            </a:pPr>
           </a:p>
         </p:txBody>
       </p:sp>
@@ -7275,12 +7710,17 @@
           </a:bodyPr>
           <a:lstStyle/>
           <a:p>
+            <a:pPr>
+              <a:defRPr>
+                <a:latin typeface="Roboto"/>
+              </a:defRPr>
+            </a:pPr>
             <a:r>
               <a:rPr sz="1000" b="0">
                 <a:solidFill>
                   <a:srgbClr val="5F6F63"/>
                 </a:solidFill>
-                <a:latin typeface="Arial"/>
+                <a:latin typeface="Roboto"/>
               </a:rPr>
               <a:t>Sample Community Services Ltd · What does each program really cost?</a:t>
             </a:r>
@@ -7309,12 +7749,17 @@
           </a:bodyPr>
           <a:lstStyle/>
           <a:p>
+            <a:pPr>
+              <a:defRPr>
+                <a:latin typeface="Roboto"/>
+              </a:defRPr>
+            </a:pPr>
             <a:r>
               <a:rPr sz="2400" b="1">
                 <a:solidFill>
                   <a:srgbClr val="25342A"/>
                 </a:solidFill>
-                <a:latin typeface="Arial"/>
+                <a:latin typeface="Roboto"/>
               </a:rPr>
               <a:t>What it shows · Program: Community meals (2025-26)</a:t>
             </a:r>
@@ -7362,7 +7807,11 @@
           <a:bodyPr rtlCol="0" anchor="ctr"/>
           <a:lstStyle/>
           <a:p>
-            <a:pPr algn="ctr"/>
+            <a:pPr algn="ctr">
+              <a:defRPr>
+                <a:latin typeface="Roboto"/>
+              </a:defRPr>
+            </a:pPr>
           </a:p>
         </p:txBody>
       </p:sp>
@@ -7388,12 +7837,17 @@
           </a:bodyPr>
           <a:lstStyle/>
           <a:p>
+            <a:pPr>
+              <a:defRPr>
+                <a:latin typeface="Roboto"/>
+              </a:defRPr>
+            </a:pPr>
             <a:r>
               <a:rPr sz="1100" b="1">
                 <a:solidFill>
                   <a:srgbClr val="5F6F63"/>
                 </a:solidFill>
-                <a:latin typeface="Arial"/>
+                <a:latin typeface="Roboto"/>
               </a:rPr>
               <a:t>WHAT IT SHOWS</a:t>
             </a:r>
@@ -7422,12 +7876,17 @@
           </a:bodyPr>
           <a:lstStyle/>
           <a:p>
+            <a:pPr>
+              <a:defRPr>
+                <a:latin typeface="Roboto"/>
+              </a:defRPr>
+            </a:pPr>
             <a:r>
               <a:rPr sz="1600" b="0">
                 <a:solidFill>
                   <a:srgbClr val="25342A"/>
                 </a:solidFill>
-                <a:latin typeface="Arial"/>
+                <a:latin typeface="Roboto"/>
               </a:rPr>
               <a:t>Community meals (2025-26) cost $5,610 in full in October: $3,200 paid by the Local council community grant grant, and $2,410 of shared costs no grant covers. It has spent 96.1% of its budget to date, with $29,900 left and 8 months to go.</a:t>
             </a:r>
@@ -7475,7 +7934,11 @@
           <a:bodyPr rtlCol="0" anchor="ctr"/>
           <a:lstStyle/>
           <a:p>
-            <a:pPr algn="ctr"/>
+            <a:pPr algn="ctr">
+              <a:defRPr>
+                <a:latin typeface="Roboto"/>
+              </a:defRPr>
+            </a:pPr>
           </a:p>
         </p:txBody>
       </p:sp>
@@ -7501,12 +7964,17 @@
           </a:bodyPr>
           <a:lstStyle/>
           <a:p>
+            <a:pPr>
+              <a:defRPr>
+                <a:latin typeface="Roboto"/>
+              </a:defRPr>
+            </a:pPr>
             <a:r>
               <a:rPr sz="1100" b="1">
                 <a:solidFill>
                   <a:srgbClr val="5F6F63"/>
                 </a:solidFill>
-                <a:latin typeface="Arial"/>
+                <a:latin typeface="Roboto"/>
               </a:rPr>
               <a:t>WHAT YOU'D DO ABOUT IT</a:t>
             </a:r>
@@ -7535,12 +8003,17 @@
           </a:bodyPr>
           <a:lstStyle/>
           <a:p>
+            <a:pPr>
+              <a:defRPr>
+                <a:latin typeface="Roboto"/>
+              </a:defRPr>
+            </a:pPr>
             <a:r>
               <a:rPr sz="1600" b="0">
                 <a:solidFill>
                   <a:srgbClr val="25342A"/>
                 </a:solidFill>
-                <a:latin typeface="Arial"/>
+                <a:latin typeface="Roboto"/>
               </a:rPr>
               <a:t>The full cost is $5,610 a month; $2,410 of it is shared cost the grant doesn't pay for. Worth asking for as much of it as the funder allows at renewal.</a:t>
             </a:r>
@@ -7569,12 +8042,17 @@
           </a:bodyPr>
           <a:lstStyle/>
           <a:p>
+            <a:pPr>
+              <a:defRPr>
+                <a:latin typeface="Roboto"/>
+              </a:defRPr>
+            </a:pPr>
             <a:r>
               <a:rPr sz="900" b="0">
                 <a:solidFill>
                   <a:srgbClr val="5F6F63"/>
                 </a:solidFill>
-                <a:latin typeface="Arial"/>
+                <a:latin typeface="Roboto"/>
               </a:rPr>
               <a:t>program-cost.pptx</a:t>
             </a:r>
@@ -7603,13 +8081,17 @@
           </a:bodyPr>
           <a:lstStyle/>
           <a:p>
-            <a:pPr algn="ctr"/>
+            <a:pPr algn="ctr">
+              <a:defRPr>
+                <a:latin typeface="Roboto"/>
+              </a:defRPr>
+            </a:pPr>
             <a:r>
               <a:rPr sz="900" b="0">
                 <a:solidFill>
                   <a:srgbClr val="5F6F63"/>
                 </a:solidFill>
-                <a:latin typeface="Arial"/>
+                <a:latin typeface="Roboto"/>
               </a:rPr>
               <a:t>Data retrieved 2pm, Tue 6 Oct 2026 · Sample data</a:t>
             </a:r>
@@ -7638,13 +8120,17 @@
           </a:bodyPr>
           <a:lstStyle/>
           <a:p>
-            <a:pPr algn="r"/>
+            <a:pPr algn="r">
+              <a:defRPr>
+                <a:latin typeface="Roboto"/>
+              </a:defRPr>
+            </a:pPr>
             <a:r>
               <a:rPr sz="900" b="0">
                 <a:solidFill>
                   <a:srgbClr val="5F6F63"/>
                 </a:solidFill>
-                <a:latin typeface="Arial"/>
+                <a:latin typeface="Roboto"/>
               </a:rPr>
               <a:t>Slide 9 of 10</a:t>
             </a:r>

--- a/media/exports/reports/2025-10/program-cost.pptx
+++ b/media/exports/reports/2025-10/program-cost.pptx
@@ -6,15 +6,12 @@
   </p:sldMasterIdLst>
   <p:sldIdLst>
     <p:sldId id="256" r:id="rId7"/>
-    <p:sldId id="257" r:id="rId8"/>
-    <p:sldId id="258" r:id="rId9"/>
-    <p:sldId id="259" r:id="rId10"/>
-    <p:sldId id="260" r:id="rId11"/>
-    <p:sldId id="261" r:id="rId12"/>
-    <p:sldId id="262" r:id="rId13"/>
-    <p:sldId id="263" r:id="rId14"/>
-    <p:sldId id="264" r:id="rId15"/>
-    <p:sldId id="265" r:id="rId16"/>
+    <p:sldId id="257" r:id="rId9"/>
+    <p:sldId id="258" r:id="rId10"/>
+    <p:sldId id="259" r:id="rId11"/>
+    <p:sldId id="260" r:id="rId12"/>
+    <p:sldId id="261" r:id="rId13"/>
+    <p:sldId id="262" r:id="rId14"/>
   </p:sldIdLst>
   <p:sldSz cx="12191695" cy="6858000" type="screen4x3"/>
   <p:notesSz cx="6858000" cy="9144000"/>
@@ -120,8 +117,19 @@
 <c:chartSpace xmlns:c="http://schemas.openxmlformats.org/drawingml/2006/chart" xmlns:a="http://schemas.openxmlformats.org/drawingml/2006/main" xmlns:r="http://schemas.openxmlformats.org/officeDocument/2006/relationships">
   <c:date1904 val="0"/>
   <c:chart>
-    <c:autoTitleDeleted val="0"/>
+    <c:autoTitleDeleted val="1"/>
     <c:plotArea>
+      <c:layout>
+        <c:manualLayout>
+          <c:layoutTarget val="inner"/>
+          <c:xMode val="edge"/>
+          <c:yMode val="edge"/>
+          <c:x val="0.3"/>
+          <c:y val="0.03"/>
+          <c:w val="0.58"/>
+          <c:h val="0.88"/>
+        </c:manualLayout>
+      </c:layout>
       <c:barChart>
         <c:barDir val="bar"/>
         <c:grouping val="clustered"/>
@@ -134,7 +142,7 @@
               <c:strCache>
                 <c:ptCount val="1"/>
                 <c:pt idx="0">
-                  <c:v>Value</c:v>
+                  <c:v>$</c:v>
                 </c:pt>
               </c:strCache>
             </c:strRef>
@@ -234,7 +242,7 @@
             <a:lstStyle/>
             <a:p>
               <a:pPr>
-                <a:defRPr sz="1100"/>
+                <a:defRPr sz="1000"/>
               </a:pPr>
             </a:p>
           </c:txPr>
@@ -271,7 +279,7 @@
           <a:lstStyle/>
           <a:p>
             <a:pPr>
-              <a:defRPr sz="1200"/>
+              <a:defRPr sz="1100"/>
             </a:pPr>
           </a:p>
         </c:txPr>
@@ -284,7 +292,10 @@
       </c:catAx>
       <c:valAx>
         <c:axId val="-2113994440"/>
-        <c:scaling/>
+        <c:scaling>
+          <c:max val="53625.649999999994"/>
+          <c:min val="0.0"/>
+        </c:scaling>
         <c:delete/>
         <c:axPos val="b"/>
         <c:majorTickMark val="out"/>
@@ -317,209 +328,21 @@
 <file path=ppt/charts/chart2.xml><?xml version="1.0" encoding="utf-8"?>
 <c:chartSpace xmlns:c="http://schemas.openxmlformats.org/drawingml/2006/chart" xmlns:a="http://schemas.openxmlformats.org/drawingml/2006/main" xmlns:r="http://schemas.openxmlformats.org/officeDocument/2006/relationships">
   <c:date1904 val="0"/>
-  <c:chart>
-    <c:autoTitleDeleted val="0"/>
-    <c:plotArea>
-      <c:barChart>
-        <c:barDir val="bar"/>
-        <c:grouping val="clustered"/>
-        <c:ser>
-          <c:idx val="0"/>
-          <c:order val="0"/>
-          <c:tx>
-            <c:strRef>
-              <c:f>Sheet1!$B$1</c:f>
-              <c:strCache>
-                <c:ptCount val="1"/>
-                <c:pt idx="0">
-                  <c:v>Value</c:v>
-                </c:pt>
-              </c:strCache>
-            </c:strRef>
-          </c:tx>
-          <c:dPt>
-            <c:idx val="0"/>
-            <c:spPr>
-              <a:solidFill>
-                <a:srgbClr val="0E9F6E"/>
-              </a:solidFill>
-            </c:spPr>
-          </c:dPt>
-          <c:dPt>
-            <c:idx val="1"/>
-            <c:spPr>
-              <a:solidFill>
-                <a:srgbClr val="0E9F6E"/>
-              </a:solidFill>
-            </c:spPr>
-          </c:dPt>
-          <c:dPt>
-            <c:idx val="2"/>
-            <c:spPr>
-              <a:solidFill>
-                <a:srgbClr val="0E9F6E"/>
-              </a:solidFill>
-            </c:spPr>
-          </c:dPt>
-          <c:dPt>
-            <c:idx val="3"/>
-            <c:spPr>
-              <a:solidFill>
-                <a:srgbClr val="0E9F6E"/>
-              </a:solidFill>
-            </c:spPr>
-          </c:dPt>
-          <c:dPt>
-            <c:idx val="4"/>
-            <c:spPr>
-              <a:solidFill>
-                <a:srgbClr val="0E9F6E"/>
-              </a:solidFill>
-            </c:spPr>
-          </c:dPt>
-          <c:cat>
-            <c:strRef>
-              <c:f>Sheet1!$A$2:$A$6</c:f>
-              <c:strCache>
-                <c:ptCount val="5"/>
-                <c:pt idx="0">
-                  <c:v>Community meals (2025-26)</c:v>
-                </c:pt>
-                <c:pt idx="1">
-                  <c:v>Digital literacy</c:v>
-                </c:pt>
-                <c:pt idx="2">
-                  <c:v>Emergency relief</c:v>
-                </c:pt>
-                <c:pt idx="3">
-                  <c:v>Youth outreach</c:v>
-                </c:pt>
-                <c:pt idx="4">
-                  <c:v>Housing support (2025)</c:v>
-                </c:pt>
-              </c:strCache>
-            </c:strRef>
-          </c:cat>
-          <c:val>
-            <c:numRef>
-              <c:f>Sheet1!$B$2:$B$6</c:f>
-              <c:numCache>
-                <c:formatCode>0.0"%";[Red](0.0"%")</c:formatCode>
-                <c:ptCount val="5"/>
-                <c:pt idx="0">
-                  <c:v>4.6</c:v>
-                </c:pt>
-                <c:pt idx="1">
-                  <c:v>7.5</c:v>
-                </c:pt>
-                <c:pt idx="2">
-                  <c:v>17.8</c:v>
-                </c:pt>
-                <c:pt idx="3">
-                  <c:v>31.7</c:v>
-                </c:pt>
-                <c:pt idx="4">
-                  <c:v>38.4</c:v>
-                </c:pt>
-              </c:numCache>
-            </c:numRef>
-          </c:val>
-        </c:ser>
-        <c:dLbls>
-          <c:numFmt formatCode="0.0&quot;%&quot;;[Red](0.0&quot;%&quot;)" sourceLinked="0"/>
-          <c:txPr>
-            <a:bodyPr/>
-            <a:lstStyle/>
-            <a:p>
-              <a:pPr>
-                <a:defRPr sz="1100"/>
-              </a:pPr>
-            </a:p>
-          </c:txPr>
-          <c:dLblPos val="outEnd"/>
-          <c:showLegendKey val="0"/>
-          <c:showVal val="1"/>
-          <c:showCatName val="0"/>
-          <c:showSerName val="0"/>
-          <c:showPercent val="0"/>
-          <c:showBubbleSize val="0"/>
-          <c:showLeaderLines val="1"/>
-        </c:dLbls>
-        <c:gapWidth val="60"/>
-        <c:axId val="-2068027336"/>
-        <c:axId val="-2113994440"/>
-      </c:barChart>
-      <c:catAx>
-        <c:axId val="-2068027336"/>
-        <c:scaling>
-          <c:orientation val="minMax"/>
-        </c:scaling>
-        <c:delete val="0"/>
-        <c:axPos val="l"/>
-        <c:majorTickMark val="out"/>
-        <c:minorTickMark val="none"/>
-        <c:tickLblPos val="nextTo"/>
-        <c:spPr>
-          <a:ln>
-            <a:noFill/>
-          </a:ln>
-        </c:spPr>
-        <c:txPr>
-          <a:bodyPr/>
-          <a:lstStyle/>
-          <a:p>
-            <a:pPr>
-              <a:defRPr sz="1200"/>
-            </a:pPr>
-          </a:p>
-        </c:txPr>
-        <c:crossAx val="-2113994440"/>
-        <c:crosses val="autoZero"/>
-        <c:auto val="1"/>
-        <c:lblAlgn val="ctr"/>
-        <c:lblOffset val="100"/>
-        <c:noMultiLvlLbl val="0"/>
-      </c:catAx>
-      <c:valAx>
-        <c:axId val="-2113994440"/>
-        <c:scaling/>
-        <c:delete/>
-        <c:axPos val="b"/>
-        <c:majorTickMark val="out"/>
-        <c:minorTickMark val="none"/>
-        <c:tickLblPos val="nextTo"/>
-        <c:crossAx val="-2068027336"/>
-        <c:crosses val="autoZero"/>
-      </c:valAx>
-    </c:plotArea>
-    <c:dispBlanksAs val="gap"/>
-  </c:chart>
-  <c:txPr>
-    <a:bodyPr/>
-    <a:lstStyle/>
-    <a:p>
-      <a:pPr>
-        <a:defRPr sz="1800">
-          <a:latin typeface="Roboto"/>
-        </a:defRPr>
-      </a:pPr>
-      <a:endParaRPr lang="en-US"/>
-    </a:p>
-  </c:txPr>
-  <c:externalData r:id="rId1">
-    <c:autoUpdate val="0"/>
-  </c:externalData>
-</c:chartSpace>
-</file>
-
-<file path=ppt/charts/chart3.xml><?xml version="1.0" encoding="utf-8"?>
-<c:chartSpace xmlns:c="http://schemas.openxmlformats.org/drawingml/2006/chart" xmlns:a="http://schemas.openxmlformats.org/drawingml/2006/main" xmlns:r="http://schemas.openxmlformats.org/officeDocument/2006/relationships">
-  <c:date1904 val="0"/>
   <c:roundedCorners val="0"/>
   <c:chart>
-    <c:autoTitleDeleted val="0"/>
+    <c:autoTitleDeleted val="1"/>
     <c:plotArea>
-      <c:layout/>
+      <c:layout>
+        <c:manualLayout>
+          <c:layoutTarget val="inner"/>
+          <c:xMode val="edge"/>
+          <c:yMode val="edge"/>
+          <c:x val="0.11"/>
+          <c:y val="0.05"/>
+          <c:w val="0.86"/>
+          <c:h val="0.8"/>
+        </c:manualLayout>
+      </c:layout>
       <c:areaChart>
         <c:grouping val="standard"/>
         <c:varyColors val="0"/>
@@ -532,7 +355,7 @@
               <c:strCache>
                 <c:ptCount val="1"/>
                 <c:pt idx="0">
-                  <c:v>Value</c:v>
+                  <c:v>Spend $</c:v>
                 </c:pt>
               </c:strCache>
             </c:strRef>
@@ -603,43 +426,43 @@
                 <c:formatCode>$#,##0;[Red]($#,##0);"-"</c:formatCode>
                 <c:ptCount val="13"/>
                 <c:pt idx="0">
+                  <c:v>0</c:v>
+                </c:pt>
+                <c:pt idx="1">
+                  <c:v>0</c:v>
+                </c:pt>
+                <c:pt idx="2">
+                  <c:v>0</c:v>
+                </c:pt>
+                <c:pt idx="3">
+                  <c:v>31100</c:v>
+                </c:pt>
+                <c:pt idx="4">
+                  <c:v>31300</c:v>
+                </c:pt>
+                <c:pt idx="5">
+                  <c:v>24200</c:v>
+                </c:pt>
+                <c:pt idx="6">
                   <c:v>26600</c:v>
                 </c:pt>
-                <c:pt idx="1">
-                  <c:v>31800</c:v>
-                </c:pt>
-                <c:pt idx="2">
-                  <c:v>29700</c:v>
-                </c:pt>
-                <c:pt idx="3">
-                  <c:v>62700</c:v>
-                </c:pt>
-                <c:pt idx="4">
-                  <c:v>61700</c:v>
-                </c:pt>
-                <c:pt idx="5">
-                  <c:v>54500</c:v>
-                </c:pt>
-                <c:pt idx="6">
-                  <c:v>61500</c:v>
-                </c:pt>
                 <c:pt idx="7">
-                  <c:v>61700</c:v>
+                  <c:v>30900</c:v>
                 </c:pt>
                 <c:pt idx="8">
-                  <c:v>52200</c:v>
+                  <c:v>24100</c:v>
                 </c:pt>
                 <c:pt idx="9">
-                  <c:v>59063</c:v>
+                  <c:v>28100</c:v>
                 </c:pt>
                 <c:pt idx="10">
-                  <c:v>61544</c:v>
+                  <c:v>26300</c:v>
                 </c:pt>
                 <c:pt idx="11">
-                  <c:v>62137</c:v>
+                  <c:v>27700</c:v>
                 </c:pt>
                 <c:pt idx="12">
-                  <c:v>69185</c:v>
+                  <c:v>26600</c:v>
                 </c:pt>
               </c:numCache>
             </c:numRef>
@@ -681,12 +504,15 @@
         <c:auto val="1"/>
         <c:lblAlgn val="ctr"/>
         <c:lblOffset val="100"/>
+        <c:tickLblSkip val="2"/>
         <c:noMultiLvlLbl val="0"/>
       </c:catAx>
       <c:valAx>
         <c:axId val="-2100718248"/>
         <c:scaling>
           <c:orientation val="minMax"/>
+          <c:max val="40000.0"/>
+          <c:min val="0.0"/>
         </c:scaling>
         <c:delete val="0"/>
         <c:axPos val="l"/>
@@ -720,6 +546,7 @@
         <c:crossAx val="-2101159928"/>
         <c:crosses val="autoZero"/>
         <c:crossBetween val="midCat"/>
+        <c:majorUnit val="10000.0"/>
       </c:valAx>
     </c:plotArea>
     <c:plotVisOnly val="1"/>
@@ -742,6 +569,1830 @@
     <c:autoUpdate val="0"/>
   </c:externalData>
 </c:chartSpace>
+</file>
+
+<file path=ppt/charts/chart3.xml><?xml version="1.0" encoding="utf-8"?>
+<c:chartSpace xmlns:c="http://schemas.openxmlformats.org/drawingml/2006/chart" xmlns:a="http://schemas.openxmlformats.org/drawingml/2006/main" xmlns:r="http://schemas.openxmlformats.org/officeDocument/2006/relationships">
+  <c:date1904 val="0"/>
+  <c:roundedCorners val="0"/>
+  <c:chart>
+    <c:autoTitleDeleted val="1"/>
+    <c:plotArea>
+      <c:layout>
+        <c:manualLayout>
+          <c:layoutTarget val="inner"/>
+          <c:xMode val="edge"/>
+          <c:yMode val="edge"/>
+          <c:x val="0.11"/>
+          <c:y val="0.05"/>
+          <c:w val="0.86"/>
+          <c:h val="0.8"/>
+        </c:manualLayout>
+      </c:layout>
+      <c:areaChart>
+        <c:grouping val="standard"/>
+        <c:varyColors val="0"/>
+        <c:ser>
+          <c:idx val="0"/>
+          <c:order val="0"/>
+          <c:tx>
+            <c:strRef>
+              <c:f>Sheet1!$B$1</c:f>
+              <c:strCache>
+                <c:ptCount val="1"/>
+                <c:pt idx="0">
+                  <c:v>Spend $</c:v>
+                </c:pt>
+              </c:strCache>
+            </c:strRef>
+          </c:tx>
+          <c:spPr>
+            <a:solidFill>
+              <a:srgbClr val="0E9F6E">
+                <a:alpha val="25000"/>
+              </a:srgbClr>
+            </a:solidFill>
+            <a:ln w="31750">
+              <a:solidFill>
+                <a:srgbClr val="0E9F6E"/>
+              </a:solidFill>
+            </a:ln>
+          </c:spPr>
+          <c:cat>
+            <c:strRef>
+              <c:f>Sheet1!$A$2:$A$14</c:f>
+              <c:strCache>
+                <c:ptCount val="13"/>
+                <c:pt idx="0">
+                  <c:v>Oct 24</c:v>
+                </c:pt>
+                <c:pt idx="1">
+                  <c:v>Nov 24</c:v>
+                </c:pt>
+                <c:pt idx="2">
+                  <c:v>Dec 24</c:v>
+                </c:pt>
+                <c:pt idx="3">
+                  <c:v>Jan 25</c:v>
+                </c:pt>
+                <c:pt idx="4">
+                  <c:v>Feb 25</c:v>
+                </c:pt>
+                <c:pt idx="5">
+                  <c:v>Mar 25</c:v>
+                </c:pt>
+                <c:pt idx="6">
+                  <c:v>Apr 25</c:v>
+                </c:pt>
+                <c:pt idx="7">
+                  <c:v>May 25</c:v>
+                </c:pt>
+                <c:pt idx="8">
+                  <c:v>Jun 25</c:v>
+                </c:pt>
+                <c:pt idx="9">
+                  <c:v>Jul 25</c:v>
+                </c:pt>
+                <c:pt idx="10">
+                  <c:v>Aug 25</c:v>
+                </c:pt>
+                <c:pt idx="11">
+                  <c:v>Sep 25</c:v>
+                </c:pt>
+                <c:pt idx="12">
+                  <c:v>Oct 25</c:v>
+                </c:pt>
+              </c:strCache>
+            </c:strRef>
+          </c:cat>
+          <c:val>
+            <c:numRef>
+              <c:f>Sheet1!$B$2:$B$14</c:f>
+              <c:numCache>
+                <c:formatCode>$#,##0;[Red]($#,##0);"-"</c:formatCode>
+                <c:ptCount val="13"/>
+                <c:pt idx="0">
+                  <c:v>0</c:v>
+                </c:pt>
+                <c:pt idx="1">
+                  <c:v>0</c:v>
+                </c:pt>
+                <c:pt idx="2">
+                  <c:v>0</c:v>
+                </c:pt>
+                <c:pt idx="3">
+                  <c:v>0</c:v>
+                </c:pt>
+                <c:pt idx="4">
+                  <c:v>0</c:v>
+                </c:pt>
+                <c:pt idx="5">
+                  <c:v>0</c:v>
+                </c:pt>
+                <c:pt idx="6">
+                  <c:v>0</c:v>
+                </c:pt>
+                <c:pt idx="7">
+                  <c:v>0</c:v>
+                </c:pt>
+                <c:pt idx="8">
+                  <c:v>0</c:v>
+                </c:pt>
+                <c:pt idx="9">
+                  <c:v>17363</c:v>
+                </c:pt>
+                <c:pt idx="10">
+                  <c:v>21144</c:v>
+                </c:pt>
+                <c:pt idx="11">
+                  <c:v>17537</c:v>
+                </c:pt>
+                <c:pt idx="12">
+                  <c:v>21925</c:v>
+                </c:pt>
+              </c:numCache>
+            </c:numRef>
+          </c:val>
+        </c:ser>
+        <c:dLbls>
+          <c:showLegendKey val="0"/>
+          <c:showVal val="0"/>
+          <c:showCatName val="0"/>
+          <c:showSerName val="0"/>
+          <c:showPercent val="0"/>
+          <c:showBubbleSize val="0"/>
+        </c:dLbls>
+        <c:axId val="-2101159928"/>
+        <c:axId val="-2100718248"/>
+      </c:areaChart>
+      <c:catAx>
+        <c:axId val="-2101159928"/>
+        <c:scaling>
+          <c:orientation val="minMax"/>
+        </c:scaling>
+        <c:delete val="0"/>
+        <c:axPos val="b"/>
+        <c:numFmt formatCode="General" sourceLinked="1"/>
+        <c:majorTickMark val="out"/>
+        <c:minorTickMark val="none"/>
+        <c:tickLblPos val="nextTo"/>
+        <c:txPr>
+          <a:bodyPr/>
+          <a:lstStyle/>
+          <a:p>
+            <a:pPr>
+              <a:defRPr sz="1000"/>
+            </a:pPr>
+          </a:p>
+        </c:txPr>
+        <c:crossAx val="-2100718248"/>
+        <c:crosses val="autoZero"/>
+        <c:auto val="1"/>
+        <c:lblAlgn val="ctr"/>
+        <c:lblOffset val="100"/>
+        <c:tickLblSkip val="2"/>
+        <c:noMultiLvlLbl val="0"/>
+      </c:catAx>
+      <c:valAx>
+        <c:axId val="-2100718248"/>
+        <c:scaling>
+          <c:orientation val="minMax"/>
+          <c:max val="25000.0"/>
+          <c:min val="0.0"/>
+        </c:scaling>
+        <c:delete val="0"/>
+        <c:axPos val="l"/>
+        <c:majorGridlines>
+          <c:spPr>
+            <a:ln>
+              <a:solidFill>
+                <a:srgbClr val="E6EAE7"/>
+              </a:solidFill>
+            </a:ln>
+          </c:spPr>
+        </c:majorGridlines>
+        <c:numFmt formatCode="$#,##0;[Red]($#,##0);&quot;-&quot;" sourceLinked="0"/>
+        <c:majorTickMark val="out"/>
+        <c:minorTickMark val="none"/>
+        <c:tickLblPos val="nextTo"/>
+        <c:spPr>
+          <a:ln>
+            <a:noFill/>
+          </a:ln>
+        </c:spPr>
+        <c:txPr>
+          <a:bodyPr/>
+          <a:lstStyle/>
+          <a:p>
+            <a:pPr>
+              <a:defRPr sz="1000"/>
+            </a:pPr>
+          </a:p>
+        </c:txPr>
+        <c:crossAx val="-2101159928"/>
+        <c:crosses val="autoZero"/>
+        <c:crossBetween val="midCat"/>
+        <c:majorUnit val="5000.0"/>
+      </c:valAx>
+    </c:plotArea>
+    <c:plotVisOnly val="1"/>
+    <c:dispBlanksAs val="zero"/>
+    <c:showDLblsOverMax val="0"/>
+  </c:chart>
+  <c:txPr>
+    <a:bodyPr/>
+    <a:lstStyle/>
+    <a:p>
+      <a:pPr>
+        <a:defRPr sz="1800">
+          <a:latin typeface="Roboto"/>
+        </a:defRPr>
+      </a:pPr>
+      <a:endParaRPr/>
+    </a:p>
+  </c:txPr>
+  <c:externalData r:id="rId1">
+    <c:autoUpdate val="0"/>
+  </c:externalData>
+</c:chartSpace>
+</file>
+
+<file path=ppt/charts/chart4.xml><?xml version="1.0" encoding="utf-8"?>
+<c:chartSpace xmlns:c="http://schemas.openxmlformats.org/drawingml/2006/chart" xmlns:a="http://schemas.openxmlformats.org/drawingml/2006/main" xmlns:r="http://schemas.openxmlformats.org/officeDocument/2006/relationships">
+  <c:date1904 val="0"/>
+  <c:roundedCorners val="0"/>
+  <c:chart>
+    <c:autoTitleDeleted val="1"/>
+    <c:plotArea>
+      <c:layout>
+        <c:manualLayout>
+          <c:layoutTarget val="inner"/>
+          <c:xMode val="edge"/>
+          <c:yMode val="edge"/>
+          <c:x val="0.11"/>
+          <c:y val="0.05"/>
+          <c:w val="0.86"/>
+          <c:h val="0.8"/>
+        </c:manualLayout>
+      </c:layout>
+      <c:areaChart>
+        <c:grouping val="standard"/>
+        <c:varyColors val="0"/>
+        <c:ser>
+          <c:idx val="0"/>
+          <c:order val="0"/>
+          <c:tx>
+            <c:strRef>
+              <c:f>Sheet1!$B$1</c:f>
+              <c:strCache>
+                <c:ptCount val="1"/>
+                <c:pt idx="0">
+                  <c:v>Spend $</c:v>
+                </c:pt>
+              </c:strCache>
+            </c:strRef>
+          </c:tx>
+          <c:spPr>
+            <a:solidFill>
+              <a:srgbClr val="0E9F6E">
+                <a:alpha val="25000"/>
+              </a:srgbClr>
+            </a:solidFill>
+            <a:ln w="31750">
+              <a:solidFill>
+                <a:srgbClr val="0E9F6E"/>
+              </a:solidFill>
+            </a:ln>
+          </c:spPr>
+          <c:cat>
+            <c:strRef>
+              <c:f>Sheet1!$A$2:$A$14</c:f>
+              <c:strCache>
+                <c:ptCount val="13"/>
+                <c:pt idx="0">
+                  <c:v>Oct 24</c:v>
+                </c:pt>
+                <c:pt idx="1">
+                  <c:v>Nov 24</c:v>
+                </c:pt>
+                <c:pt idx="2">
+                  <c:v>Dec 24</c:v>
+                </c:pt>
+                <c:pt idx="3">
+                  <c:v>Jan 25</c:v>
+                </c:pt>
+                <c:pt idx="4">
+                  <c:v>Feb 25</c:v>
+                </c:pt>
+                <c:pt idx="5">
+                  <c:v>Mar 25</c:v>
+                </c:pt>
+                <c:pt idx="6">
+                  <c:v>Apr 25</c:v>
+                </c:pt>
+                <c:pt idx="7">
+                  <c:v>May 25</c:v>
+                </c:pt>
+                <c:pt idx="8">
+                  <c:v>Jun 25</c:v>
+                </c:pt>
+                <c:pt idx="9">
+                  <c:v>Jul 25</c:v>
+                </c:pt>
+                <c:pt idx="10">
+                  <c:v>Aug 25</c:v>
+                </c:pt>
+                <c:pt idx="11">
+                  <c:v>Sep 25</c:v>
+                </c:pt>
+                <c:pt idx="12">
+                  <c:v>Oct 25</c:v>
+                </c:pt>
+              </c:strCache>
+            </c:strRef>
+          </c:cat>
+          <c:val>
+            <c:numRef>
+              <c:f>Sheet1!$B$2:$B$14</c:f>
+              <c:numCache>
+                <c:formatCode>$#,##0;[Red]($#,##0);"-"</c:formatCode>
+                <c:ptCount val="13"/>
+                <c:pt idx="0">
+                  <c:v>10400</c:v>
+                </c:pt>
+                <c:pt idx="1">
+                  <c:v>13400</c:v>
+                </c:pt>
+                <c:pt idx="2">
+                  <c:v>11900</c:v>
+                </c:pt>
+                <c:pt idx="3">
+                  <c:v>12700</c:v>
+                </c:pt>
+                <c:pt idx="4">
+                  <c:v>10500</c:v>
+                </c:pt>
+                <c:pt idx="5">
+                  <c:v>12200</c:v>
+                </c:pt>
+                <c:pt idx="6">
+                  <c:v>13500</c:v>
+                </c:pt>
+                <c:pt idx="7">
+                  <c:v>13200</c:v>
+                </c:pt>
+                <c:pt idx="8">
+                  <c:v>11900</c:v>
+                </c:pt>
+                <c:pt idx="9">
+                  <c:v>10200</c:v>
+                </c:pt>
+                <c:pt idx="10">
+                  <c:v>10600</c:v>
+                </c:pt>
+                <c:pt idx="11">
+                  <c:v>12900</c:v>
+                </c:pt>
+                <c:pt idx="12">
+                  <c:v>12300</c:v>
+                </c:pt>
+              </c:numCache>
+            </c:numRef>
+          </c:val>
+        </c:ser>
+        <c:dLbls>
+          <c:showLegendKey val="0"/>
+          <c:showVal val="0"/>
+          <c:showCatName val="0"/>
+          <c:showSerName val="0"/>
+          <c:showPercent val="0"/>
+          <c:showBubbleSize val="0"/>
+        </c:dLbls>
+        <c:axId val="-2101159928"/>
+        <c:axId val="-2100718248"/>
+      </c:areaChart>
+      <c:catAx>
+        <c:axId val="-2101159928"/>
+        <c:scaling>
+          <c:orientation val="minMax"/>
+        </c:scaling>
+        <c:delete val="0"/>
+        <c:axPos val="b"/>
+        <c:numFmt formatCode="General" sourceLinked="1"/>
+        <c:majorTickMark val="out"/>
+        <c:minorTickMark val="none"/>
+        <c:tickLblPos val="nextTo"/>
+        <c:txPr>
+          <a:bodyPr/>
+          <a:lstStyle/>
+          <a:p>
+            <a:pPr>
+              <a:defRPr sz="1000"/>
+            </a:pPr>
+          </a:p>
+        </c:txPr>
+        <c:crossAx val="-2100718248"/>
+        <c:crosses val="autoZero"/>
+        <c:auto val="1"/>
+        <c:lblAlgn val="ctr"/>
+        <c:lblOffset val="100"/>
+        <c:tickLblSkip val="2"/>
+        <c:noMultiLvlLbl val="0"/>
+      </c:catAx>
+      <c:valAx>
+        <c:axId val="-2100718248"/>
+        <c:scaling>
+          <c:orientation val="minMax"/>
+          <c:max val="15000.0"/>
+          <c:min val="0.0"/>
+        </c:scaling>
+        <c:delete val="0"/>
+        <c:axPos val="l"/>
+        <c:majorGridlines>
+          <c:spPr>
+            <a:ln>
+              <a:solidFill>
+                <a:srgbClr val="E6EAE7"/>
+              </a:solidFill>
+            </a:ln>
+          </c:spPr>
+        </c:majorGridlines>
+        <c:numFmt formatCode="$#,##0;[Red]($#,##0);&quot;-&quot;" sourceLinked="0"/>
+        <c:majorTickMark val="out"/>
+        <c:minorTickMark val="none"/>
+        <c:tickLblPos val="nextTo"/>
+        <c:spPr>
+          <a:ln>
+            <a:noFill/>
+          </a:ln>
+        </c:spPr>
+        <c:txPr>
+          <a:bodyPr/>
+          <a:lstStyle/>
+          <a:p>
+            <a:pPr>
+              <a:defRPr sz="1000"/>
+            </a:pPr>
+          </a:p>
+        </c:txPr>
+        <c:crossAx val="-2101159928"/>
+        <c:crosses val="autoZero"/>
+        <c:crossBetween val="midCat"/>
+        <c:majorUnit val="5000.0"/>
+      </c:valAx>
+    </c:plotArea>
+    <c:plotVisOnly val="1"/>
+    <c:dispBlanksAs val="zero"/>
+    <c:showDLblsOverMax val="0"/>
+  </c:chart>
+  <c:txPr>
+    <a:bodyPr/>
+    <a:lstStyle/>
+    <a:p>
+      <a:pPr>
+        <a:defRPr sz="1800">
+          <a:latin typeface="Roboto"/>
+        </a:defRPr>
+      </a:pPr>
+      <a:endParaRPr/>
+    </a:p>
+  </c:txPr>
+  <c:externalData r:id="rId1">
+    <c:autoUpdate val="0"/>
+  </c:externalData>
+</c:chartSpace>
+</file>
+
+<file path=ppt/charts/chart5.xml><?xml version="1.0" encoding="utf-8"?>
+<c:chartSpace xmlns:c="http://schemas.openxmlformats.org/drawingml/2006/chart" xmlns:a="http://schemas.openxmlformats.org/drawingml/2006/main" xmlns:r="http://schemas.openxmlformats.org/officeDocument/2006/relationships">
+  <c:date1904 val="0"/>
+  <c:roundedCorners val="0"/>
+  <c:chart>
+    <c:autoTitleDeleted val="1"/>
+    <c:plotArea>
+      <c:layout>
+        <c:manualLayout>
+          <c:layoutTarget val="inner"/>
+          <c:xMode val="edge"/>
+          <c:yMode val="edge"/>
+          <c:x val="0.11"/>
+          <c:y val="0.05"/>
+          <c:w val="0.86"/>
+          <c:h val="0.8"/>
+        </c:manualLayout>
+      </c:layout>
+      <c:areaChart>
+        <c:grouping val="standard"/>
+        <c:varyColors val="0"/>
+        <c:ser>
+          <c:idx val="0"/>
+          <c:order val="0"/>
+          <c:tx>
+            <c:strRef>
+              <c:f>Sheet1!$B$1</c:f>
+              <c:strCache>
+                <c:ptCount val="1"/>
+                <c:pt idx="0">
+                  <c:v>Spend $</c:v>
+                </c:pt>
+              </c:strCache>
+            </c:strRef>
+          </c:tx>
+          <c:spPr>
+            <a:solidFill>
+              <a:srgbClr val="0E9F6E">
+                <a:alpha val="25000"/>
+              </a:srgbClr>
+            </a:solidFill>
+            <a:ln w="31750">
+              <a:solidFill>
+                <a:srgbClr val="0E9F6E"/>
+              </a:solidFill>
+            </a:ln>
+          </c:spPr>
+          <c:cat>
+            <c:strRef>
+              <c:f>Sheet1!$A$2:$A$14</c:f>
+              <c:strCache>
+                <c:ptCount val="13"/>
+                <c:pt idx="0">
+                  <c:v>Oct 24</c:v>
+                </c:pt>
+                <c:pt idx="1">
+                  <c:v>Nov 24</c:v>
+                </c:pt>
+                <c:pt idx="2">
+                  <c:v>Dec 24</c:v>
+                </c:pt>
+                <c:pt idx="3">
+                  <c:v>Jan 25</c:v>
+                </c:pt>
+                <c:pt idx="4">
+                  <c:v>Feb 25</c:v>
+                </c:pt>
+                <c:pt idx="5">
+                  <c:v>Mar 25</c:v>
+                </c:pt>
+                <c:pt idx="6">
+                  <c:v>Apr 25</c:v>
+                </c:pt>
+                <c:pt idx="7">
+                  <c:v>May 25</c:v>
+                </c:pt>
+                <c:pt idx="8">
+                  <c:v>Jun 25</c:v>
+                </c:pt>
+                <c:pt idx="9">
+                  <c:v>Jul 25</c:v>
+                </c:pt>
+                <c:pt idx="10">
+                  <c:v>Aug 25</c:v>
+                </c:pt>
+                <c:pt idx="11">
+                  <c:v>Sep 25</c:v>
+                </c:pt>
+                <c:pt idx="12">
+                  <c:v>Oct 25</c:v>
+                </c:pt>
+              </c:strCache>
+            </c:strRef>
+          </c:cat>
+          <c:val>
+            <c:numRef>
+              <c:f>Sheet1!$B$2:$B$14</c:f>
+              <c:numCache>
+                <c:formatCode>$#,##0;[Red]($#,##0);"-"</c:formatCode>
+                <c:ptCount val="13"/>
+                <c:pt idx="0">
+                  <c:v>0</c:v>
+                </c:pt>
+                <c:pt idx="1">
+                  <c:v>0</c:v>
+                </c:pt>
+                <c:pt idx="2">
+                  <c:v>0</c:v>
+                </c:pt>
+                <c:pt idx="3">
+                  <c:v>0</c:v>
+                </c:pt>
+                <c:pt idx="4">
+                  <c:v>0</c:v>
+                </c:pt>
+                <c:pt idx="5">
+                  <c:v>0</c:v>
+                </c:pt>
+                <c:pt idx="6">
+                  <c:v>0</c:v>
+                </c:pt>
+                <c:pt idx="7">
+                  <c:v>0</c:v>
+                </c:pt>
+                <c:pt idx="8">
+                  <c:v>0</c:v>
+                </c:pt>
+                <c:pt idx="9">
+                  <c:v>0</c:v>
+                </c:pt>
+                <c:pt idx="10">
+                  <c:v>0</c:v>
+                </c:pt>
+                <c:pt idx="11">
+                  <c:v>0</c:v>
+                </c:pt>
+                <c:pt idx="12">
+                  <c:v>5160</c:v>
+                </c:pt>
+              </c:numCache>
+            </c:numRef>
+          </c:val>
+        </c:ser>
+        <c:dLbls>
+          <c:showLegendKey val="0"/>
+          <c:showVal val="0"/>
+          <c:showCatName val="0"/>
+          <c:showSerName val="0"/>
+          <c:showPercent val="0"/>
+          <c:showBubbleSize val="0"/>
+        </c:dLbls>
+        <c:axId val="-2101159928"/>
+        <c:axId val="-2100718248"/>
+      </c:areaChart>
+      <c:catAx>
+        <c:axId val="-2101159928"/>
+        <c:scaling>
+          <c:orientation val="minMax"/>
+        </c:scaling>
+        <c:delete val="0"/>
+        <c:axPos val="b"/>
+        <c:numFmt formatCode="General" sourceLinked="1"/>
+        <c:majorTickMark val="out"/>
+        <c:minorTickMark val="none"/>
+        <c:tickLblPos val="nextTo"/>
+        <c:txPr>
+          <a:bodyPr/>
+          <a:lstStyle/>
+          <a:p>
+            <a:pPr>
+              <a:defRPr sz="1000"/>
+            </a:pPr>
+          </a:p>
+        </c:txPr>
+        <c:crossAx val="-2100718248"/>
+        <c:crosses val="autoZero"/>
+        <c:auto val="1"/>
+        <c:lblAlgn val="ctr"/>
+        <c:lblOffset val="100"/>
+        <c:tickLblSkip val="2"/>
+        <c:noMultiLvlLbl val="0"/>
+      </c:catAx>
+      <c:valAx>
+        <c:axId val="-2100718248"/>
+        <c:scaling>
+          <c:orientation val="minMax"/>
+          <c:max val="6000.0"/>
+          <c:min val="0.0"/>
+        </c:scaling>
+        <c:delete val="0"/>
+        <c:axPos val="l"/>
+        <c:majorGridlines>
+          <c:spPr>
+            <a:ln>
+              <a:solidFill>
+                <a:srgbClr val="E6EAE7"/>
+              </a:solidFill>
+            </a:ln>
+          </c:spPr>
+        </c:majorGridlines>
+        <c:numFmt formatCode="$#,##0;[Red]($#,##0);&quot;-&quot;" sourceLinked="0"/>
+        <c:majorTickMark val="out"/>
+        <c:minorTickMark val="none"/>
+        <c:tickLblPos val="nextTo"/>
+        <c:spPr>
+          <a:ln>
+            <a:noFill/>
+          </a:ln>
+        </c:spPr>
+        <c:txPr>
+          <a:bodyPr/>
+          <a:lstStyle/>
+          <a:p>
+            <a:pPr>
+              <a:defRPr sz="1000"/>
+            </a:pPr>
+          </a:p>
+        </c:txPr>
+        <c:crossAx val="-2101159928"/>
+        <c:crosses val="autoZero"/>
+        <c:crossBetween val="midCat"/>
+        <c:majorUnit val="2000.0"/>
+      </c:valAx>
+    </c:plotArea>
+    <c:plotVisOnly val="1"/>
+    <c:dispBlanksAs val="zero"/>
+    <c:showDLblsOverMax val="0"/>
+  </c:chart>
+  <c:txPr>
+    <a:bodyPr/>
+    <a:lstStyle/>
+    <a:p>
+      <a:pPr>
+        <a:defRPr sz="1800">
+          <a:latin typeface="Roboto"/>
+        </a:defRPr>
+      </a:pPr>
+      <a:endParaRPr/>
+    </a:p>
+  </c:txPr>
+  <c:externalData r:id="rId1">
+    <c:autoUpdate val="0"/>
+  </c:externalData>
+</c:chartSpace>
+</file>
+
+<file path=ppt/charts/chart6.xml><?xml version="1.0" encoding="utf-8"?>
+<c:chartSpace xmlns:c="http://schemas.openxmlformats.org/drawingml/2006/chart" xmlns:a="http://schemas.openxmlformats.org/drawingml/2006/main" xmlns:r="http://schemas.openxmlformats.org/officeDocument/2006/relationships">
+  <c:date1904 val="0"/>
+  <c:roundedCorners val="0"/>
+  <c:chart>
+    <c:autoTitleDeleted val="1"/>
+    <c:plotArea>
+      <c:layout>
+        <c:manualLayout>
+          <c:layoutTarget val="inner"/>
+          <c:xMode val="edge"/>
+          <c:yMode val="edge"/>
+          <c:x val="0.11"/>
+          <c:y val="0.05"/>
+          <c:w val="0.86"/>
+          <c:h val="0.8"/>
+        </c:manualLayout>
+      </c:layout>
+      <c:areaChart>
+        <c:grouping val="standard"/>
+        <c:varyColors val="0"/>
+        <c:ser>
+          <c:idx val="0"/>
+          <c:order val="0"/>
+          <c:tx>
+            <c:strRef>
+              <c:f>Sheet1!$B$1</c:f>
+              <c:strCache>
+                <c:ptCount val="1"/>
+                <c:pt idx="0">
+                  <c:v>Spend $</c:v>
+                </c:pt>
+              </c:strCache>
+            </c:strRef>
+          </c:tx>
+          <c:spPr>
+            <a:solidFill>
+              <a:srgbClr val="0E9F6E">
+                <a:alpha val="25000"/>
+              </a:srgbClr>
+            </a:solidFill>
+            <a:ln w="31750">
+              <a:solidFill>
+                <a:srgbClr val="0E9F6E"/>
+              </a:solidFill>
+            </a:ln>
+          </c:spPr>
+          <c:cat>
+            <c:strRef>
+              <c:f>Sheet1!$A$2:$A$14</c:f>
+              <c:strCache>
+                <c:ptCount val="13"/>
+                <c:pt idx="0">
+                  <c:v>Oct 24</c:v>
+                </c:pt>
+                <c:pt idx="1">
+                  <c:v>Nov 24</c:v>
+                </c:pt>
+                <c:pt idx="2">
+                  <c:v>Dec 24</c:v>
+                </c:pt>
+                <c:pt idx="3">
+                  <c:v>Jan 25</c:v>
+                </c:pt>
+                <c:pt idx="4">
+                  <c:v>Feb 25</c:v>
+                </c:pt>
+                <c:pt idx="5">
+                  <c:v>Mar 25</c:v>
+                </c:pt>
+                <c:pt idx="6">
+                  <c:v>Apr 25</c:v>
+                </c:pt>
+                <c:pt idx="7">
+                  <c:v>May 25</c:v>
+                </c:pt>
+                <c:pt idx="8">
+                  <c:v>Jun 25</c:v>
+                </c:pt>
+                <c:pt idx="9">
+                  <c:v>Jul 25</c:v>
+                </c:pt>
+                <c:pt idx="10">
+                  <c:v>Aug 25</c:v>
+                </c:pt>
+                <c:pt idx="11">
+                  <c:v>Sep 25</c:v>
+                </c:pt>
+                <c:pt idx="12">
+                  <c:v>Oct 25</c:v>
+                </c:pt>
+              </c:strCache>
+            </c:strRef>
+          </c:cat>
+          <c:val>
+            <c:numRef>
+              <c:f>Sheet1!$B$2:$B$14</c:f>
+              <c:numCache>
+                <c:formatCode>$#,##0;[Red]($#,##0);"-"</c:formatCode>
+                <c:ptCount val="13"/>
+                <c:pt idx="0">
+                  <c:v>0</c:v>
+                </c:pt>
+                <c:pt idx="1">
+                  <c:v>0</c:v>
+                </c:pt>
+                <c:pt idx="2">
+                  <c:v>0</c:v>
+                </c:pt>
+                <c:pt idx="3">
+                  <c:v>0</c:v>
+                </c:pt>
+                <c:pt idx="4">
+                  <c:v>0</c:v>
+                </c:pt>
+                <c:pt idx="5">
+                  <c:v>0</c:v>
+                </c:pt>
+                <c:pt idx="6">
+                  <c:v>0</c:v>
+                </c:pt>
+                <c:pt idx="7">
+                  <c:v>0</c:v>
+                </c:pt>
+                <c:pt idx="8">
+                  <c:v>0</c:v>
+                </c:pt>
+                <c:pt idx="9">
+                  <c:v>3400</c:v>
+                </c:pt>
+                <c:pt idx="10">
+                  <c:v>3500</c:v>
+                </c:pt>
+                <c:pt idx="11">
+                  <c:v>4000</c:v>
+                </c:pt>
+                <c:pt idx="12">
+                  <c:v>3200</c:v>
+                </c:pt>
+              </c:numCache>
+            </c:numRef>
+          </c:val>
+        </c:ser>
+        <c:dLbls>
+          <c:showLegendKey val="0"/>
+          <c:showVal val="0"/>
+          <c:showCatName val="0"/>
+          <c:showSerName val="0"/>
+          <c:showPercent val="0"/>
+          <c:showBubbleSize val="0"/>
+        </c:dLbls>
+        <c:axId val="-2101159928"/>
+        <c:axId val="-2100718248"/>
+      </c:areaChart>
+      <c:catAx>
+        <c:axId val="-2101159928"/>
+        <c:scaling>
+          <c:orientation val="minMax"/>
+        </c:scaling>
+        <c:delete val="0"/>
+        <c:axPos val="b"/>
+        <c:numFmt formatCode="General" sourceLinked="1"/>
+        <c:majorTickMark val="out"/>
+        <c:minorTickMark val="none"/>
+        <c:tickLblPos val="nextTo"/>
+        <c:txPr>
+          <a:bodyPr/>
+          <a:lstStyle/>
+          <a:p>
+            <a:pPr>
+              <a:defRPr sz="1000"/>
+            </a:pPr>
+          </a:p>
+        </c:txPr>
+        <c:crossAx val="-2100718248"/>
+        <c:crosses val="autoZero"/>
+        <c:auto val="1"/>
+        <c:lblAlgn val="ctr"/>
+        <c:lblOffset val="100"/>
+        <c:tickLblSkip val="2"/>
+        <c:noMultiLvlLbl val="0"/>
+      </c:catAx>
+      <c:valAx>
+        <c:axId val="-2100718248"/>
+        <c:scaling>
+          <c:orientation val="minMax"/>
+          <c:max val="5000.0"/>
+          <c:min val="0.0"/>
+        </c:scaling>
+        <c:delete val="0"/>
+        <c:axPos val="l"/>
+        <c:majorGridlines>
+          <c:spPr>
+            <a:ln>
+              <a:solidFill>
+                <a:srgbClr val="E6EAE7"/>
+              </a:solidFill>
+            </a:ln>
+          </c:spPr>
+        </c:majorGridlines>
+        <c:numFmt formatCode="$#,##0;[Red]($#,##0);&quot;-&quot;" sourceLinked="0"/>
+        <c:majorTickMark val="out"/>
+        <c:minorTickMark val="none"/>
+        <c:tickLblPos val="nextTo"/>
+        <c:spPr>
+          <a:ln>
+            <a:noFill/>
+          </a:ln>
+        </c:spPr>
+        <c:txPr>
+          <a:bodyPr/>
+          <a:lstStyle/>
+          <a:p>
+            <a:pPr>
+              <a:defRPr sz="1000"/>
+            </a:pPr>
+          </a:p>
+        </c:txPr>
+        <c:crossAx val="-2101159928"/>
+        <c:crosses val="autoZero"/>
+        <c:crossBetween val="midCat"/>
+        <c:majorUnit val="1000.0"/>
+      </c:valAx>
+    </c:plotArea>
+    <c:plotVisOnly val="1"/>
+    <c:dispBlanksAs val="zero"/>
+    <c:showDLblsOverMax val="0"/>
+  </c:chart>
+  <c:txPr>
+    <a:bodyPr/>
+    <a:lstStyle/>
+    <a:p>
+      <a:pPr>
+        <a:defRPr sz="1800">
+          <a:latin typeface="Roboto"/>
+        </a:defRPr>
+      </a:pPr>
+      <a:endParaRPr/>
+    </a:p>
+  </c:txPr>
+  <c:externalData r:id="rId1">
+    <c:autoUpdate val="0"/>
+  </c:externalData>
+</c:chartSpace>
+</file>
+
+<file path=ppt/notesMasters/notesMaster1.xml><?xml version="1.0" encoding="utf-8"?>
+<p:notesMaster xmlns:a="http://schemas.openxmlformats.org/drawingml/2006/main" xmlns:p="http://schemas.openxmlformats.org/presentationml/2006/main" xmlns:r="http://schemas.openxmlformats.org/officeDocument/2006/relationships">
+  <p:cSld>
+    <p:bg>
+      <p:bgRef idx="1001">
+        <a:schemeClr val="bg1"/>
+      </p:bgRef>
+    </p:bg>
+    <p:spTree>
+      <p:nvGrpSpPr>
+        <p:cNvPr id="1" name=""/>
+        <p:cNvGrpSpPr/>
+        <p:nvPr/>
+      </p:nvGrpSpPr>
+      <p:grpSpPr>
+        <a:xfrm>
+          <a:off x="0" y="0"/>
+          <a:ext cx="0" cy="0"/>
+          <a:chOff x="0" y="0"/>
+          <a:chExt cx="0" cy="0"/>
+        </a:xfrm>
+      </p:grpSpPr>
+      <p:sp>
+        <p:nvSpPr>
+          <p:cNvPr id="2" name="Header Placeholder 1"/>
+          <p:cNvSpPr>
+            <a:spLocks noGrp="1"/>
+          </p:cNvSpPr>
+          <p:nvPr>
+            <p:ph type="hdr" sz="quarter"/>
+          </p:nvPr>
+        </p:nvSpPr>
+        <p:spPr>
+          <a:xfrm>
+            <a:off x="0" y="0"/>
+            <a:ext cx="2971800" cy="457200"/>
+          </a:xfrm>
+          <a:prstGeom prst="rect">
+            <a:avLst/>
+          </a:prstGeom>
+        </p:spPr>
+        <p:txBody>
+          <a:bodyPr vert="horz" lIns="91440" tIns="45720" rIns="91440" bIns="45720" rtlCol="0"/>
+          <a:lstStyle>
+            <a:lvl1pPr algn="l">
+              <a:defRPr sz="1200"/>
+            </a:lvl1pPr>
+          </a:lstStyle>
+          <a:p>
+            <a:endParaRPr lang="en-US"/>
+          </a:p>
+        </p:txBody>
+      </p:sp>
+      <p:sp>
+        <p:nvSpPr>
+          <p:cNvPr id="3" name="Date Placeholder 2"/>
+          <p:cNvSpPr>
+            <a:spLocks noGrp="1"/>
+          </p:cNvSpPr>
+          <p:nvPr>
+            <p:ph type="dt" idx="1"/>
+          </p:nvPr>
+        </p:nvSpPr>
+        <p:spPr>
+          <a:xfrm>
+            <a:off x="3884613" y="0"/>
+            <a:ext cx="2971800" cy="457200"/>
+          </a:xfrm>
+          <a:prstGeom prst="rect">
+            <a:avLst/>
+          </a:prstGeom>
+        </p:spPr>
+        <p:txBody>
+          <a:bodyPr vert="horz" lIns="91440" tIns="45720" rIns="91440" bIns="45720" rtlCol="0"/>
+          <a:lstStyle>
+            <a:lvl1pPr algn="r">
+              <a:defRPr sz="1200"/>
+            </a:lvl1pPr>
+          </a:lstStyle>
+          <a:p>
+            <a:fld id="{0F89C1C7-3DCD-1040-A9CF-14679D8B5DDD}" type="datetimeFigureOut">
+              <a:rPr lang="en-US" smtClean="0"/>
+              <a:t>10/17/16</a:t>
+            </a:fld>
+            <a:endParaRPr lang="en-US"/>
+          </a:p>
+        </p:txBody>
+      </p:sp>
+      <p:sp>
+        <p:nvSpPr>
+          <p:cNvPr id="4" name="Slide Image Placeholder 3"/>
+          <p:cNvSpPr>
+            <a:spLocks noGrp="1" noRot="1" noChangeAspect="1"/>
+          </p:cNvSpPr>
+          <p:nvPr>
+            <p:ph type="sldImg" idx="2"/>
+          </p:nvPr>
+        </p:nvSpPr>
+        <p:spPr>
+          <a:xfrm>
+            <a:off x="1143000" y="685800"/>
+            <a:ext cx="4572000" cy="3429000"/>
+          </a:xfrm>
+          <a:prstGeom prst="rect">
+            <a:avLst/>
+          </a:prstGeom>
+          <a:noFill/>
+          <a:ln w="12700">
+            <a:solidFill>
+              <a:prstClr val="black"/>
+            </a:solidFill>
+          </a:ln>
+        </p:spPr>
+        <p:txBody>
+          <a:bodyPr vert="horz" lIns="91440" tIns="45720" rIns="91440" bIns="45720" rtlCol="0" anchor="ctr"/>
+          <a:lstStyle/>
+          <a:p>
+            <a:endParaRPr lang="en-US"/>
+          </a:p>
+        </p:txBody>
+      </p:sp>
+      <p:sp>
+        <p:nvSpPr>
+          <p:cNvPr id="5" name="Notes Placeholder 4"/>
+          <p:cNvSpPr>
+            <a:spLocks noGrp="1"/>
+          </p:cNvSpPr>
+          <p:nvPr>
+            <p:ph type="body" sz="quarter" idx="3"/>
+          </p:nvPr>
+        </p:nvSpPr>
+        <p:spPr>
+          <a:xfrm>
+            <a:off x="685800" y="4343400"/>
+            <a:ext cx="5486400" cy="4114800"/>
+          </a:xfrm>
+          <a:prstGeom prst="rect">
+            <a:avLst/>
+          </a:prstGeom>
+        </p:spPr>
+        <p:txBody>
+          <a:bodyPr vert="horz" lIns="91440" tIns="45720" rIns="91440" bIns="45720" rtlCol="0"/>
+          <a:lstStyle/>
+          <a:p>
+            <a:pPr lvl="0"/>
+            <a:r>
+              <a:rPr lang="en-US" smtClean="0"/>
+              <a:t>Click to edit Master text styles</a:t>
+            </a:r>
+          </a:p>
+          <a:p>
+            <a:pPr lvl="1"/>
+            <a:r>
+              <a:rPr lang="en-US" smtClean="0"/>
+              <a:t>Second level</a:t>
+            </a:r>
+          </a:p>
+          <a:p>
+            <a:pPr lvl="2"/>
+            <a:r>
+              <a:rPr lang="en-US" smtClean="0"/>
+              <a:t>Third level</a:t>
+            </a:r>
+          </a:p>
+          <a:p>
+            <a:pPr lvl="3"/>
+            <a:r>
+              <a:rPr lang="en-US" smtClean="0"/>
+              <a:t>Fourth level</a:t>
+            </a:r>
+          </a:p>
+          <a:p>
+            <a:pPr lvl="4"/>
+            <a:r>
+              <a:rPr lang="en-US" smtClean="0"/>
+              <a:t>Fifth level</a:t>
+            </a:r>
+            <a:endParaRPr lang="en-US"/>
+          </a:p>
+        </p:txBody>
+      </p:sp>
+      <p:sp>
+        <p:nvSpPr>
+          <p:cNvPr id="6" name="Footer Placeholder 5"/>
+          <p:cNvSpPr>
+            <a:spLocks noGrp="1"/>
+          </p:cNvSpPr>
+          <p:nvPr>
+            <p:ph type="ftr" sz="quarter" idx="4"/>
+          </p:nvPr>
+        </p:nvSpPr>
+        <p:spPr>
+          <a:xfrm>
+            <a:off x="0" y="8685213"/>
+            <a:ext cx="2971800" cy="457200"/>
+          </a:xfrm>
+          <a:prstGeom prst="rect">
+            <a:avLst/>
+          </a:prstGeom>
+        </p:spPr>
+        <p:txBody>
+          <a:bodyPr vert="horz" lIns="91440" tIns="45720" rIns="91440" bIns="45720" rtlCol="0" anchor="b"/>
+          <a:lstStyle>
+            <a:lvl1pPr algn="l">
+              <a:defRPr sz="1200"/>
+            </a:lvl1pPr>
+          </a:lstStyle>
+          <a:p>
+            <a:endParaRPr lang="en-US"/>
+          </a:p>
+        </p:txBody>
+      </p:sp>
+      <p:sp>
+        <p:nvSpPr>
+          <p:cNvPr id="7" name="Slide Number Placeholder 6"/>
+          <p:cNvSpPr>
+            <a:spLocks noGrp="1"/>
+          </p:cNvSpPr>
+          <p:nvPr>
+            <p:ph type="sldNum" sz="quarter" idx="5"/>
+          </p:nvPr>
+        </p:nvSpPr>
+        <p:spPr>
+          <a:xfrm>
+            <a:off x="3884613" y="8685213"/>
+            <a:ext cx="2971800" cy="457200"/>
+          </a:xfrm>
+          <a:prstGeom prst="rect">
+            <a:avLst/>
+          </a:prstGeom>
+        </p:spPr>
+        <p:txBody>
+          <a:bodyPr vert="horz" lIns="91440" tIns="45720" rIns="91440" bIns="45720" rtlCol="0" anchor="b"/>
+          <a:lstStyle>
+            <a:lvl1pPr algn="r">
+              <a:defRPr sz="1200"/>
+            </a:lvl1pPr>
+          </a:lstStyle>
+          <a:p>
+            <a:fld id="{BB5E49A5-4136-284D-997B-48E1D791AD67}" type="slidenum">
+              <a:rPr lang="en-US" smtClean="0"/>
+              <a:t>‹#›</a:t>
+            </a:fld>
+            <a:endParaRPr lang="en-US"/>
+          </a:p>
+        </p:txBody>
+      </p:sp>
+    </p:spTree>
+    <p:extLst>
+      <p:ext uri="{BB962C8B-B14F-4D97-AF65-F5344CB8AC3E}">
+        <p14:creationId xmlns:p14="http://schemas.microsoft.com/office/powerpoint/2010/main" val="2623252185"/>
+      </p:ext>
+    </p:extLst>
+  </p:cSld>
+  <p:clrMap bg1="lt1" tx1="dk1" bg2="lt2" tx2="dk2" accent1="accent1" accent2="accent2" accent3="accent3" accent4="accent4" accent5="accent5" accent6="accent6" hlink="hlink" folHlink="folHlink"/>
+  <p:notesStyle>
+    <a:lvl1pPr marL="0" algn="l" defTabSz="457200" rtl="0" eaLnBrk="1" latinLnBrk="0" hangingPunct="1">
+      <a:defRPr sz="1200" kern="1200">
+        <a:solidFill>
+          <a:schemeClr val="tx1"/>
+        </a:solidFill>
+        <a:latin typeface="+mn-lt"/>
+        <a:ea typeface="+mn-ea"/>
+        <a:cs typeface="+mn-cs"/>
+      </a:defRPr>
+    </a:lvl1pPr>
+    <a:lvl2pPr marL="457200" algn="l" defTabSz="457200" rtl="0" eaLnBrk="1" latinLnBrk="0" hangingPunct="1">
+      <a:defRPr sz="1200" kern="1200">
+        <a:solidFill>
+          <a:schemeClr val="tx1"/>
+        </a:solidFill>
+        <a:latin typeface="+mn-lt"/>
+        <a:ea typeface="+mn-ea"/>
+        <a:cs typeface="+mn-cs"/>
+      </a:defRPr>
+    </a:lvl2pPr>
+    <a:lvl3pPr marL="914400" algn="l" defTabSz="457200" rtl="0" eaLnBrk="1" latinLnBrk="0" hangingPunct="1">
+      <a:defRPr sz="1200" kern="1200">
+        <a:solidFill>
+          <a:schemeClr val="tx1"/>
+        </a:solidFill>
+        <a:latin typeface="+mn-lt"/>
+        <a:ea typeface="+mn-ea"/>
+        <a:cs typeface="+mn-cs"/>
+      </a:defRPr>
+    </a:lvl3pPr>
+    <a:lvl4pPr marL="1371600" algn="l" defTabSz="457200" rtl="0" eaLnBrk="1" latinLnBrk="0" hangingPunct="1">
+      <a:defRPr sz="1200" kern="1200">
+        <a:solidFill>
+          <a:schemeClr val="tx1"/>
+        </a:solidFill>
+        <a:latin typeface="+mn-lt"/>
+        <a:ea typeface="+mn-ea"/>
+        <a:cs typeface="+mn-cs"/>
+      </a:defRPr>
+    </a:lvl4pPr>
+    <a:lvl5pPr marL="1828800" algn="l" defTabSz="457200" rtl="0" eaLnBrk="1" latinLnBrk="0" hangingPunct="1">
+      <a:defRPr sz="1200" kern="1200">
+        <a:solidFill>
+          <a:schemeClr val="tx1"/>
+        </a:solidFill>
+        <a:latin typeface="+mn-lt"/>
+        <a:ea typeface="+mn-ea"/>
+        <a:cs typeface="+mn-cs"/>
+      </a:defRPr>
+    </a:lvl5pPr>
+    <a:lvl6pPr marL="2286000" algn="l" defTabSz="457200" rtl="0" eaLnBrk="1" latinLnBrk="0" hangingPunct="1">
+      <a:defRPr sz="1200" kern="1200">
+        <a:solidFill>
+          <a:schemeClr val="tx1"/>
+        </a:solidFill>
+        <a:latin typeface="+mn-lt"/>
+        <a:ea typeface="+mn-ea"/>
+        <a:cs typeface="+mn-cs"/>
+      </a:defRPr>
+    </a:lvl6pPr>
+    <a:lvl7pPr marL="2743200" algn="l" defTabSz="457200" rtl="0" eaLnBrk="1" latinLnBrk="0" hangingPunct="1">
+      <a:defRPr sz="1200" kern="1200">
+        <a:solidFill>
+          <a:schemeClr val="tx1"/>
+        </a:solidFill>
+        <a:latin typeface="+mn-lt"/>
+        <a:ea typeface="+mn-ea"/>
+        <a:cs typeface="+mn-cs"/>
+      </a:defRPr>
+    </a:lvl7pPr>
+    <a:lvl8pPr marL="3200400" algn="l" defTabSz="457200" rtl="0" eaLnBrk="1" latinLnBrk="0" hangingPunct="1">
+      <a:defRPr sz="1200" kern="1200">
+        <a:solidFill>
+          <a:schemeClr val="tx1"/>
+        </a:solidFill>
+        <a:latin typeface="+mn-lt"/>
+        <a:ea typeface="+mn-ea"/>
+        <a:cs typeface="+mn-cs"/>
+      </a:defRPr>
+    </a:lvl8pPr>
+    <a:lvl9pPr marL="3657600" algn="l" defTabSz="457200" rtl="0" eaLnBrk="1" latinLnBrk="0" hangingPunct="1">
+      <a:defRPr sz="1200" kern="1200">
+        <a:solidFill>
+          <a:schemeClr val="tx1"/>
+        </a:solidFill>
+        <a:latin typeface="+mn-lt"/>
+        <a:ea typeface="+mn-ea"/>
+        <a:cs typeface="+mn-cs"/>
+      </a:defRPr>
+    </a:lvl9pPr>
+  </p:notesStyle>
+</p:notesMaster>
+</file>
+
+<file path=ppt/notesSlides/notesSlide1.xml><?xml version="1.0" encoding="utf-8"?>
+<p:notes xmlns:a="http://schemas.openxmlformats.org/drawingml/2006/main" xmlns:p="http://schemas.openxmlformats.org/presentationml/2006/main" xmlns:r="http://schemas.openxmlformats.org/officeDocument/2006/relationships">
+  <p:cSld>
+    <p:spTree>
+      <p:nvGrpSpPr>
+        <p:cNvPr id="1" name=""/>
+        <p:cNvGrpSpPr/>
+        <p:nvPr/>
+      </p:nvGrpSpPr>
+      <p:grpSpPr>
+        <a:xfrm>
+          <a:off x="0" y="0"/>
+          <a:ext cx="0" cy="0"/>
+          <a:chOff x="0" y="0"/>
+          <a:chExt cx="0" cy="0"/>
+        </a:xfrm>
+      </p:grpSpPr>
+      <p:sp>
+        <p:nvSpPr>
+          <p:cNvPr id="2" name="Slide Image Placeholder 1"/>
+          <p:cNvSpPr>
+            <a:spLocks noGrp="1"/>
+          </p:cNvSpPr>
+          <p:nvPr>
+            <p:ph type="sldImg" idx="2"/>
+          </p:nvPr>
+        </p:nvSpPr>
+        <p:spPr/>
+      </p:sp>
+      <p:sp>
+        <p:nvSpPr>
+          <p:cNvPr id="3" name="Notes Placeholder 2"/>
+          <p:cNvSpPr>
+            <a:spLocks noGrp="1"/>
+          </p:cNvSpPr>
+          <p:nvPr>
+            <p:ph type="body" idx="3" sz="quarter"/>
+          </p:nvPr>
+        </p:nvSpPr>
+        <p:spPr/>
+        <p:txBody>
+          <a:bodyPr/>
+          <a:lstStyle/>
+          <a:p>
+            <a:r>
+              <a:t>What does each program really cost?. Sample Community Services Ltd. Period: October 2025. Each program's full cost: what its grant pays for, plus its fair share of the costs no single grant covers (untied program costs and administration, shared by grant spending). Pick a program and every chart and note follows it.</a:t>
+            </a:r>
+          </a:p>
+        </p:txBody>
+      </p:sp>
+      <p:sp>
+        <p:nvSpPr>
+          <p:cNvPr id="4" name="Slide Number Placeholder 3"/>
+          <p:cNvSpPr>
+            <a:spLocks noGrp="1"/>
+          </p:cNvSpPr>
+          <p:nvPr>
+            <p:ph type="sldNum" idx="5" sz="quarter"/>
+          </p:nvPr>
+        </p:nvSpPr>
+        <p:spPr/>
+      </p:sp>
+    </p:spTree>
+  </p:cSld>
+  <p:clrMapOvr>
+    <a:masterClrMapping/>
+  </p:clrMapOvr>
+</p:notes>
+</file>
+
+<file path=ppt/notesSlides/notesSlide2.xml><?xml version="1.0" encoding="utf-8"?>
+<p:notes xmlns:a="http://schemas.openxmlformats.org/drawingml/2006/main" xmlns:p="http://schemas.openxmlformats.org/presentationml/2006/main" xmlns:r="http://schemas.openxmlformats.org/officeDocument/2006/relationships">
+  <p:cSld>
+    <p:spTree>
+      <p:nvGrpSpPr>
+        <p:cNvPr id="1" name=""/>
+        <p:cNvGrpSpPr/>
+        <p:nvPr/>
+      </p:nvGrpSpPr>
+      <p:grpSpPr>
+        <a:xfrm>
+          <a:off x="0" y="0"/>
+          <a:ext cx="0" cy="0"/>
+          <a:chOff x="0" y="0"/>
+          <a:chExt cx="0" cy="0"/>
+        </a:xfrm>
+      </p:grpSpPr>
+      <p:sp>
+        <p:nvSpPr>
+          <p:cNvPr id="2" name="Slide Image Placeholder 1"/>
+          <p:cNvSpPr>
+            <a:spLocks noGrp="1"/>
+          </p:cNvSpPr>
+          <p:nvPr>
+            <p:ph type="sldImg" idx="2"/>
+          </p:nvPr>
+        </p:nvSpPr>
+        <p:spPr/>
+      </p:sp>
+      <p:sp>
+        <p:nvSpPr>
+          <p:cNvPr id="3" name="Notes Placeholder 2"/>
+          <p:cNvSpPr>
+            <a:spLocks noGrp="1"/>
+          </p:cNvSpPr>
+          <p:nvPr>
+            <p:ph type="body" idx="3" sz="quarter"/>
+          </p:nvPr>
+        </p:nvSpPr>
+        <p:spPr/>
+        <p:txBody>
+          <a:bodyPr/>
+          <a:lstStyle/>
+          <a:p>
+            <a:r>
+              <a:t>All programs. Housing support (2025) is the biggest program: $46,631 in October once its share of untied program costs and administration is added to $26,600 of grant spending. Shared costs add 75.3% on top of grant spending across all programs. The full cost (not just the grant line) is the number for renewal applications, where the funder lets you recover a share of overheads. Pick a program above to see it on its own.</a:t>
+            </a:r>
+          </a:p>
+        </p:txBody>
+      </p:sp>
+      <p:sp>
+        <p:nvSpPr>
+          <p:cNvPr id="4" name="Slide Number Placeholder 3"/>
+          <p:cNvSpPr>
+            <a:spLocks noGrp="1"/>
+          </p:cNvSpPr>
+          <p:nvPr>
+            <p:ph type="sldNum" idx="5" sz="quarter"/>
+          </p:nvPr>
+        </p:nvSpPr>
+        <p:spPr/>
+      </p:sp>
+    </p:spTree>
+  </p:cSld>
+  <p:clrMapOvr>
+    <a:masterClrMapping/>
+  </p:clrMapOvr>
+</p:notes>
+</file>
+
+<file path=ppt/notesSlides/notesSlide3.xml><?xml version="1.0" encoding="utf-8"?>
+<p:notes xmlns:a="http://schemas.openxmlformats.org/drawingml/2006/main" xmlns:p="http://schemas.openxmlformats.org/presentationml/2006/main" xmlns:r="http://schemas.openxmlformats.org/officeDocument/2006/relationships">
+  <p:cSld>
+    <p:spTree>
+      <p:nvGrpSpPr>
+        <p:cNvPr id="1" name=""/>
+        <p:cNvGrpSpPr/>
+        <p:nvPr/>
+      </p:nvGrpSpPr>
+      <p:grpSpPr>
+        <a:xfrm>
+          <a:off x="0" y="0"/>
+          <a:ext cx="0" cy="0"/>
+          <a:chOff x="0" y="0"/>
+          <a:chExt cx="0" cy="0"/>
+        </a:xfrm>
+      </p:grpSpPr>
+      <p:sp>
+        <p:nvSpPr>
+          <p:cNvPr id="2" name="Slide Image Placeholder 1"/>
+          <p:cNvSpPr>
+            <a:spLocks noGrp="1"/>
+          </p:cNvSpPr>
+          <p:nvPr>
+            <p:ph type="sldImg" idx="2"/>
+          </p:nvPr>
+        </p:nvSpPr>
+        <p:spPr/>
+      </p:sp>
+      <p:sp>
+        <p:nvSpPr>
+          <p:cNvPr id="3" name="Notes Placeholder 2"/>
+          <p:cNvSpPr>
+            <a:spLocks noGrp="1"/>
+          </p:cNvSpPr>
+          <p:nvPr>
+            <p:ph type="body" idx="3" sz="quarter"/>
+          </p:nvPr>
+        </p:nvSpPr>
+        <p:spPr/>
+        <p:txBody>
+          <a:bodyPr/>
+          <a:lstStyle/>
+          <a:p>
+            <a:r>
+              <a:t>Housing support (2025). Housing support (2025) cost $46,631 in full in October: $26,600 paid by the State Housing Program grant, and $20,031 of shared costs no grant covers. It has spent 98.9% of its budget to date, with $59,100 left and 2 months to go. The full cost is $46,631 a month; $20,031 of it is shared cost the grant doesn't pay for. Worth asking for as much of it as the funder allows at renewal.</a:t>
+            </a:r>
+          </a:p>
+        </p:txBody>
+      </p:sp>
+      <p:sp>
+        <p:nvSpPr>
+          <p:cNvPr id="4" name="Slide Number Placeholder 3"/>
+          <p:cNvSpPr>
+            <a:spLocks noGrp="1"/>
+          </p:cNvSpPr>
+          <p:nvPr>
+            <p:ph type="sldNum" idx="5" sz="quarter"/>
+          </p:nvPr>
+        </p:nvSpPr>
+        <p:spPr/>
+      </p:sp>
+    </p:spTree>
+  </p:cSld>
+  <p:clrMapOvr>
+    <a:masterClrMapping/>
+  </p:clrMapOvr>
+</p:notes>
+</file>
+
+<file path=ppt/notesSlides/notesSlide4.xml><?xml version="1.0" encoding="utf-8"?>
+<p:notes xmlns:a="http://schemas.openxmlformats.org/drawingml/2006/main" xmlns:p="http://schemas.openxmlformats.org/presentationml/2006/main" xmlns:r="http://schemas.openxmlformats.org/officeDocument/2006/relationships">
+  <p:cSld>
+    <p:spTree>
+      <p:nvGrpSpPr>
+        <p:cNvPr id="1" name=""/>
+        <p:cNvGrpSpPr/>
+        <p:nvPr/>
+      </p:nvGrpSpPr>
+      <p:grpSpPr>
+        <a:xfrm>
+          <a:off x="0" y="0"/>
+          <a:ext cx="0" cy="0"/>
+          <a:chOff x="0" y="0"/>
+          <a:chExt cx="0" cy="0"/>
+        </a:xfrm>
+      </p:grpSpPr>
+      <p:sp>
+        <p:nvSpPr>
+          <p:cNvPr id="2" name="Slide Image Placeholder 1"/>
+          <p:cNvSpPr>
+            <a:spLocks noGrp="1"/>
+          </p:cNvSpPr>
+          <p:nvPr>
+            <p:ph type="sldImg" idx="2"/>
+          </p:nvPr>
+        </p:nvSpPr>
+        <p:spPr/>
+      </p:sp>
+      <p:sp>
+        <p:nvSpPr>
+          <p:cNvPr id="3" name="Notes Placeholder 2"/>
+          <p:cNvSpPr>
+            <a:spLocks noGrp="1"/>
+          </p:cNvSpPr>
+          <p:nvPr>
+            <p:ph type="body" idx="3" sz="quarter"/>
+          </p:nvPr>
+        </p:nvSpPr>
+        <p:spPr/>
+        <p:txBody>
+          <a:bodyPr/>
+          <a:lstStyle/>
+          <a:p>
+            <a:r>
+              <a:t>Youth outreach. Youth outreach cost $38,436 in full in October: $21,925 paid by the State Department of Families grant, and $16,511 of shared costs no grant covers. It has spent 97.5% of its budget to date, with $402,031 left and 20 months to go. The full cost is $38,436 a month; $16,511 of it is shared cost the grant doesn't pay for. Worth asking for as much of it as the funder allows at renewal.</a:t>
+            </a:r>
+          </a:p>
+        </p:txBody>
+      </p:sp>
+      <p:sp>
+        <p:nvSpPr>
+          <p:cNvPr id="4" name="Slide Number Placeholder 3"/>
+          <p:cNvSpPr>
+            <a:spLocks noGrp="1"/>
+          </p:cNvSpPr>
+          <p:nvPr>
+            <p:ph type="sldNum" idx="5" sz="quarter"/>
+          </p:nvPr>
+        </p:nvSpPr>
+        <p:spPr/>
+      </p:sp>
+    </p:spTree>
+  </p:cSld>
+  <p:clrMapOvr>
+    <a:masterClrMapping/>
+  </p:clrMapOvr>
+</p:notes>
+</file>
+
+<file path=ppt/notesSlides/notesSlide5.xml><?xml version="1.0" encoding="utf-8"?>
+<p:notes xmlns:a="http://schemas.openxmlformats.org/drawingml/2006/main" xmlns:p="http://schemas.openxmlformats.org/presentationml/2006/main" xmlns:r="http://schemas.openxmlformats.org/officeDocument/2006/relationships">
+  <p:cSld>
+    <p:spTree>
+      <p:nvGrpSpPr>
+        <p:cNvPr id="1" name=""/>
+        <p:cNvGrpSpPr/>
+        <p:nvPr/>
+      </p:nvGrpSpPr>
+      <p:grpSpPr>
+        <a:xfrm>
+          <a:off x="0" y="0"/>
+          <a:ext cx="0" cy="0"/>
+          <a:chOff x="0" y="0"/>
+          <a:chExt cx="0" cy="0"/>
+        </a:xfrm>
+      </p:grpSpPr>
+      <p:sp>
+        <p:nvSpPr>
+          <p:cNvPr id="2" name="Slide Image Placeholder 1"/>
+          <p:cNvSpPr>
+            <a:spLocks noGrp="1"/>
+          </p:cNvSpPr>
+          <p:nvPr>
+            <p:ph type="sldImg" idx="2"/>
+          </p:nvPr>
+        </p:nvSpPr>
+        <p:spPr/>
+      </p:sp>
+      <p:sp>
+        <p:nvSpPr>
+          <p:cNvPr id="3" name="Notes Placeholder 2"/>
+          <p:cNvSpPr>
+            <a:spLocks noGrp="1"/>
+          </p:cNvSpPr>
+          <p:nvPr>
+            <p:ph type="body" idx="3" sz="quarter"/>
+          </p:nvPr>
+        </p:nvSpPr>
+        <p:spPr/>
+        <p:txBody>
+          <a:bodyPr/>
+          <a:lstStyle/>
+          <a:p>
+            <a:r>
+              <a:t>Emergency relief. Emergency relief cost $21,563 in full in October: $12,300 paid by the Federal community grant grant, and $9,263 of shared costs no grant covers. It has spent 99.9% of its budget to date (spending before October 2024 taken at budget), with $24,300 left and 2 months to go. The full cost is $21,563 a month; $9,263 of it is shared cost the grant doesn't pay for. Worth asking for as much of it as the funder allows at renewal.</a:t>
+            </a:r>
+          </a:p>
+        </p:txBody>
+      </p:sp>
+      <p:sp>
+        <p:nvSpPr>
+          <p:cNvPr id="4" name="Slide Number Placeholder 3"/>
+          <p:cNvSpPr>
+            <a:spLocks noGrp="1"/>
+          </p:cNvSpPr>
+          <p:nvPr>
+            <p:ph type="sldNum" idx="5" sz="quarter"/>
+          </p:nvPr>
+        </p:nvSpPr>
+        <p:spPr/>
+      </p:sp>
+    </p:spTree>
+  </p:cSld>
+  <p:clrMapOvr>
+    <a:masterClrMapping/>
+  </p:clrMapOvr>
+</p:notes>
+</file>
+
+<file path=ppt/notesSlides/notesSlide6.xml><?xml version="1.0" encoding="utf-8"?>
+<p:notes xmlns:a="http://schemas.openxmlformats.org/drawingml/2006/main" xmlns:p="http://schemas.openxmlformats.org/presentationml/2006/main" xmlns:r="http://schemas.openxmlformats.org/officeDocument/2006/relationships">
+  <p:cSld>
+    <p:spTree>
+      <p:nvGrpSpPr>
+        <p:cNvPr id="1" name=""/>
+        <p:cNvGrpSpPr/>
+        <p:nvPr/>
+      </p:nvGrpSpPr>
+      <p:grpSpPr>
+        <a:xfrm>
+          <a:off x="0" y="0"/>
+          <a:ext cx="0" cy="0"/>
+          <a:chOff x="0" y="0"/>
+          <a:chExt cx="0" cy="0"/>
+        </a:xfrm>
+      </p:grpSpPr>
+      <p:sp>
+        <p:nvSpPr>
+          <p:cNvPr id="2" name="Slide Image Placeholder 1"/>
+          <p:cNvSpPr>
+            <a:spLocks noGrp="1"/>
+          </p:cNvSpPr>
+          <p:nvPr>
+            <p:ph type="sldImg" idx="2"/>
+          </p:nvPr>
+        </p:nvSpPr>
+        <p:spPr/>
+      </p:sp>
+      <p:sp>
+        <p:nvSpPr>
+          <p:cNvPr id="3" name="Notes Placeholder 2"/>
+          <p:cNvSpPr>
+            <a:spLocks noGrp="1"/>
+          </p:cNvSpPr>
+          <p:nvPr>
+            <p:ph type="body" idx="3" sz="quarter"/>
+          </p:nvPr>
+        </p:nvSpPr>
+        <p:spPr/>
+        <p:txBody>
+          <a:bodyPr/>
+          <a:lstStyle/>
+          <a:p>
+            <a:r>
+              <a:t>Digital literacy. Digital literacy cost $9,046 in full in October: $5,160 paid by the Philanthropic foundation grant, and $3,886 of shared costs no grant covers. It has spent 103.2% of its budget to date, with $84,840 left and 17 months to go. The full cost is $9,046 a month; $3,886 of it is shared cost the grant doesn't pay for. Worth asking for as much of it as the funder allows at renewal.</a:t>
+            </a:r>
+          </a:p>
+        </p:txBody>
+      </p:sp>
+      <p:sp>
+        <p:nvSpPr>
+          <p:cNvPr id="4" name="Slide Number Placeholder 3"/>
+          <p:cNvSpPr>
+            <a:spLocks noGrp="1"/>
+          </p:cNvSpPr>
+          <p:nvPr>
+            <p:ph type="sldNum" idx="5" sz="quarter"/>
+          </p:nvPr>
+        </p:nvSpPr>
+        <p:spPr/>
+      </p:sp>
+    </p:spTree>
+  </p:cSld>
+  <p:clrMapOvr>
+    <a:masterClrMapping/>
+  </p:clrMapOvr>
+</p:notes>
+</file>
+
+<file path=ppt/notesSlides/notesSlide7.xml><?xml version="1.0" encoding="utf-8"?>
+<p:notes xmlns:a="http://schemas.openxmlformats.org/drawingml/2006/main" xmlns:p="http://schemas.openxmlformats.org/presentationml/2006/main" xmlns:r="http://schemas.openxmlformats.org/officeDocument/2006/relationships">
+  <p:cSld>
+    <p:spTree>
+      <p:nvGrpSpPr>
+        <p:cNvPr id="1" name=""/>
+        <p:cNvGrpSpPr/>
+        <p:nvPr/>
+      </p:nvGrpSpPr>
+      <p:grpSpPr>
+        <a:xfrm>
+          <a:off x="0" y="0"/>
+          <a:ext cx="0" cy="0"/>
+          <a:chOff x="0" y="0"/>
+          <a:chExt cx="0" cy="0"/>
+        </a:xfrm>
+      </p:grpSpPr>
+      <p:sp>
+        <p:nvSpPr>
+          <p:cNvPr id="2" name="Slide Image Placeholder 1"/>
+          <p:cNvSpPr>
+            <a:spLocks noGrp="1"/>
+          </p:cNvSpPr>
+          <p:nvPr>
+            <p:ph type="sldImg" idx="2"/>
+          </p:nvPr>
+        </p:nvSpPr>
+        <p:spPr/>
+      </p:sp>
+      <p:sp>
+        <p:nvSpPr>
+          <p:cNvPr id="3" name="Notes Placeholder 2"/>
+          <p:cNvSpPr>
+            <a:spLocks noGrp="1"/>
+          </p:cNvSpPr>
+          <p:nvPr>
+            <p:ph type="body" idx="3" sz="quarter"/>
+          </p:nvPr>
+        </p:nvSpPr>
+        <p:spPr/>
+        <p:txBody>
+          <a:bodyPr/>
+          <a:lstStyle/>
+          <a:p>
+            <a:r>
+              <a:t>Community meals (2025-26). Community meals (2025-26) cost $5,610 in full in October: $3,200 paid by the Local council community grant grant, and $2,410 of shared costs no grant covers. It has spent 96.1% of its budget to date, with $29,900 left and 8 months to go. The full cost is $5,610 a month; $2,410 of it is shared cost the grant doesn't pay for. Worth asking for as much of it as the funder allows at renewal.</a:t>
+            </a:r>
+          </a:p>
+        </p:txBody>
+      </p:sp>
+      <p:sp>
+        <p:nvSpPr>
+          <p:cNvPr id="4" name="Slide Number Placeholder 3"/>
+          <p:cNvSpPr>
+            <a:spLocks noGrp="1"/>
+          </p:cNvSpPr>
+          <p:nvPr>
+            <p:ph type="sldNum" idx="5" sz="quarter"/>
+          </p:nvPr>
+        </p:nvSpPr>
+        <p:spPr/>
+      </p:sp>
+    </p:spTree>
+  </p:cSld>
+  <p:clrMapOvr>
+    <a:masterClrMapping/>
+  </p:clrMapOvr>
+</p:notes>
 </file>
 
 <file path=ppt/slideLayouts/slideLayout1.xml><?xml version="1.0" encoding="utf-8"?>
@@ -3727,7 +5378,44 @@
       <p:grpSpPr/>
       <p:sp>
         <p:nvSpPr>
-          <p:cNvPr id="2" name="Rectangle 1"/>
+          <p:cNvPr id="2" name="Title 1"/>
+          <p:cNvSpPr>
+            <a:spLocks noGrp="1"/>
+          </p:cNvSpPr>
+          <p:nvPr>
+            <p:ph type="ctrTitle"/>
+          </p:nvPr>
+        </p:nvSpPr>
+        <p:spPr>
+          <a:xfrm>
+            <a:off x="457200" y="1965960"/>
+            <a:ext cx="11277295" cy="1097280"/>
+          </a:xfrm>
+        </p:spPr>
+        <p:txBody>
+          <a:bodyPr wrap="square"/>
+          <a:lstStyle/>
+          <a:p>
+            <a:pPr algn="l">
+              <a:defRPr>
+                <a:latin typeface="Roboto"/>
+              </a:defRPr>
+            </a:pPr>
+            <a:r>
+              <a:rPr sz="3400" b="1">
+                <a:solidFill>
+                  <a:srgbClr val="25342A"/>
+                </a:solidFill>
+                <a:latin typeface="Roboto"/>
+              </a:rPr>
+              <a:t>What does each program really cost?</a:t>
+            </a:r>
+          </a:p>
+        </p:txBody>
+      </p:sp>
+      <p:sp>
+        <p:nvSpPr>
+          <p:cNvPr id="3" name="Rectangle 2"/>
           <p:cNvSpPr/>
           <p:nvPr/>
         </p:nvSpPr>
@@ -3783,7 +5471,7 @@
       </p:sp>
       <p:sp>
         <p:nvSpPr>
-          <p:cNvPr id="3" name="TextBox 2"/>
+          <p:cNvPr id="4" name="TextBox 3"/>
           <p:cNvSpPr txBox="1"/>
           <p:nvPr/>
         </p:nvSpPr>
@@ -3798,7 +5486,7 @@
           <a:noFill/>
         </p:spPr>
         <p:txBody>
-          <a:bodyPr wrap="square">
+          <a:bodyPr wrap="square" lIns="45720" rIns="45720">
             <a:spAutoFit/>
           </a:bodyPr>
           <a:lstStyle/>
@@ -3822,7 +5510,7 @@
       </p:sp>
       <p:sp>
         <p:nvSpPr>
-          <p:cNvPr id="4" name="TextBox 3"/>
+          <p:cNvPr id="5" name="TextBox 4"/>
           <p:cNvSpPr txBox="1"/>
           <p:nvPr/>
         </p:nvSpPr>
@@ -3837,7 +5525,7 @@
           <a:noFill/>
         </p:spPr>
         <p:txBody>
-          <a:bodyPr wrap="square">
+          <a:bodyPr wrap="square" lIns="45720" rIns="45720">
             <a:spAutoFit/>
           </a:bodyPr>
           <a:lstStyle/>
@@ -3861,14 +5549,14 @@
       </p:sp>
       <p:sp>
         <p:nvSpPr>
-          <p:cNvPr id="5" name="TextBox 4"/>
+          <p:cNvPr id="6" name="TextBox 5"/>
           <p:cNvSpPr txBox="1"/>
           <p:nvPr/>
         </p:nvSpPr>
         <p:spPr>
           <a:xfrm>
-            <a:off x="457200" y="2011680"/>
-            <a:ext cx="11247120" cy="1097280"/>
+            <a:off x="457200" y="3154680"/>
+            <a:ext cx="11277295" cy="457200"/>
           </a:xfrm>
           <a:prstGeom prst="rect">
             <a:avLst/>
@@ -3876,7 +5564,7 @@
           <a:noFill/>
         </p:spPr>
         <p:txBody>
-          <a:bodyPr wrap="square">
+          <a:bodyPr wrap="square" lIns="45720" rIns="45720">
             <a:spAutoFit/>
           </a:bodyPr>
           <a:lstStyle/>
@@ -3887,27 +5575,27 @@
               </a:defRPr>
             </a:pPr>
             <a:r>
-              <a:rPr sz="3400" b="1">
+              <a:rPr sz="1600" b="0">
                 <a:solidFill>
-                  <a:srgbClr val="25342A"/>
+                  <a:srgbClr val="5F6F63"/>
                 </a:solidFill>
                 <a:latin typeface="Roboto"/>
               </a:rPr>
-              <a:t>What does each program really cost?</a:t>
-            </a:r>
-          </a:p>
-        </p:txBody>
-      </p:sp>
-      <p:sp>
-        <p:nvSpPr>
-          <p:cNvPr id="6" name="TextBox 5"/>
+              <a:t>Sample Community Services Ltd</a:t>
+            </a:r>
+          </a:p>
+        </p:txBody>
+      </p:sp>
+      <p:sp>
+        <p:nvSpPr>
+          <p:cNvPr id="7" name="TextBox 6"/>
           <p:cNvSpPr txBox="1"/>
           <p:nvPr/>
         </p:nvSpPr>
         <p:spPr>
           <a:xfrm>
-            <a:off x="457200" y="3154680"/>
-            <a:ext cx="11247120" cy="457200"/>
+            <a:off x="457200" y="3703320"/>
+            <a:ext cx="11277295" cy="535940"/>
           </a:xfrm>
           <a:prstGeom prst="rect">
             <a:avLst/>
@@ -3915,7 +5603,7 @@
           <a:noFill/>
         </p:spPr>
         <p:txBody>
-          <a:bodyPr wrap="square">
+          <a:bodyPr wrap="square" lIns="45720" rIns="45720">
             <a:spAutoFit/>
           </a:bodyPr>
           <a:lstStyle/>
@@ -3926,27 +5614,27 @@
               </a:defRPr>
             </a:pPr>
             <a:r>
-              <a:rPr sz="1600" b="0">
+              <a:rPr sz="1400" b="0">
                 <a:solidFill>
-                  <a:srgbClr val="5F6F63"/>
+                  <a:srgbClr val="25342A"/>
                 </a:solidFill>
                 <a:latin typeface="Roboto"/>
               </a:rPr>
-              <a:t>Sample Community Services Ltd</a:t>
-            </a:r>
-          </a:p>
-        </p:txBody>
-      </p:sp>
-      <p:sp>
-        <p:nvSpPr>
-          <p:cNvPr id="7" name="TextBox 6"/>
+              <a:t>Period: October 2025. Each program's full cost: what its grant pays for, plus its fair share of the costs no single grant covers (untied program costs and administration, shared by grant spending). Pick a program and every chart and note follows it.</a:t>
+            </a:r>
+          </a:p>
+        </p:txBody>
+      </p:sp>
+      <p:sp>
+        <p:nvSpPr>
+          <p:cNvPr id="8" name="TextBox 7"/>
           <p:cNvSpPr txBox="1"/>
           <p:nvPr/>
         </p:nvSpPr>
         <p:spPr>
           <a:xfrm>
-            <a:off x="457200" y="3703320"/>
-            <a:ext cx="11247120" cy="1097280"/>
+            <a:off x="457200" y="4330700"/>
+            <a:ext cx="11277295" cy="1097280"/>
           </a:xfrm>
           <a:prstGeom prst="rect">
             <a:avLst/>
@@ -3954,7 +5642,7 @@
           <a:noFill/>
         </p:spPr>
         <p:txBody>
-          <a:bodyPr wrap="square">
+          <a:bodyPr wrap="square" lIns="45720" rIns="45720">
             <a:spAutoFit/>
           </a:bodyPr>
           <a:lstStyle/>
@@ -3965,27 +5653,75 @@
               </a:defRPr>
             </a:pPr>
             <a:r>
-              <a:rPr sz="1400" b="0">
+              <a:rPr sz="1100" b="0">
                 <a:solidFill>
-                  <a:srgbClr val="25342A"/>
+                  <a:srgbClr val="5F6F63"/>
                 </a:solidFill>
                 <a:latin typeface="Roboto"/>
               </a:rPr>
-              <a:t>Period: October 2025. Each program's full cost: what its grant pays for, plus its fair share of the costs no single grant covers (untied program costs and administration, shared by grant spending). Pick a program and every chart and note follows it.</a:t>
-            </a:r>
-          </a:p>
-        </p:txBody>
-      </p:sp>
-      <p:sp>
-        <p:nvSpPr>
-          <p:cNvPr id="8" name="TextBox 7"/>
+              <a:t>How final is this data?</a:t>
+            </a:r>
+          </a:p>
+          <a:p>
+            <a:pPr>
+              <a:defRPr>
+                <a:latin typeface="Roboto"/>
+              </a:defRPr>
+            </a:pPr>
+            <a:r>
+              <a:rPr sz="1100" b="0">
+                <a:solidFill>
+                  <a:srgbClr val="5F6F63"/>
+                </a:solidFill>
+                <a:latin typeface="Roboto"/>
+              </a:rPr>
+              <a:t>September 2025: Locked. September 2025 is locked (closed 2 Oct 2025). These numbers won't change.</a:t>
+            </a:r>
+          </a:p>
+          <a:p>
+            <a:pPr>
+              <a:defRPr>
+                <a:latin typeface="Roboto"/>
+              </a:defRPr>
+            </a:pPr>
+            <a:r>
+              <a:rPr sz="1100" b="0">
+                <a:solidFill>
+                  <a:srgbClr val="5F6F63"/>
+                </a:solidFill>
+                <a:latin typeface="Roboto"/>
+              </a:rPr>
+              <a:t>October 2025: Locked. October 2025 is locked (closed 4 Nov 2025). These numbers won't change.</a:t>
+            </a:r>
+          </a:p>
+          <a:p>
+            <a:pPr>
+              <a:defRPr>
+                <a:latin typeface="Roboto"/>
+              </a:defRPr>
+            </a:pPr>
+            <a:r>
+              <a:rPr sz="1100" b="0">
+                <a:solidFill>
+                  <a:srgbClr val="5F6F63"/>
+                </a:solidFill>
+                <a:latin typeface="Roboto"/>
+              </a:rPr>
+              <a:t>October 2026: Incomplete. October 2026 is still in progress: figures to 6 Oct only.</a:t>
+            </a:r>
+          </a:p>
+        </p:txBody>
+      </p:sp>
+      <p:sp>
+        <p:nvSpPr>
+          <p:cNvPr id="9" name="TextBox 8"/>
           <p:cNvSpPr txBox="1"/>
           <p:nvPr/>
         </p:nvSpPr>
         <p:spPr>
           <a:xfrm>
-            <a:off x="457200" y="4937760"/>
-            <a:ext cx="11247120" cy="1097280"/>
+            <a:off x="457200" y="6492240"/>
+            <a:ext cx="2926080" cy="274320"/>
           </a:xfrm>
           <a:prstGeom prst="rect">
             <a:avLst/>
@@ -3993,7 +5729,7 @@
           <a:noFill/>
         </p:spPr>
         <p:txBody>
-          <a:bodyPr wrap="square">
+          <a:bodyPr wrap="square" lIns="45720" rIns="45720">
             <a:spAutoFit/>
           </a:bodyPr>
           <a:lstStyle/>
@@ -4004,75 +5740,27 @@
               </a:defRPr>
             </a:pPr>
             <a:r>
-              <a:rPr sz="1100" b="0">
+              <a:rPr sz="900" b="0">
                 <a:solidFill>
                   <a:srgbClr val="5F6F63"/>
                 </a:solidFill>
                 <a:latin typeface="Roboto"/>
               </a:rPr>
-              <a:t>How final is this data?</a:t>
-            </a:r>
-          </a:p>
-          <a:p>
-            <a:pPr>
-              <a:defRPr>
-                <a:latin typeface="Roboto"/>
-              </a:defRPr>
-            </a:pPr>
-            <a:r>
-              <a:rPr sz="1100" b="0">
-                <a:solidFill>
-                  <a:srgbClr val="5F6F63"/>
-                </a:solidFill>
-                <a:latin typeface="Roboto"/>
-              </a:rPr>
-              <a:t>September 2025: Locked. September 2025 is locked (closed 2 Oct 2025). These numbers won't change.</a:t>
-            </a:r>
-          </a:p>
-          <a:p>
-            <a:pPr>
-              <a:defRPr>
-                <a:latin typeface="Roboto"/>
-              </a:defRPr>
-            </a:pPr>
-            <a:r>
-              <a:rPr sz="1100" b="0">
-                <a:solidFill>
-                  <a:srgbClr val="5F6F63"/>
-                </a:solidFill>
-                <a:latin typeface="Roboto"/>
-              </a:rPr>
-              <a:t>October 2025: Locked. October 2025 is locked (closed 4 Nov 2025). These numbers won't change.</a:t>
-            </a:r>
-          </a:p>
-          <a:p>
-            <a:pPr>
-              <a:defRPr>
-                <a:latin typeface="Roboto"/>
-              </a:defRPr>
-            </a:pPr>
-            <a:r>
-              <a:rPr sz="1100" b="0">
-                <a:solidFill>
-                  <a:srgbClr val="5F6F63"/>
-                </a:solidFill>
-                <a:latin typeface="Roboto"/>
-              </a:rPr>
-              <a:t>October 2026: Incomplete. October 2026 is still in progress: figures to 6 Oct only.</a:t>
-            </a:r>
-          </a:p>
-        </p:txBody>
-      </p:sp>
-      <p:sp>
-        <p:nvSpPr>
-          <p:cNvPr id="9" name="TextBox 8"/>
+              <a:t>program-cost.pptx</a:t>
+            </a:r>
+          </a:p>
+        </p:txBody>
+      </p:sp>
+      <p:sp>
+        <p:nvSpPr>
+          <p:cNvPr id="10" name="TextBox 9"/>
           <p:cNvSpPr txBox="1"/>
           <p:nvPr/>
         </p:nvSpPr>
         <p:spPr>
           <a:xfrm>
-            <a:off x="457200" y="6492240"/>
-            <a:ext cx="3657600" cy="274320"/>
+            <a:off x="3108960" y="6492240"/>
+            <a:ext cx="5943600" cy="274320"/>
           </a:xfrm>
           <a:prstGeom prst="rect">
             <a:avLst/>
@@ -4080,12 +5768,12 @@
           <a:noFill/>
         </p:spPr>
         <p:txBody>
-          <a:bodyPr wrap="square">
+          <a:bodyPr wrap="square" lIns="45720" rIns="45720">
             <a:spAutoFit/>
           </a:bodyPr>
           <a:lstStyle/>
           <a:p>
-            <a:pPr>
+            <a:pPr algn="ctr">
               <a:defRPr>
                 <a:latin typeface="Roboto"/>
               </a:defRPr>
@@ -4097,21 +5785,21 @@
                 </a:solidFill>
                 <a:latin typeface="Roboto"/>
               </a:rPr>
-              <a:t>program-cost.pptx</a:t>
-            </a:r>
-          </a:p>
-        </p:txBody>
-      </p:sp>
-      <p:sp>
-        <p:nvSpPr>
-          <p:cNvPr id="10" name="TextBox 9"/>
+              <a:t>Data retrieved 2pm, Tue 6 Oct 2026 · Generated 8 Oct 2026, 9:35am · Sample data · Made with Python (python-pptx)</a:t>
+            </a:r>
+          </a:p>
+        </p:txBody>
+      </p:sp>
+      <p:sp>
+        <p:nvSpPr>
+          <p:cNvPr id="11" name="TextBox 10"/>
           <p:cNvSpPr txBox="1"/>
           <p:nvPr/>
         </p:nvSpPr>
         <p:spPr>
           <a:xfrm>
-            <a:off x="4297680" y="6492240"/>
-            <a:ext cx="3657600" cy="274320"/>
+            <a:off x="8503920" y="6492240"/>
+            <a:ext cx="3200400" cy="274320"/>
           </a:xfrm>
           <a:prstGeom prst="rect">
             <a:avLst/>
@@ -4119,12 +5807,12 @@
           <a:noFill/>
         </p:spPr>
         <p:txBody>
-          <a:bodyPr wrap="square">
+          <a:bodyPr wrap="square" lIns="45720" rIns="45720">
             <a:spAutoFit/>
           </a:bodyPr>
           <a:lstStyle/>
           <a:p>
-            <a:pPr algn="ctr">
+            <a:pPr algn="r">
               <a:defRPr>
                 <a:latin typeface="Roboto"/>
               </a:defRPr>
@@ -4136,363 +5824,7 @@
                 </a:solidFill>
                 <a:latin typeface="Roboto"/>
               </a:rPr>
-              <a:t>Data retrieved 2pm, Tue 6 Oct 2026 · Sample data</a:t>
-            </a:r>
-          </a:p>
-        </p:txBody>
-      </p:sp>
-      <p:sp>
-        <p:nvSpPr>
-          <p:cNvPr id="11" name="TextBox 10"/>
-          <p:cNvSpPr txBox="1"/>
-          <p:nvPr/>
-        </p:nvSpPr>
-        <p:spPr>
-          <a:xfrm>
-            <a:off x="8503920" y="6492240"/>
-            <a:ext cx="3200400" cy="274320"/>
-          </a:xfrm>
-          <a:prstGeom prst="rect">
-            <a:avLst/>
-          </a:prstGeom>
-          <a:noFill/>
-        </p:spPr>
-        <p:txBody>
-          <a:bodyPr wrap="square">
-            <a:spAutoFit/>
-          </a:bodyPr>
-          <a:lstStyle/>
-          <a:p>
-            <a:pPr algn="r">
-              <a:defRPr>
-                <a:latin typeface="Roboto"/>
-              </a:defRPr>
-            </a:pPr>
-            <a:r>
-              <a:rPr sz="900" b="0">
-                <a:solidFill>
-                  <a:srgbClr val="5F6F63"/>
-                </a:solidFill>
-                <a:latin typeface="Roboto"/>
-              </a:rPr>
-              <a:t>Slide 1 of 10</a:t>
-            </a:r>
-          </a:p>
-        </p:txBody>
-      </p:sp>
-    </p:spTree>
-  </p:cSld>
-  <p:clrMapOvr>
-    <a:masterClrMapping/>
-  </p:clrMapOvr>
-</p:sld>
-</file>
-
-<file path=ppt/slides/slide10.xml><?xml version="1.0" encoding="utf-8"?>
-<p:sld xmlns:a="http://schemas.openxmlformats.org/drawingml/2006/main" xmlns:p="http://schemas.openxmlformats.org/presentationml/2006/main" xmlns:r="http://schemas.openxmlformats.org/officeDocument/2006/relationships">
-  <p:cSld>
-    <p:spTree>
-      <p:nvGrpSpPr>
-        <p:cNvPr id="1" name=""/>
-        <p:cNvGrpSpPr/>
-        <p:nvPr/>
-      </p:nvGrpSpPr>
-      <p:grpSpPr/>
-      <p:sp>
-        <p:nvSpPr>
-          <p:cNvPr id="2" name="Rectangle 1"/>
-          <p:cNvSpPr/>
-          <p:nvPr/>
-        </p:nvSpPr>
-        <p:spPr>
-          <a:xfrm>
-            <a:off x="0" y="0"/>
-            <a:ext cx="12191695" cy="73152"/>
-          </a:xfrm>
-          <a:prstGeom prst="rect">
-            <a:avLst/>
-          </a:prstGeom>
-          <a:solidFill>
-            <a:srgbClr val="2F7A5D"/>
-          </a:solidFill>
-          <a:ln>
-            <a:noFill/>
-          </a:ln>
-        </p:spPr>
-        <p:style>
-          <a:lnRef idx="1">
-            <a:schemeClr val="accent1"/>
-          </a:lnRef>
-          <a:fillRef idx="3">
-            <a:schemeClr val="accent1"/>
-          </a:fillRef>
-          <a:effectRef idx="2">
-            <a:schemeClr val="accent1"/>
-          </a:effectRef>
-          <a:fontRef idx="minor">
-            <a:schemeClr val="lt1"/>
-          </a:fontRef>
-        </p:style>
-        <p:txBody>
-          <a:bodyPr rtlCol="0" anchor="ctr"/>
-          <a:lstStyle/>
-          <a:p>
-            <a:pPr algn="ctr">
-              <a:defRPr>
-                <a:latin typeface="Roboto"/>
-              </a:defRPr>
-            </a:pPr>
-          </a:p>
-        </p:txBody>
-      </p:sp>
-      <p:sp>
-        <p:nvSpPr>
-          <p:cNvPr id="3" name="TextBox 2"/>
-          <p:cNvSpPr txBox="1"/>
-          <p:nvPr/>
-        </p:nvSpPr>
-        <p:spPr>
-          <a:xfrm>
-            <a:off x="457200" y="164592"/>
-            <a:ext cx="7315200" cy="274320"/>
-          </a:xfrm>
-          <a:prstGeom prst="rect">
-            <a:avLst/>
-          </a:prstGeom>
-          <a:noFill/>
-        </p:spPr>
-        <p:txBody>
-          <a:bodyPr wrap="square">
-            <a:spAutoFit/>
-          </a:bodyPr>
-          <a:lstStyle/>
-          <a:p>
-            <a:pPr>
-              <a:defRPr>
-                <a:latin typeface="Roboto"/>
-              </a:defRPr>
-            </a:pPr>
-            <a:r>
-              <a:rPr sz="1000" b="0">
-                <a:solidFill>
-                  <a:srgbClr val="5F6F63"/>
-                </a:solidFill>
-                <a:latin typeface="Roboto"/>
-              </a:rPr>
-              <a:t>Sample Community Services Ltd · What does each program really cost?</a:t>
-            </a:r>
-          </a:p>
-        </p:txBody>
-      </p:sp>
-      <p:sp>
-        <p:nvSpPr>
-          <p:cNvPr id="4" name="TextBox 3"/>
-          <p:cNvSpPr txBox="1"/>
-          <p:nvPr/>
-        </p:nvSpPr>
-        <p:spPr>
-          <a:xfrm>
-            <a:off x="457200" y="411480"/>
-            <a:ext cx="11247120" cy="548640"/>
-          </a:xfrm>
-          <a:prstGeom prst="rect">
-            <a:avLst/>
-          </a:prstGeom>
-          <a:noFill/>
-        </p:spPr>
-        <p:txBody>
-          <a:bodyPr wrap="square">
-            <a:spAutoFit/>
-          </a:bodyPr>
-          <a:lstStyle/>
-          <a:p>
-            <a:pPr>
-              <a:defRPr>
-                <a:latin typeface="Roboto"/>
-              </a:defRPr>
-            </a:pPr>
-            <a:r>
-              <a:rPr sz="2400" b="1">
-                <a:solidFill>
-                  <a:srgbClr val="25342A"/>
-                </a:solidFill>
-                <a:latin typeface="Roboto"/>
-              </a:rPr>
-              <a:t>Grant spending, by month · Spend $ · Every program at once</a:t>
-            </a:r>
-          </a:p>
-        </p:txBody>
-      </p:sp>
-      <p:sp>
-        <p:nvSpPr>
-          <p:cNvPr id="5" name="TextBox 4"/>
-          <p:cNvSpPr txBox="1"/>
-          <p:nvPr/>
-        </p:nvSpPr>
-        <p:spPr>
-          <a:xfrm>
-            <a:off x="457200" y="960120"/>
-            <a:ext cx="11247120" cy="457200"/>
-          </a:xfrm>
-          <a:prstGeom prst="rect">
-            <a:avLst/>
-          </a:prstGeom>
-          <a:noFill/>
-        </p:spPr>
-        <p:txBody>
-          <a:bodyPr wrap="square">
-            <a:spAutoFit/>
-          </a:bodyPr>
-          <a:lstStyle/>
-          <a:p>
-            <a:pPr>
-              <a:defRPr>
-                <a:latin typeface="Roboto"/>
-              </a:defRPr>
-            </a:pPr>
-            <a:r>
-              <a:rPr sz="1200" b="0">
-                <a:solidFill>
-                  <a:srgbClr val="5F6F63"/>
-                </a:solidFill>
-                <a:latin typeface="Roboto"/>
-              </a:rPr>
-              <a:t>Grant spending only (the program's direct cost). All programs includes grants that have finished.</a:t>
-            </a:r>
-          </a:p>
-        </p:txBody>
-      </p:sp>
-      <p:graphicFrame>
-        <p:nvGraphicFramePr>
-          <p:cNvPr id="6" name="Chart 5"/>
-          <p:cNvGraphicFramePr>
-            <a:graphicFrameLocks noGrp="1"/>
-          </p:cNvGraphicFramePr>
-          <p:nvPr/>
-        </p:nvGraphicFramePr>
-        <p:xfrm>
-          <a:off x="457200" y="1463040"/>
-          <a:ext cx="11247120" cy="4754880"/>
-        </p:xfrm>
-        <a:graphic>
-          <a:graphicData uri="http://schemas.openxmlformats.org/drawingml/2006/chart">
-            <c:chart xmlns:c="http://schemas.openxmlformats.org/drawingml/2006/chart" r:id="rId2"/>
-          </a:graphicData>
-        </a:graphic>
-      </p:graphicFrame>
-      <p:sp>
-        <p:nvSpPr>
-          <p:cNvPr id="7" name="TextBox 6"/>
-          <p:cNvSpPr txBox="1"/>
-          <p:nvPr/>
-        </p:nvSpPr>
-        <p:spPr>
-          <a:xfrm>
-            <a:off x="457200" y="6492240"/>
-            <a:ext cx="3657600" cy="274320"/>
-          </a:xfrm>
-          <a:prstGeom prst="rect">
-            <a:avLst/>
-          </a:prstGeom>
-          <a:noFill/>
-        </p:spPr>
-        <p:txBody>
-          <a:bodyPr wrap="square">
-            <a:spAutoFit/>
-          </a:bodyPr>
-          <a:lstStyle/>
-          <a:p>
-            <a:pPr>
-              <a:defRPr>
-                <a:latin typeface="Roboto"/>
-              </a:defRPr>
-            </a:pPr>
-            <a:r>
-              <a:rPr sz="900" b="0">
-                <a:solidFill>
-                  <a:srgbClr val="5F6F63"/>
-                </a:solidFill>
-                <a:latin typeface="Roboto"/>
-              </a:rPr>
-              <a:t>program-cost.pptx</a:t>
-            </a:r>
-          </a:p>
-        </p:txBody>
-      </p:sp>
-      <p:sp>
-        <p:nvSpPr>
-          <p:cNvPr id="8" name="TextBox 7"/>
-          <p:cNvSpPr txBox="1"/>
-          <p:nvPr/>
-        </p:nvSpPr>
-        <p:spPr>
-          <a:xfrm>
-            <a:off x="4297680" y="6492240"/>
-            <a:ext cx="3657600" cy="274320"/>
-          </a:xfrm>
-          <a:prstGeom prst="rect">
-            <a:avLst/>
-          </a:prstGeom>
-          <a:noFill/>
-        </p:spPr>
-        <p:txBody>
-          <a:bodyPr wrap="square">
-            <a:spAutoFit/>
-          </a:bodyPr>
-          <a:lstStyle/>
-          <a:p>
-            <a:pPr algn="ctr">
-              <a:defRPr>
-                <a:latin typeface="Roboto"/>
-              </a:defRPr>
-            </a:pPr>
-            <a:r>
-              <a:rPr sz="900" b="0">
-                <a:solidFill>
-                  <a:srgbClr val="5F6F63"/>
-                </a:solidFill>
-                <a:latin typeface="Roboto"/>
-              </a:rPr>
-              <a:t>Data retrieved 2pm, Tue 6 Oct 2026 · Sample data</a:t>
-            </a:r>
-          </a:p>
-        </p:txBody>
-      </p:sp>
-      <p:sp>
-        <p:nvSpPr>
-          <p:cNvPr id="9" name="TextBox 8"/>
-          <p:cNvSpPr txBox="1"/>
-          <p:nvPr/>
-        </p:nvSpPr>
-        <p:spPr>
-          <a:xfrm>
-            <a:off x="8503920" y="6492240"/>
-            <a:ext cx="3200400" cy="274320"/>
-          </a:xfrm>
-          <a:prstGeom prst="rect">
-            <a:avLst/>
-          </a:prstGeom>
-          <a:noFill/>
-        </p:spPr>
-        <p:txBody>
-          <a:bodyPr wrap="square">
-            <a:spAutoFit/>
-          </a:bodyPr>
-          <a:lstStyle/>
-          <a:p>
-            <a:pPr algn="r">
-              <a:defRPr>
-                <a:latin typeface="Roboto"/>
-              </a:defRPr>
-            </a:pPr>
-            <a:r>
-              <a:rPr sz="900" b="0">
-                <a:solidFill>
-                  <a:srgbClr val="5F6F63"/>
-                </a:solidFill>
-                <a:latin typeface="Roboto"/>
-              </a:rPr>
-              <a:t>Slide 10 of 10</a:t>
+              <a:t>Slide 1 of 7</a:t>
             </a:r>
           </a:p>
         </p:txBody>
@@ -4517,7 +5849,44 @@
       <p:grpSpPr/>
       <p:sp>
         <p:nvSpPr>
-          <p:cNvPr id="2" name="Rectangle 1"/>
+          <p:cNvPr id="2" name="Title 1"/>
+          <p:cNvSpPr>
+            <a:spLocks noGrp="1"/>
+          </p:cNvSpPr>
+          <p:nvPr>
+            <p:ph type="title"/>
+          </p:nvPr>
+        </p:nvSpPr>
+        <p:spPr>
+          <a:xfrm>
+            <a:off x="457200" y="384048"/>
+            <a:ext cx="11277295" cy="475488"/>
+          </a:xfrm>
+        </p:spPr>
+        <p:txBody>
+          <a:bodyPr wrap="square" lIns="45720" rIns="45720" tIns="0" bIns="0" anchor="t"/>
+          <a:lstStyle/>
+          <a:p>
+            <a:pPr algn="l">
+              <a:defRPr>
+                <a:latin typeface="Roboto"/>
+              </a:defRPr>
+            </a:pPr>
+            <a:r>
+              <a:rPr sz="2400" b="1">
+                <a:solidFill>
+                  <a:srgbClr val="25342A"/>
+                </a:solidFill>
+                <a:latin typeface="Roboto"/>
+              </a:rPr>
+              <a:t>All programs</a:t>
+            </a:r>
+          </a:p>
+        </p:txBody>
+      </p:sp>
+      <p:sp>
+        <p:nvSpPr>
+          <p:cNvPr id="3" name="Rectangle 2"/>
           <p:cNvSpPr/>
           <p:nvPr/>
         </p:nvSpPr>
@@ -4564,14 +5933,14 @@
       </p:sp>
       <p:sp>
         <p:nvSpPr>
-          <p:cNvPr id="3" name="TextBox 2"/>
+          <p:cNvPr id="4" name="TextBox 3"/>
           <p:cNvSpPr txBox="1"/>
           <p:nvPr/>
         </p:nvSpPr>
         <p:spPr>
           <a:xfrm>
-            <a:off x="457200" y="164592"/>
-            <a:ext cx="7315200" cy="274320"/>
+            <a:off x="457200" y="146304"/>
+            <a:ext cx="8229600" cy="256032"/>
           </a:xfrm>
           <a:prstGeom prst="rect">
             <a:avLst/>
@@ -4579,7 +5948,7 @@
           <a:noFill/>
         </p:spPr>
         <p:txBody>
-          <a:bodyPr wrap="square">
+          <a:bodyPr wrap="square" lIns="45720" rIns="45720">
             <a:spAutoFit/>
           </a:bodyPr>
           <a:lstStyle/>
@@ -4603,14 +5972,14 @@
       </p:sp>
       <p:sp>
         <p:nvSpPr>
-          <p:cNvPr id="4" name="TextBox 3"/>
+          <p:cNvPr id="5" name="TextBox 4"/>
           <p:cNvSpPr txBox="1"/>
           <p:nvPr/>
         </p:nvSpPr>
         <p:spPr>
           <a:xfrm>
-            <a:off x="457200" y="411480"/>
-            <a:ext cx="11247120" cy="548640"/>
+            <a:off x="457200" y="914400"/>
+            <a:ext cx="11277295" cy="263652"/>
           </a:xfrm>
           <a:prstGeom prst="rect">
             <a:avLst/>
@@ -4618,7 +5987,7 @@
           <a:noFill/>
         </p:spPr>
         <p:txBody>
-          <a:bodyPr wrap="square">
+          <a:bodyPr wrap="square" lIns="45720" rIns="45720">
             <a:spAutoFit/>
           </a:bodyPr>
           <a:lstStyle/>
@@ -4629,45 +5998,94 @@
               </a:defRPr>
             </a:pPr>
             <a:r>
-              <a:rPr sz="2400" b="1">
+              <a:rPr sz="1200" b="0">
                 <a:solidFill>
-                  <a:srgbClr val="25342A"/>
+                  <a:srgbClr val="5F6F63"/>
                 </a:solidFill>
                 <a:latin typeface="Roboto"/>
               </a:rPr>
-              <a:t>Full cost of each program, October 2025 · $ · Program: All programs</a:t>
+              <a:t>Full cost of each program, October 2025</a:t>
             </a:r>
           </a:p>
         </p:txBody>
       </p:sp>
       <p:graphicFrame>
         <p:nvGraphicFramePr>
-          <p:cNvPr id="5" name="Chart 4"/>
+          <p:cNvPr id="6" name="Chart 5"/>
           <p:cNvGraphicFramePr>
             <a:graphicFrameLocks noGrp="1"/>
           </p:cNvGraphicFramePr>
           <p:nvPr/>
         </p:nvGraphicFramePr>
         <p:xfrm>
-          <a:off x="457200" y="1188720"/>
-          <a:ext cx="11247120" cy="5029200"/>
+          <a:off x="457200" y="1278636"/>
+          <a:ext cx="11277295" cy="2651760"/>
         </p:xfrm>
         <a:graphic>
           <a:graphicData uri="http://schemas.openxmlformats.org/drawingml/2006/chart">
-            <c:chart xmlns:c="http://schemas.openxmlformats.org/drawingml/2006/chart" r:id="rId2"/>
+            <c:chart xmlns:c="http://schemas.openxmlformats.org/drawingml/2006/chart" r:id="rId3"/>
           </a:graphicData>
         </a:graphic>
       </p:graphicFrame>
       <p:sp>
         <p:nvSpPr>
-          <p:cNvPr id="6" name="TextBox 5"/>
+          <p:cNvPr id="7" name="Rectangle 6"/>
+          <p:cNvSpPr/>
+          <p:nvPr/>
+        </p:nvSpPr>
+        <p:spPr>
+          <a:xfrm>
+            <a:off x="457200" y="4021836"/>
+            <a:ext cx="5501487" cy="1295400"/>
+          </a:xfrm>
+          <a:prstGeom prst="rect">
+            <a:avLst/>
+          </a:prstGeom>
+          <a:solidFill>
+            <a:srgbClr val="FFFFFF"/>
+          </a:solidFill>
+          <a:ln>
+            <a:solidFill>
+              <a:srgbClr val="DCE8DC"/>
+            </a:solidFill>
+          </a:ln>
+        </p:spPr>
+        <p:style>
+          <a:lnRef idx="1">
+            <a:schemeClr val="accent1"/>
+          </a:lnRef>
+          <a:fillRef idx="3">
+            <a:schemeClr val="accent1"/>
+          </a:fillRef>
+          <a:effectRef idx="2">
+            <a:schemeClr val="accent1"/>
+          </a:effectRef>
+          <a:fontRef idx="minor">
+            <a:schemeClr val="lt1"/>
+          </a:fontRef>
+        </p:style>
+        <p:txBody>
+          <a:bodyPr rtlCol="0" anchor="ctr"/>
+          <a:lstStyle/>
+          <a:p>
+            <a:pPr algn="ctr">
+              <a:defRPr>
+                <a:latin typeface="Roboto"/>
+              </a:defRPr>
+            </a:pPr>
+          </a:p>
+        </p:txBody>
+      </p:sp>
+      <p:sp>
+        <p:nvSpPr>
+          <p:cNvPr id="8" name="TextBox 7"/>
           <p:cNvSpPr txBox="1"/>
           <p:nvPr/>
         </p:nvSpPr>
         <p:spPr>
           <a:xfrm>
-            <a:off x="457200" y="6492240"/>
-            <a:ext cx="3657600" cy="274320"/>
+            <a:off x="594360" y="4076700"/>
+            <a:ext cx="5227167" cy="274320"/>
           </a:xfrm>
           <a:prstGeom prst="rect">
             <a:avLst/>
@@ -4675,7 +6093,212 @@
           <a:noFill/>
         </p:spPr>
         <p:txBody>
-          <a:bodyPr wrap="square">
+          <a:bodyPr wrap="square" lIns="45720" rIns="45720">
+            <a:spAutoFit/>
+          </a:bodyPr>
+          <a:lstStyle/>
+          <a:p>
+            <a:pPr>
+              <a:defRPr>
+                <a:latin typeface="Roboto"/>
+              </a:defRPr>
+            </a:pPr>
+            <a:r>
+              <a:rPr sz="1000" b="1">
+                <a:solidFill>
+                  <a:srgbClr val="5F6F63"/>
+                </a:solidFill>
+                <a:latin typeface="Roboto"/>
+              </a:rPr>
+              <a:t>WHAT IT SHOWS</a:t>
+            </a:r>
+          </a:p>
+        </p:txBody>
+      </p:sp>
+      <p:sp>
+        <p:nvSpPr>
+          <p:cNvPr id="9" name="TextBox 8"/>
+          <p:cNvSpPr txBox="1"/>
+          <p:nvPr/>
+        </p:nvSpPr>
+        <p:spPr>
+          <a:xfrm>
+            <a:off x="594360" y="4351020"/>
+            <a:ext cx="5227167" cy="929640"/>
+          </a:xfrm>
+          <a:prstGeom prst="rect">
+            <a:avLst/>
+          </a:prstGeom>
+          <a:noFill/>
+        </p:spPr>
+        <p:txBody>
+          <a:bodyPr wrap="square" lIns="45720" rIns="45720">
+            <a:spAutoFit/>
+          </a:bodyPr>
+          <a:lstStyle/>
+          <a:p>
+            <a:pPr>
+              <a:defRPr>
+                <a:latin typeface="Roboto"/>
+              </a:defRPr>
+            </a:pPr>
+            <a:r>
+              <a:rPr sz="1200" b="0">
+                <a:solidFill>
+                  <a:srgbClr val="25342A"/>
+                </a:solidFill>
+                <a:latin typeface="Roboto"/>
+              </a:rPr>
+              <a:t>Housing support (2025) is the biggest program: $46,631 in October once its share of untied program costs and administration is added to $26,600 of grant spending. Shared costs add 75.3% on top of grant spending across all programs.</a:t>
+            </a:r>
+          </a:p>
+        </p:txBody>
+      </p:sp>
+      <p:sp>
+        <p:nvSpPr>
+          <p:cNvPr id="10" name="Rectangle 9"/>
+          <p:cNvSpPr/>
+          <p:nvPr/>
+        </p:nvSpPr>
+        <p:spPr>
+          <a:xfrm>
+            <a:off x="6233007" y="4021836"/>
+            <a:ext cx="5501487" cy="1295400"/>
+          </a:xfrm>
+          <a:prstGeom prst="rect">
+            <a:avLst/>
+          </a:prstGeom>
+          <a:solidFill>
+            <a:srgbClr val="EEF5F0"/>
+          </a:solidFill>
+          <a:ln>
+            <a:solidFill>
+              <a:srgbClr val="DCE8DC"/>
+            </a:solidFill>
+          </a:ln>
+        </p:spPr>
+        <p:style>
+          <a:lnRef idx="1">
+            <a:schemeClr val="accent1"/>
+          </a:lnRef>
+          <a:fillRef idx="3">
+            <a:schemeClr val="accent1"/>
+          </a:fillRef>
+          <a:effectRef idx="2">
+            <a:schemeClr val="accent1"/>
+          </a:effectRef>
+          <a:fontRef idx="minor">
+            <a:schemeClr val="lt1"/>
+          </a:fontRef>
+        </p:style>
+        <p:txBody>
+          <a:bodyPr rtlCol="0" anchor="ctr"/>
+          <a:lstStyle/>
+          <a:p>
+            <a:pPr algn="ctr">
+              <a:defRPr>
+                <a:latin typeface="Roboto"/>
+              </a:defRPr>
+            </a:pPr>
+          </a:p>
+        </p:txBody>
+      </p:sp>
+      <p:sp>
+        <p:nvSpPr>
+          <p:cNvPr id="11" name="TextBox 10"/>
+          <p:cNvSpPr txBox="1"/>
+          <p:nvPr/>
+        </p:nvSpPr>
+        <p:spPr>
+          <a:xfrm>
+            <a:off x="6370167" y="4076700"/>
+            <a:ext cx="5227167" cy="274320"/>
+          </a:xfrm>
+          <a:prstGeom prst="rect">
+            <a:avLst/>
+          </a:prstGeom>
+          <a:noFill/>
+        </p:spPr>
+        <p:txBody>
+          <a:bodyPr wrap="square" lIns="45720" rIns="45720">
+            <a:spAutoFit/>
+          </a:bodyPr>
+          <a:lstStyle/>
+          <a:p>
+            <a:pPr>
+              <a:defRPr>
+                <a:latin typeface="Roboto"/>
+              </a:defRPr>
+            </a:pPr>
+            <a:r>
+              <a:rPr sz="1000" b="1">
+                <a:solidFill>
+                  <a:srgbClr val="5F6F63"/>
+                </a:solidFill>
+                <a:latin typeface="Roboto"/>
+              </a:rPr>
+              <a:t>WHAT YOU'D DO ABOUT IT</a:t>
+            </a:r>
+          </a:p>
+        </p:txBody>
+      </p:sp>
+      <p:sp>
+        <p:nvSpPr>
+          <p:cNvPr id="12" name="TextBox 11"/>
+          <p:cNvSpPr txBox="1"/>
+          <p:nvPr/>
+        </p:nvSpPr>
+        <p:spPr>
+          <a:xfrm>
+            <a:off x="6370167" y="4351020"/>
+            <a:ext cx="5227167" cy="929640"/>
+          </a:xfrm>
+          <a:prstGeom prst="rect">
+            <a:avLst/>
+          </a:prstGeom>
+          <a:noFill/>
+        </p:spPr>
+        <p:txBody>
+          <a:bodyPr wrap="square" lIns="45720" rIns="45720">
+            <a:spAutoFit/>
+          </a:bodyPr>
+          <a:lstStyle/>
+          <a:p>
+            <a:pPr>
+              <a:defRPr>
+                <a:latin typeface="Roboto"/>
+              </a:defRPr>
+            </a:pPr>
+            <a:r>
+              <a:rPr sz="1200" b="0">
+                <a:solidFill>
+                  <a:srgbClr val="25342A"/>
+                </a:solidFill>
+                <a:latin typeface="Roboto"/>
+              </a:rPr>
+              <a:t>The full cost (not just the grant line) is the number for renewal applications, where the funder lets you recover a share of overheads. Pick a program above to see it on its own.</a:t>
+            </a:r>
+          </a:p>
+        </p:txBody>
+      </p:sp>
+      <p:sp>
+        <p:nvSpPr>
+          <p:cNvPr id="13" name="TextBox 12"/>
+          <p:cNvSpPr txBox="1"/>
+          <p:nvPr/>
+        </p:nvSpPr>
+        <p:spPr>
+          <a:xfrm>
+            <a:off x="457200" y="6492240"/>
+            <a:ext cx="2926080" cy="274320"/>
+          </a:xfrm>
+          <a:prstGeom prst="rect">
+            <a:avLst/>
+          </a:prstGeom>
+          <a:noFill/>
+        </p:spPr>
+        <p:txBody>
+          <a:bodyPr wrap="square" lIns="45720" rIns="45720">
             <a:spAutoFit/>
           </a:bodyPr>
           <a:lstStyle/>
@@ -4699,14 +6322,14 @@
       </p:sp>
       <p:sp>
         <p:nvSpPr>
-          <p:cNvPr id="7" name="TextBox 6"/>
+          <p:cNvPr id="14" name="TextBox 13"/>
           <p:cNvSpPr txBox="1"/>
           <p:nvPr/>
         </p:nvSpPr>
         <p:spPr>
           <a:xfrm>
-            <a:off x="4297680" y="6492240"/>
-            <a:ext cx="3657600" cy="274320"/>
+            <a:off x="3108960" y="6492240"/>
+            <a:ext cx="5943600" cy="274320"/>
           </a:xfrm>
           <a:prstGeom prst="rect">
             <a:avLst/>
@@ -4714,7 +6337,7 @@
           <a:noFill/>
         </p:spPr>
         <p:txBody>
-          <a:bodyPr wrap="square">
+          <a:bodyPr wrap="square" lIns="45720" rIns="45720">
             <a:spAutoFit/>
           </a:bodyPr>
           <a:lstStyle/>
@@ -4731,14 +6354,14 @@
                 </a:solidFill>
                 <a:latin typeface="Roboto"/>
               </a:rPr>
-              <a:t>Data retrieved 2pm, Tue 6 Oct 2026 · Sample data</a:t>
-            </a:r>
-          </a:p>
-        </p:txBody>
-      </p:sp>
-      <p:sp>
-        <p:nvSpPr>
-          <p:cNvPr id="8" name="TextBox 7"/>
+              <a:t>Data retrieved 2pm, Tue 6 Oct 2026 · Generated 8 Oct 2026, 9:35am · Sample data · Made with Python (python-pptx)</a:t>
+            </a:r>
+          </a:p>
+        </p:txBody>
+      </p:sp>
+      <p:sp>
+        <p:nvSpPr>
+          <p:cNvPr id="15" name="TextBox 14"/>
           <p:cNvSpPr txBox="1"/>
           <p:nvPr/>
         </p:nvSpPr>
@@ -4753,7 +6376,7 @@
           <a:noFill/>
         </p:spPr>
         <p:txBody>
-          <a:bodyPr wrap="square">
+          <a:bodyPr wrap="square" lIns="45720" rIns="45720">
             <a:spAutoFit/>
           </a:bodyPr>
           <a:lstStyle/>
@@ -4770,7 +6393,7 @@
                 </a:solidFill>
                 <a:latin typeface="Roboto"/>
               </a:rPr>
-              <a:t>Slide 2 of 10</a:t>
+              <a:t>Slide 2 of 7</a:t>
             </a:r>
           </a:p>
         </p:txBody>
@@ -4795,7 +6418,44 @@
       <p:grpSpPr/>
       <p:sp>
         <p:nvSpPr>
-          <p:cNvPr id="2" name="Rectangle 1"/>
+          <p:cNvPr id="2" name="Title 1"/>
+          <p:cNvSpPr>
+            <a:spLocks noGrp="1"/>
+          </p:cNvSpPr>
+          <p:nvPr>
+            <p:ph type="title"/>
+          </p:nvPr>
+        </p:nvSpPr>
+        <p:spPr>
+          <a:xfrm>
+            <a:off x="457200" y="384048"/>
+            <a:ext cx="11277295" cy="475488"/>
+          </a:xfrm>
+        </p:spPr>
+        <p:txBody>
+          <a:bodyPr wrap="square" lIns="45720" rIns="45720" tIns="0" bIns="0" anchor="t"/>
+          <a:lstStyle/>
+          <a:p>
+            <a:pPr algn="l">
+              <a:defRPr>
+                <a:latin typeface="Roboto"/>
+              </a:defRPr>
+            </a:pPr>
+            <a:r>
+              <a:rPr sz="2400" b="1">
+                <a:solidFill>
+                  <a:srgbClr val="25342A"/>
+                </a:solidFill>
+                <a:latin typeface="Roboto"/>
+              </a:rPr>
+              <a:t>Housing support (2025)</a:t>
+            </a:r>
+          </a:p>
+        </p:txBody>
+      </p:sp>
+      <p:sp>
+        <p:nvSpPr>
+          <p:cNvPr id="3" name="Rectangle 2"/>
           <p:cNvSpPr/>
           <p:nvPr/>
         </p:nvSpPr>
@@ -4842,14 +6502,14 @@
       </p:sp>
       <p:sp>
         <p:nvSpPr>
-          <p:cNvPr id="3" name="TextBox 2"/>
+          <p:cNvPr id="4" name="TextBox 3"/>
           <p:cNvSpPr txBox="1"/>
           <p:nvPr/>
         </p:nvSpPr>
         <p:spPr>
           <a:xfrm>
-            <a:off x="457200" y="164592"/>
-            <a:ext cx="7315200" cy="274320"/>
+            <a:off x="457200" y="146304"/>
+            <a:ext cx="8229600" cy="256032"/>
           </a:xfrm>
           <a:prstGeom prst="rect">
             <a:avLst/>
@@ -4857,7 +6517,7 @@
           <a:noFill/>
         </p:spPr>
         <p:txBody>
-          <a:bodyPr wrap="square">
+          <a:bodyPr wrap="square" lIns="45720" rIns="45720">
             <a:spAutoFit/>
           </a:bodyPr>
           <a:lstStyle/>
@@ -4881,14 +6541,14 @@
       </p:sp>
       <p:sp>
         <p:nvSpPr>
-          <p:cNvPr id="4" name="TextBox 3"/>
+          <p:cNvPr id="5" name="TextBox 4"/>
           <p:cNvSpPr txBox="1"/>
           <p:nvPr/>
         </p:nvSpPr>
         <p:spPr>
           <a:xfrm>
-            <a:off x="457200" y="411480"/>
-            <a:ext cx="11247120" cy="548640"/>
+            <a:off x="457200" y="914400"/>
+            <a:ext cx="11277295" cy="263652"/>
           </a:xfrm>
           <a:prstGeom prst="rect">
             <a:avLst/>
@@ -4896,7 +6556,7 @@
           <a:noFill/>
         </p:spPr>
         <p:txBody>
-          <a:bodyPr wrap="square">
+          <a:bodyPr wrap="square" lIns="45720" rIns="45720">
             <a:spAutoFit/>
           </a:bodyPr>
           <a:lstStyle/>
@@ -4907,45 +6567,94 @@
               </a:defRPr>
             </a:pPr>
             <a:r>
-              <a:rPr sz="2400" b="1">
+              <a:rPr sz="1200" b="0">
                 <a:solidFill>
-                  <a:srgbClr val="25342A"/>
+                  <a:srgbClr val="5F6F63"/>
                 </a:solidFill>
                 <a:latin typeface="Roboto"/>
               </a:rPr>
-              <a:t>Full cost of each program, October 2025 · % of total · Program: All programs</a:t>
+              <a:t>Grant spending, by month · Housing support (2025)</a:t>
             </a:r>
           </a:p>
         </p:txBody>
       </p:sp>
       <p:graphicFrame>
         <p:nvGraphicFramePr>
-          <p:cNvPr id="5" name="Chart 4"/>
+          <p:cNvPr id="6" name="Chart 5"/>
           <p:cNvGraphicFramePr>
             <a:graphicFrameLocks noGrp="1"/>
           </p:cNvGraphicFramePr>
           <p:nvPr/>
         </p:nvGraphicFramePr>
         <p:xfrm>
-          <a:off x="457200" y="1188720"/>
-          <a:ext cx="11247120" cy="5029200"/>
+          <a:off x="457200" y="1278636"/>
+          <a:ext cx="11277295" cy="3643884"/>
         </p:xfrm>
         <a:graphic>
           <a:graphicData uri="http://schemas.openxmlformats.org/drawingml/2006/chart">
-            <c:chart xmlns:c="http://schemas.openxmlformats.org/drawingml/2006/chart" r:id="rId2"/>
+            <c:chart xmlns:c="http://schemas.openxmlformats.org/drawingml/2006/chart" r:id="rId3"/>
           </a:graphicData>
         </a:graphic>
       </p:graphicFrame>
       <p:sp>
         <p:nvSpPr>
-          <p:cNvPr id="6" name="TextBox 5"/>
+          <p:cNvPr id="7" name="Rectangle 6"/>
+          <p:cNvSpPr/>
+          <p:nvPr/>
+        </p:nvSpPr>
+        <p:spPr>
+          <a:xfrm>
+            <a:off x="457200" y="5013960"/>
+            <a:ext cx="5501487" cy="1295400"/>
+          </a:xfrm>
+          <a:prstGeom prst="rect">
+            <a:avLst/>
+          </a:prstGeom>
+          <a:solidFill>
+            <a:srgbClr val="FFFFFF"/>
+          </a:solidFill>
+          <a:ln>
+            <a:solidFill>
+              <a:srgbClr val="DCE8DC"/>
+            </a:solidFill>
+          </a:ln>
+        </p:spPr>
+        <p:style>
+          <a:lnRef idx="1">
+            <a:schemeClr val="accent1"/>
+          </a:lnRef>
+          <a:fillRef idx="3">
+            <a:schemeClr val="accent1"/>
+          </a:fillRef>
+          <a:effectRef idx="2">
+            <a:schemeClr val="accent1"/>
+          </a:effectRef>
+          <a:fontRef idx="minor">
+            <a:schemeClr val="lt1"/>
+          </a:fontRef>
+        </p:style>
+        <p:txBody>
+          <a:bodyPr rtlCol="0" anchor="ctr"/>
+          <a:lstStyle/>
+          <a:p>
+            <a:pPr algn="ctr">
+              <a:defRPr>
+                <a:latin typeface="Roboto"/>
+              </a:defRPr>
+            </a:pPr>
+          </a:p>
+        </p:txBody>
+      </p:sp>
+      <p:sp>
+        <p:nvSpPr>
+          <p:cNvPr id="8" name="TextBox 7"/>
           <p:cNvSpPr txBox="1"/>
           <p:nvPr/>
         </p:nvSpPr>
         <p:spPr>
           <a:xfrm>
-            <a:off x="457200" y="6492240"/>
-            <a:ext cx="3657600" cy="274320"/>
+            <a:off x="594360" y="5068824"/>
+            <a:ext cx="5227167" cy="274320"/>
           </a:xfrm>
           <a:prstGeom prst="rect">
             <a:avLst/>
@@ -4953,7 +6662,212 @@
           <a:noFill/>
         </p:spPr>
         <p:txBody>
-          <a:bodyPr wrap="square">
+          <a:bodyPr wrap="square" lIns="45720" rIns="45720">
+            <a:spAutoFit/>
+          </a:bodyPr>
+          <a:lstStyle/>
+          <a:p>
+            <a:pPr>
+              <a:defRPr>
+                <a:latin typeface="Roboto"/>
+              </a:defRPr>
+            </a:pPr>
+            <a:r>
+              <a:rPr sz="1000" b="1">
+                <a:solidFill>
+                  <a:srgbClr val="5F6F63"/>
+                </a:solidFill>
+                <a:latin typeface="Roboto"/>
+              </a:rPr>
+              <a:t>WHAT IT SHOWS</a:t>
+            </a:r>
+          </a:p>
+        </p:txBody>
+      </p:sp>
+      <p:sp>
+        <p:nvSpPr>
+          <p:cNvPr id="9" name="TextBox 8"/>
+          <p:cNvSpPr txBox="1"/>
+          <p:nvPr/>
+        </p:nvSpPr>
+        <p:spPr>
+          <a:xfrm>
+            <a:off x="594360" y="5343144"/>
+            <a:ext cx="5227167" cy="929640"/>
+          </a:xfrm>
+          <a:prstGeom prst="rect">
+            <a:avLst/>
+          </a:prstGeom>
+          <a:noFill/>
+        </p:spPr>
+        <p:txBody>
+          <a:bodyPr wrap="square" lIns="45720" rIns="45720">
+            <a:spAutoFit/>
+          </a:bodyPr>
+          <a:lstStyle/>
+          <a:p>
+            <a:pPr>
+              <a:defRPr>
+                <a:latin typeface="Roboto"/>
+              </a:defRPr>
+            </a:pPr>
+            <a:r>
+              <a:rPr sz="1200" b="0">
+                <a:solidFill>
+                  <a:srgbClr val="25342A"/>
+                </a:solidFill>
+                <a:latin typeface="Roboto"/>
+              </a:rPr>
+              <a:t>Housing support (2025) cost $46,631 in full in October: $26,600 paid by the State Housing Program grant, and $20,031 of shared costs no grant covers. It has spent 98.9% of its budget to date, with $59,100 left and 2 months to go.</a:t>
+            </a:r>
+          </a:p>
+        </p:txBody>
+      </p:sp>
+      <p:sp>
+        <p:nvSpPr>
+          <p:cNvPr id="10" name="Rectangle 9"/>
+          <p:cNvSpPr/>
+          <p:nvPr/>
+        </p:nvSpPr>
+        <p:spPr>
+          <a:xfrm>
+            <a:off x="6233007" y="5013960"/>
+            <a:ext cx="5501487" cy="1295400"/>
+          </a:xfrm>
+          <a:prstGeom prst="rect">
+            <a:avLst/>
+          </a:prstGeom>
+          <a:solidFill>
+            <a:srgbClr val="EEF5F0"/>
+          </a:solidFill>
+          <a:ln>
+            <a:solidFill>
+              <a:srgbClr val="DCE8DC"/>
+            </a:solidFill>
+          </a:ln>
+        </p:spPr>
+        <p:style>
+          <a:lnRef idx="1">
+            <a:schemeClr val="accent1"/>
+          </a:lnRef>
+          <a:fillRef idx="3">
+            <a:schemeClr val="accent1"/>
+          </a:fillRef>
+          <a:effectRef idx="2">
+            <a:schemeClr val="accent1"/>
+          </a:effectRef>
+          <a:fontRef idx="minor">
+            <a:schemeClr val="lt1"/>
+          </a:fontRef>
+        </p:style>
+        <p:txBody>
+          <a:bodyPr rtlCol="0" anchor="ctr"/>
+          <a:lstStyle/>
+          <a:p>
+            <a:pPr algn="ctr">
+              <a:defRPr>
+                <a:latin typeface="Roboto"/>
+              </a:defRPr>
+            </a:pPr>
+          </a:p>
+        </p:txBody>
+      </p:sp>
+      <p:sp>
+        <p:nvSpPr>
+          <p:cNvPr id="11" name="TextBox 10"/>
+          <p:cNvSpPr txBox="1"/>
+          <p:nvPr/>
+        </p:nvSpPr>
+        <p:spPr>
+          <a:xfrm>
+            <a:off x="6370167" y="5068824"/>
+            <a:ext cx="5227167" cy="274320"/>
+          </a:xfrm>
+          <a:prstGeom prst="rect">
+            <a:avLst/>
+          </a:prstGeom>
+          <a:noFill/>
+        </p:spPr>
+        <p:txBody>
+          <a:bodyPr wrap="square" lIns="45720" rIns="45720">
+            <a:spAutoFit/>
+          </a:bodyPr>
+          <a:lstStyle/>
+          <a:p>
+            <a:pPr>
+              <a:defRPr>
+                <a:latin typeface="Roboto"/>
+              </a:defRPr>
+            </a:pPr>
+            <a:r>
+              <a:rPr sz="1000" b="1">
+                <a:solidFill>
+                  <a:srgbClr val="5F6F63"/>
+                </a:solidFill>
+                <a:latin typeface="Roboto"/>
+              </a:rPr>
+              <a:t>WHAT YOU'D DO ABOUT IT</a:t>
+            </a:r>
+          </a:p>
+        </p:txBody>
+      </p:sp>
+      <p:sp>
+        <p:nvSpPr>
+          <p:cNvPr id="12" name="TextBox 11"/>
+          <p:cNvSpPr txBox="1"/>
+          <p:nvPr/>
+        </p:nvSpPr>
+        <p:spPr>
+          <a:xfrm>
+            <a:off x="6370167" y="5343144"/>
+            <a:ext cx="5227167" cy="929640"/>
+          </a:xfrm>
+          <a:prstGeom prst="rect">
+            <a:avLst/>
+          </a:prstGeom>
+          <a:noFill/>
+        </p:spPr>
+        <p:txBody>
+          <a:bodyPr wrap="square" lIns="45720" rIns="45720">
+            <a:spAutoFit/>
+          </a:bodyPr>
+          <a:lstStyle/>
+          <a:p>
+            <a:pPr>
+              <a:defRPr>
+                <a:latin typeface="Roboto"/>
+              </a:defRPr>
+            </a:pPr>
+            <a:r>
+              <a:rPr sz="1200" b="0">
+                <a:solidFill>
+                  <a:srgbClr val="25342A"/>
+                </a:solidFill>
+                <a:latin typeface="Roboto"/>
+              </a:rPr>
+              <a:t>The full cost is $46,631 a month; $20,031 of it is shared cost the grant doesn't pay for. Worth asking for as much of it as the funder allows at renewal.</a:t>
+            </a:r>
+          </a:p>
+        </p:txBody>
+      </p:sp>
+      <p:sp>
+        <p:nvSpPr>
+          <p:cNvPr id="13" name="TextBox 12"/>
+          <p:cNvSpPr txBox="1"/>
+          <p:nvPr/>
+        </p:nvSpPr>
+        <p:spPr>
+          <a:xfrm>
+            <a:off x="457200" y="6492240"/>
+            <a:ext cx="2926080" cy="274320"/>
+          </a:xfrm>
+          <a:prstGeom prst="rect">
+            <a:avLst/>
+          </a:prstGeom>
+          <a:noFill/>
+        </p:spPr>
+        <p:txBody>
+          <a:bodyPr wrap="square" lIns="45720" rIns="45720">
             <a:spAutoFit/>
           </a:bodyPr>
           <a:lstStyle/>
@@ -4977,14 +6891,14 @@
       </p:sp>
       <p:sp>
         <p:nvSpPr>
-          <p:cNvPr id="7" name="TextBox 6"/>
+          <p:cNvPr id="14" name="TextBox 13"/>
           <p:cNvSpPr txBox="1"/>
           <p:nvPr/>
         </p:nvSpPr>
         <p:spPr>
           <a:xfrm>
-            <a:off x="4297680" y="6492240"/>
-            <a:ext cx="3657600" cy="274320"/>
+            <a:off x="3108960" y="6492240"/>
+            <a:ext cx="5943600" cy="274320"/>
           </a:xfrm>
           <a:prstGeom prst="rect">
             <a:avLst/>
@@ -4992,7 +6906,7 @@
           <a:noFill/>
         </p:spPr>
         <p:txBody>
-          <a:bodyPr wrap="square">
+          <a:bodyPr wrap="square" lIns="45720" rIns="45720">
             <a:spAutoFit/>
           </a:bodyPr>
           <a:lstStyle/>
@@ -5009,14 +6923,14 @@
                 </a:solidFill>
                 <a:latin typeface="Roboto"/>
               </a:rPr>
-              <a:t>Data retrieved 2pm, Tue 6 Oct 2026 · Sample data</a:t>
-            </a:r>
-          </a:p>
-        </p:txBody>
-      </p:sp>
-      <p:sp>
-        <p:nvSpPr>
-          <p:cNvPr id="8" name="TextBox 7"/>
+              <a:t>Data retrieved 2pm, Tue 6 Oct 2026 · Generated 8 Oct 2026, 9:35am · Sample data · Made with Python (python-pptx)</a:t>
+            </a:r>
+          </a:p>
+        </p:txBody>
+      </p:sp>
+      <p:sp>
+        <p:nvSpPr>
+          <p:cNvPr id="15" name="TextBox 14"/>
           <p:cNvSpPr txBox="1"/>
           <p:nvPr/>
         </p:nvSpPr>
@@ -5031,7 +6945,7 @@
           <a:noFill/>
         </p:spPr>
         <p:txBody>
-          <a:bodyPr wrap="square">
+          <a:bodyPr wrap="square" lIns="45720" rIns="45720">
             <a:spAutoFit/>
           </a:bodyPr>
           <a:lstStyle/>
@@ -5048,7 +6962,7 @@
                 </a:solidFill>
                 <a:latin typeface="Roboto"/>
               </a:rPr>
-              <a:t>Slide 3 of 10</a:t>
+              <a:t>Slide 3 of 7</a:t>
             </a:r>
           </a:p>
         </p:txBody>
@@ -5073,7 +6987,44 @@
       <p:grpSpPr/>
       <p:sp>
         <p:nvSpPr>
-          <p:cNvPr id="2" name="Rectangle 1"/>
+          <p:cNvPr id="2" name="Title 1"/>
+          <p:cNvSpPr>
+            <a:spLocks noGrp="1"/>
+          </p:cNvSpPr>
+          <p:nvPr>
+            <p:ph type="title"/>
+          </p:nvPr>
+        </p:nvSpPr>
+        <p:spPr>
+          <a:xfrm>
+            <a:off x="457200" y="384048"/>
+            <a:ext cx="11277295" cy="475488"/>
+          </a:xfrm>
+        </p:spPr>
+        <p:txBody>
+          <a:bodyPr wrap="square" lIns="45720" rIns="45720" tIns="0" bIns="0" anchor="t"/>
+          <a:lstStyle/>
+          <a:p>
+            <a:pPr algn="l">
+              <a:defRPr>
+                <a:latin typeface="Roboto"/>
+              </a:defRPr>
+            </a:pPr>
+            <a:r>
+              <a:rPr sz="2400" b="1">
+                <a:solidFill>
+                  <a:srgbClr val="25342A"/>
+                </a:solidFill>
+                <a:latin typeface="Roboto"/>
+              </a:rPr>
+              <a:t>Youth outreach</a:t>
+            </a:r>
+          </a:p>
+        </p:txBody>
+      </p:sp>
+      <p:sp>
+        <p:nvSpPr>
+          <p:cNvPr id="3" name="Rectangle 2"/>
           <p:cNvSpPr/>
           <p:nvPr/>
         </p:nvSpPr>
@@ -5120,14 +7071,14 @@
       </p:sp>
       <p:sp>
         <p:nvSpPr>
-          <p:cNvPr id="3" name="TextBox 2"/>
+          <p:cNvPr id="4" name="TextBox 3"/>
           <p:cNvSpPr txBox="1"/>
           <p:nvPr/>
         </p:nvSpPr>
         <p:spPr>
           <a:xfrm>
-            <a:off x="457200" y="164592"/>
-            <a:ext cx="7315200" cy="274320"/>
+            <a:off x="457200" y="146304"/>
+            <a:ext cx="8229600" cy="256032"/>
           </a:xfrm>
           <a:prstGeom prst="rect">
             <a:avLst/>
@@ -5135,7 +7086,7 @@
           <a:noFill/>
         </p:spPr>
         <p:txBody>
-          <a:bodyPr wrap="square">
+          <a:bodyPr wrap="square" lIns="45720" rIns="45720">
             <a:spAutoFit/>
           </a:bodyPr>
           <a:lstStyle/>
@@ -5159,14 +7110,14 @@
       </p:sp>
       <p:sp>
         <p:nvSpPr>
-          <p:cNvPr id="4" name="TextBox 3"/>
+          <p:cNvPr id="5" name="TextBox 4"/>
           <p:cNvSpPr txBox="1"/>
           <p:nvPr/>
         </p:nvSpPr>
         <p:spPr>
           <a:xfrm>
-            <a:off x="457200" y="411480"/>
-            <a:ext cx="11247120" cy="548640"/>
+            <a:off x="457200" y="914400"/>
+            <a:ext cx="11277295" cy="263652"/>
           </a:xfrm>
           <a:prstGeom prst="rect">
             <a:avLst/>
@@ -5174,7 +7125,7 @@
           <a:noFill/>
         </p:spPr>
         <p:txBody>
-          <a:bodyPr wrap="square">
+          <a:bodyPr wrap="square" lIns="45720" rIns="45720">
             <a:spAutoFit/>
           </a:bodyPr>
           <a:lstStyle/>
@@ -5185,27 +7136,45 @@
               </a:defRPr>
             </a:pPr>
             <a:r>
-              <a:rPr sz="2400" b="1">
+              <a:rPr sz="1200" b="0">
                 <a:solidFill>
-                  <a:srgbClr val="25342A"/>
+                  <a:srgbClr val="5F6F63"/>
                 </a:solidFill>
                 <a:latin typeface="Roboto"/>
               </a:rPr>
-              <a:t>What it shows · Program: All programs</a:t>
-            </a:r>
-          </a:p>
-        </p:txBody>
-      </p:sp>
-      <p:sp>
-        <p:nvSpPr>
-          <p:cNvPr id="5" name="Rectangle 4"/>
+              <a:t>Grant spending, by month · Youth outreach</a:t>
+            </a:r>
+          </a:p>
+        </p:txBody>
+      </p:sp>
+      <p:graphicFrame>
+        <p:nvGraphicFramePr>
+          <p:cNvPr id="6" name="Chart 5"/>
+          <p:cNvGraphicFramePr>
+            <a:graphicFrameLocks noGrp="1"/>
+          </p:cNvGraphicFramePr>
+          <p:nvPr/>
+        </p:nvGraphicFramePr>
+        <p:xfrm>
+          <a:off x="457200" y="1278636"/>
+          <a:ext cx="11277295" cy="3643884"/>
+        </p:xfrm>
+        <a:graphic>
+          <a:graphicData uri="http://schemas.openxmlformats.org/drawingml/2006/chart">
+            <c:chart xmlns:c="http://schemas.openxmlformats.org/drawingml/2006/chart" r:id="rId3"/>
+          </a:graphicData>
+        </a:graphic>
+      </p:graphicFrame>
+      <p:sp>
+        <p:nvSpPr>
+          <p:cNvPr id="7" name="Rectangle 6"/>
           <p:cNvSpPr/>
           <p:nvPr/>
         </p:nvSpPr>
         <p:spPr>
           <a:xfrm>
-            <a:off x="457200" y="1554480"/>
-            <a:ext cx="5501487" cy="4389120"/>
+            <a:off x="457200" y="5013960"/>
+            <a:ext cx="5501487" cy="1295400"/>
           </a:xfrm>
           <a:prstGeom prst="rect">
             <a:avLst/>
@@ -5247,14 +7216,14 @@
       </p:sp>
       <p:sp>
         <p:nvSpPr>
-          <p:cNvPr id="6" name="TextBox 5"/>
+          <p:cNvPr id="8" name="TextBox 7"/>
           <p:cNvSpPr txBox="1"/>
           <p:nvPr/>
         </p:nvSpPr>
         <p:spPr>
           <a:xfrm>
-            <a:off x="685800" y="1691640"/>
-            <a:ext cx="5044287" cy="365760"/>
+            <a:off x="594360" y="5068824"/>
+            <a:ext cx="5227167" cy="274320"/>
           </a:xfrm>
           <a:prstGeom prst="rect">
             <a:avLst/>
@@ -5262,7 +7231,7 @@
           <a:noFill/>
         </p:spPr>
         <p:txBody>
-          <a:bodyPr wrap="square">
+          <a:bodyPr wrap="square" lIns="45720" rIns="45720">
             <a:spAutoFit/>
           </a:bodyPr>
           <a:lstStyle/>
@@ -5273,7 +7242,7 @@
               </a:defRPr>
             </a:pPr>
             <a:r>
-              <a:rPr sz="1100" b="1">
+              <a:rPr sz="1000" b="1">
                 <a:solidFill>
                   <a:srgbClr val="5F6F63"/>
                 </a:solidFill>
@@ -5286,14 +7255,14 @@
       </p:sp>
       <p:sp>
         <p:nvSpPr>
-          <p:cNvPr id="7" name="TextBox 6"/>
+          <p:cNvPr id="9" name="TextBox 8"/>
           <p:cNvSpPr txBox="1"/>
           <p:nvPr/>
         </p:nvSpPr>
         <p:spPr>
           <a:xfrm>
-            <a:off x="685800" y="2103120"/>
-            <a:ext cx="5044287" cy="3749039"/>
+            <a:off x="594360" y="5343144"/>
+            <a:ext cx="5227167" cy="929640"/>
           </a:xfrm>
           <a:prstGeom prst="rect">
             <a:avLst/>
@@ -5301,7 +7270,7 @@
           <a:noFill/>
         </p:spPr>
         <p:txBody>
-          <a:bodyPr wrap="square">
+          <a:bodyPr wrap="square" lIns="45720" rIns="45720">
             <a:spAutoFit/>
           </a:bodyPr>
           <a:lstStyle/>
@@ -5312,27 +7281,27 @@
               </a:defRPr>
             </a:pPr>
             <a:r>
-              <a:rPr sz="1600" b="0">
+              <a:rPr sz="1200" b="0">
                 <a:solidFill>
                   <a:srgbClr val="25342A"/>
                 </a:solidFill>
                 <a:latin typeface="Roboto"/>
               </a:rPr>
-              <a:t>Housing support (2025) is the biggest program: $46,631 in October once its share of untied program costs and administration is added to $26,600 of grant spending. Shared costs add 75.3% on top of grant spending across all programs.</a:t>
-            </a:r>
-          </a:p>
-        </p:txBody>
-      </p:sp>
-      <p:sp>
-        <p:nvSpPr>
-          <p:cNvPr id="8" name="Rectangle 7"/>
+              <a:t>Youth outreach cost $38,436 in full in October: $21,925 paid by the State Department of Families grant, and $16,511 of shared costs no grant covers. It has spent 97.5% of its budget to date, with $402,031 left and 20 months to go.</a:t>
+            </a:r>
+          </a:p>
+        </p:txBody>
+      </p:sp>
+      <p:sp>
+        <p:nvSpPr>
+          <p:cNvPr id="10" name="Rectangle 9"/>
           <p:cNvSpPr/>
           <p:nvPr/>
         </p:nvSpPr>
         <p:spPr>
           <a:xfrm>
-            <a:off x="6233007" y="1554480"/>
-            <a:ext cx="5501487" cy="4389120"/>
+            <a:off x="6233007" y="5013960"/>
+            <a:ext cx="5501487" cy="1295400"/>
           </a:xfrm>
           <a:prstGeom prst="rect">
             <a:avLst/>
@@ -5374,14 +7343,14 @@
       </p:sp>
       <p:sp>
         <p:nvSpPr>
-          <p:cNvPr id="9" name="TextBox 8"/>
+          <p:cNvPr id="11" name="TextBox 10"/>
           <p:cNvSpPr txBox="1"/>
           <p:nvPr/>
         </p:nvSpPr>
         <p:spPr>
           <a:xfrm>
-            <a:off x="6461607" y="1691640"/>
-            <a:ext cx="5044287" cy="365760"/>
+            <a:off x="6370167" y="5068824"/>
+            <a:ext cx="5227167" cy="274320"/>
           </a:xfrm>
           <a:prstGeom prst="rect">
             <a:avLst/>
@@ -5389,7 +7358,7 @@
           <a:noFill/>
         </p:spPr>
         <p:txBody>
-          <a:bodyPr wrap="square">
+          <a:bodyPr wrap="square" lIns="45720" rIns="45720">
             <a:spAutoFit/>
           </a:bodyPr>
           <a:lstStyle/>
@@ -5400,7 +7369,7 @@
               </a:defRPr>
             </a:pPr>
             <a:r>
-              <a:rPr sz="1100" b="1">
+              <a:rPr sz="1000" b="1">
                 <a:solidFill>
                   <a:srgbClr val="5F6F63"/>
                 </a:solidFill>
@@ -5413,14 +7382,14 @@
       </p:sp>
       <p:sp>
         <p:nvSpPr>
-          <p:cNvPr id="10" name="TextBox 9"/>
+          <p:cNvPr id="12" name="TextBox 11"/>
           <p:cNvSpPr txBox="1"/>
           <p:nvPr/>
         </p:nvSpPr>
         <p:spPr>
           <a:xfrm>
-            <a:off x="6461607" y="2103120"/>
-            <a:ext cx="5044287" cy="3749039"/>
+            <a:off x="6370167" y="5343144"/>
+            <a:ext cx="5227167" cy="929640"/>
           </a:xfrm>
           <a:prstGeom prst="rect">
             <a:avLst/>
@@ -5428,7 +7397,7 @@
           <a:noFill/>
         </p:spPr>
         <p:txBody>
-          <a:bodyPr wrap="square">
+          <a:bodyPr wrap="square" lIns="45720" rIns="45720">
             <a:spAutoFit/>
           </a:bodyPr>
           <a:lstStyle/>
@@ -5439,27 +7408,27 @@
               </a:defRPr>
             </a:pPr>
             <a:r>
-              <a:rPr sz="1600" b="0">
+              <a:rPr sz="1200" b="0">
                 <a:solidFill>
                   <a:srgbClr val="25342A"/>
                 </a:solidFill>
                 <a:latin typeface="Roboto"/>
               </a:rPr>
-              <a:t>The full cost (not just the grant line) is the number for renewal applications, where the funder lets you recover a share of overheads. Pick a program above to see it on its own.</a:t>
-            </a:r>
-          </a:p>
-        </p:txBody>
-      </p:sp>
-      <p:sp>
-        <p:nvSpPr>
-          <p:cNvPr id="11" name="TextBox 10"/>
+              <a:t>The full cost is $38,436 a month; $16,511 of it is shared cost the grant doesn't pay for. Worth asking for as much of it as the funder allows at renewal.</a:t>
+            </a:r>
+          </a:p>
+        </p:txBody>
+      </p:sp>
+      <p:sp>
+        <p:nvSpPr>
+          <p:cNvPr id="13" name="TextBox 12"/>
           <p:cNvSpPr txBox="1"/>
           <p:nvPr/>
         </p:nvSpPr>
         <p:spPr>
           <a:xfrm>
             <a:off x="457200" y="6492240"/>
-            <a:ext cx="3657600" cy="274320"/>
+            <a:ext cx="2926080" cy="274320"/>
           </a:xfrm>
           <a:prstGeom prst="rect">
             <a:avLst/>
@@ -5467,7 +7436,7 @@
           <a:noFill/>
         </p:spPr>
         <p:txBody>
-          <a:bodyPr wrap="square">
+          <a:bodyPr wrap="square" lIns="45720" rIns="45720">
             <a:spAutoFit/>
           </a:bodyPr>
           <a:lstStyle/>
@@ -5491,14 +7460,14 @@
       </p:sp>
       <p:sp>
         <p:nvSpPr>
-          <p:cNvPr id="12" name="TextBox 11"/>
+          <p:cNvPr id="14" name="TextBox 13"/>
           <p:cNvSpPr txBox="1"/>
           <p:nvPr/>
         </p:nvSpPr>
         <p:spPr>
           <a:xfrm>
-            <a:off x="4297680" y="6492240"/>
-            <a:ext cx="3657600" cy="274320"/>
+            <a:off x="3108960" y="6492240"/>
+            <a:ext cx="5943600" cy="274320"/>
           </a:xfrm>
           <a:prstGeom prst="rect">
             <a:avLst/>
@@ -5506,7 +7475,7 @@
           <a:noFill/>
         </p:spPr>
         <p:txBody>
-          <a:bodyPr wrap="square">
+          <a:bodyPr wrap="square" lIns="45720" rIns="45720">
             <a:spAutoFit/>
           </a:bodyPr>
           <a:lstStyle/>
@@ -5523,14 +7492,14 @@
                 </a:solidFill>
                 <a:latin typeface="Roboto"/>
               </a:rPr>
-              <a:t>Data retrieved 2pm, Tue 6 Oct 2026 · Sample data</a:t>
-            </a:r>
-          </a:p>
-        </p:txBody>
-      </p:sp>
-      <p:sp>
-        <p:nvSpPr>
-          <p:cNvPr id="13" name="TextBox 12"/>
+              <a:t>Data retrieved 2pm, Tue 6 Oct 2026 · Generated 8 Oct 2026, 9:35am · Sample data · Made with Python (python-pptx)</a:t>
+            </a:r>
+          </a:p>
+        </p:txBody>
+      </p:sp>
+      <p:sp>
+        <p:nvSpPr>
+          <p:cNvPr id="15" name="TextBox 14"/>
           <p:cNvSpPr txBox="1"/>
           <p:nvPr/>
         </p:nvSpPr>
@@ -5545,7 +7514,7 @@
           <a:noFill/>
         </p:spPr>
         <p:txBody>
-          <a:bodyPr wrap="square">
+          <a:bodyPr wrap="square" lIns="45720" rIns="45720">
             <a:spAutoFit/>
           </a:bodyPr>
           <a:lstStyle/>
@@ -5562,7 +7531,7 @@
                 </a:solidFill>
                 <a:latin typeface="Roboto"/>
               </a:rPr>
-              <a:t>Slide 4 of 10</a:t>
+              <a:t>Slide 4 of 7</a:t>
             </a:r>
           </a:p>
         </p:txBody>
@@ -5587,7 +7556,44 @@
       <p:grpSpPr/>
       <p:sp>
         <p:nvSpPr>
-          <p:cNvPr id="2" name="Rectangle 1"/>
+          <p:cNvPr id="2" name="Title 1"/>
+          <p:cNvSpPr>
+            <a:spLocks noGrp="1"/>
+          </p:cNvSpPr>
+          <p:nvPr>
+            <p:ph type="title"/>
+          </p:nvPr>
+        </p:nvSpPr>
+        <p:spPr>
+          <a:xfrm>
+            <a:off x="457200" y="384048"/>
+            <a:ext cx="11277295" cy="475488"/>
+          </a:xfrm>
+        </p:spPr>
+        <p:txBody>
+          <a:bodyPr wrap="square" lIns="45720" rIns="45720" tIns="0" bIns="0" anchor="t"/>
+          <a:lstStyle/>
+          <a:p>
+            <a:pPr algn="l">
+              <a:defRPr>
+                <a:latin typeface="Roboto"/>
+              </a:defRPr>
+            </a:pPr>
+            <a:r>
+              <a:rPr sz="2400" b="1">
+                <a:solidFill>
+                  <a:srgbClr val="25342A"/>
+                </a:solidFill>
+                <a:latin typeface="Roboto"/>
+              </a:rPr>
+              <a:t>Emergency relief</a:t>
+            </a:r>
+          </a:p>
+        </p:txBody>
+      </p:sp>
+      <p:sp>
+        <p:nvSpPr>
+          <p:cNvPr id="3" name="Rectangle 2"/>
           <p:cNvSpPr/>
           <p:nvPr/>
         </p:nvSpPr>
@@ -5634,14 +7640,14 @@
       </p:sp>
       <p:sp>
         <p:nvSpPr>
-          <p:cNvPr id="3" name="TextBox 2"/>
+          <p:cNvPr id="4" name="TextBox 3"/>
           <p:cNvSpPr txBox="1"/>
           <p:nvPr/>
         </p:nvSpPr>
         <p:spPr>
           <a:xfrm>
-            <a:off x="457200" y="164592"/>
-            <a:ext cx="7315200" cy="274320"/>
+            <a:off x="457200" y="146304"/>
+            <a:ext cx="8229600" cy="256032"/>
           </a:xfrm>
           <a:prstGeom prst="rect">
             <a:avLst/>
@@ -5649,7 +7655,7 @@
           <a:noFill/>
         </p:spPr>
         <p:txBody>
-          <a:bodyPr wrap="square">
+          <a:bodyPr wrap="square" lIns="45720" rIns="45720">
             <a:spAutoFit/>
           </a:bodyPr>
           <a:lstStyle/>
@@ -5673,14 +7679,14 @@
       </p:sp>
       <p:sp>
         <p:nvSpPr>
-          <p:cNvPr id="4" name="TextBox 3"/>
+          <p:cNvPr id="5" name="TextBox 4"/>
           <p:cNvSpPr txBox="1"/>
           <p:nvPr/>
         </p:nvSpPr>
         <p:spPr>
           <a:xfrm>
-            <a:off x="457200" y="411480"/>
-            <a:ext cx="11247120" cy="548640"/>
+            <a:off x="457200" y="914400"/>
+            <a:ext cx="11277295" cy="263652"/>
           </a:xfrm>
           <a:prstGeom prst="rect">
             <a:avLst/>
@@ -5688,7 +7694,7 @@
           <a:noFill/>
         </p:spPr>
         <p:txBody>
-          <a:bodyPr wrap="square">
+          <a:bodyPr wrap="square" lIns="45720" rIns="45720">
             <a:spAutoFit/>
           </a:bodyPr>
           <a:lstStyle/>
@@ -5699,27 +7705,45 @@
               </a:defRPr>
             </a:pPr>
             <a:r>
-              <a:rPr sz="2400" b="1">
+              <a:rPr sz="1200" b="0">
                 <a:solidFill>
-                  <a:srgbClr val="25342A"/>
+                  <a:srgbClr val="5F6F63"/>
                 </a:solidFill>
                 <a:latin typeface="Roboto"/>
               </a:rPr>
-              <a:t>What it shows · Program: Housing support (2025)</a:t>
-            </a:r>
-          </a:p>
-        </p:txBody>
-      </p:sp>
-      <p:sp>
-        <p:nvSpPr>
-          <p:cNvPr id="5" name="Rectangle 4"/>
+              <a:t>Grant spending, by month · Emergency relief</a:t>
+            </a:r>
+          </a:p>
+        </p:txBody>
+      </p:sp>
+      <p:graphicFrame>
+        <p:nvGraphicFramePr>
+          <p:cNvPr id="6" name="Chart 5"/>
+          <p:cNvGraphicFramePr>
+            <a:graphicFrameLocks noGrp="1"/>
+          </p:cNvGraphicFramePr>
+          <p:nvPr/>
+        </p:nvGraphicFramePr>
+        <p:xfrm>
+          <a:off x="457200" y="1278636"/>
+          <a:ext cx="11277295" cy="3445764"/>
+        </p:xfrm>
+        <a:graphic>
+          <a:graphicData uri="http://schemas.openxmlformats.org/drawingml/2006/chart">
+            <c:chart xmlns:c="http://schemas.openxmlformats.org/drawingml/2006/chart" r:id="rId3"/>
+          </a:graphicData>
+        </a:graphic>
+      </p:graphicFrame>
+      <p:sp>
+        <p:nvSpPr>
+          <p:cNvPr id="7" name="Rectangle 6"/>
           <p:cNvSpPr/>
           <p:nvPr/>
         </p:nvSpPr>
         <p:spPr>
           <a:xfrm>
-            <a:off x="457200" y="1554480"/>
-            <a:ext cx="5501487" cy="4389120"/>
+            <a:off x="457200" y="4815840"/>
+            <a:ext cx="5501487" cy="1493520"/>
           </a:xfrm>
           <a:prstGeom prst="rect">
             <a:avLst/>
@@ -5761,14 +7785,14 @@
       </p:sp>
       <p:sp>
         <p:nvSpPr>
-          <p:cNvPr id="6" name="TextBox 5"/>
+          <p:cNvPr id="8" name="TextBox 7"/>
           <p:cNvSpPr txBox="1"/>
           <p:nvPr/>
         </p:nvSpPr>
         <p:spPr>
           <a:xfrm>
-            <a:off x="685800" y="1691640"/>
-            <a:ext cx="5044287" cy="365760"/>
+            <a:off x="594360" y="4870704"/>
+            <a:ext cx="5227167" cy="274320"/>
           </a:xfrm>
           <a:prstGeom prst="rect">
             <a:avLst/>
@@ -5776,7 +7800,7 @@
           <a:noFill/>
         </p:spPr>
         <p:txBody>
-          <a:bodyPr wrap="square">
+          <a:bodyPr wrap="square" lIns="45720" rIns="45720">
             <a:spAutoFit/>
           </a:bodyPr>
           <a:lstStyle/>
@@ -5787,7 +7811,7 @@
               </a:defRPr>
             </a:pPr>
             <a:r>
-              <a:rPr sz="1100" b="1">
+              <a:rPr sz="1000" b="1">
                 <a:solidFill>
                   <a:srgbClr val="5F6F63"/>
                 </a:solidFill>
@@ -5800,14 +7824,14 @@
       </p:sp>
       <p:sp>
         <p:nvSpPr>
-          <p:cNvPr id="7" name="TextBox 6"/>
+          <p:cNvPr id="9" name="TextBox 8"/>
           <p:cNvSpPr txBox="1"/>
           <p:nvPr/>
         </p:nvSpPr>
         <p:spPr>
           <a:xfrm>
-            <a:off x="685800" y="2103120"/>
-            <a:ext cx="5044287" cy="3749039"/>
+            <a:off x="594360" y="5145024"/>
+            <a:ext cx="5227167" cy="1127760"/>
           </a:xfrm>
           <a:prstGeom prst="rect">
             <a:avLst/>
@@ -5815,7 +7839,7 @@
           <a:noFill/>
         </p:spPr>
         <p:txBody>
-          <a:bodyPr wrap="square">
+          <a:bodyPr wrap="square" lIns="45720" rIns="45720">
             <a:spAutoFit/>
           </a:bodyPr>
           <a:lstStyle/>
@@ -5826,27 +7850,27 @@
               </a:defRPr>
             </a:pPr>
             <a:r>
-              <a:rPr sz="1600" b="0">
+              <a:rPr sz="1200" b="0">
                 <a:solidFill>
                   <a:srgbClr val="25342A"/>
                 </a:solidFill>
                 <a:latin typeface="Roboto"/>
               </a:rPr>
-              <a:t>Housing support (2025) cost $46,631 in full in October: $26,600 paid by the State Housing Program grant, and $20,031 of shared costs no grant covers. It has spent 98.9% of its budget to date, with $59,100 left and 2 months to go.</a:t>
-            </a:r>
-          </a:p>
-        </p:txBody>
-      </p:sp>
-      <p:sp>
-        <p:nvSpPr>
-          <p:cNvPr id="8" name="Rectangle 7"/>
+              <a:t>Emergency relief cost $21,563 in full in October: $12,300 paid by the Federal community grant grant, and $9,263 of shared costs no grant covers. It has spent 99.9% of its budget to date (spending before October 2024 taken at budget), with $24,300 left and 2 months to go.</a:t>
+            </a:r>
+          </a:p>
+        </p:txBody>
+      </p:sp>
+      <p:sp>
+        <p:nvSpPr>
+          <p:cNvPr id="10" name="Rectangle 9"/>
           <p:cNvSpPr/>
           <p:nvPr/>
         </p:nvSpPr>
         <p:spPr>
           <a:xfrm>
-            <a:off x="6233007" y="1554480"/>
-            <a:ext cx="5501487" cy="4389120"/>
+            <a:off x="6233007" y="4815840"/>
+            <a:ext cx="5501487" cy="1493520"/>
           </a:xfrm>
           <a:prstGeom prst="rect">
             <a:avLst/>
@@ -5888,14 +7912,14 @@
       </p:sp>
       <p:sp>
         <p:nvSpPr>
-          <p:cNvPr id="9" name="TextBox 8"/>
+          <p:cNvPr id="11" name="TextBox 10"/>
           <p:cNvSpPr txBox="1"/>
           <p:nvPr/>
         </p:nvSpPr>
         <p:spPr>
           <a:xfrm>
-            <a:off x="6461607" y="1691640"/>
-            <a:ext cx="5044287" cy="365760"/>
+            <a:off x="6370167" y="4870704"/>
+            <a:ext cx="5227167" cy="274320"/>
           </a:xfrm>
           <a:prstGeom prst="rect">
             <a:avLst/>
@@ -5903,7 +7927,7 @@
           <a:noFill/>
         </p:spPr>
         <p:txBody>
-          <a:bodyPr wrap="square">
+          <a:bodyPr wrap="square" lIns="45720" rIns="45720">
             <a:spAutoFit/>
           </a:bodyPr>
           <a:lstStyle/>
@@ -5914,7 +7938,7 @@
               </a:defRPr>
             </a:pPr>
             <a:r>
-              <a:rPr sz="1100" b="1">
+              <a:rPr sz="1000" b="1">
                 <a:solidFill>
                   <a:srgbClr val="5F6F63"/>
                 </a:solidFill>
@@ -5927,14 +7951,14 @@
       </p:sp>
       <p:sp>
         <p:nvSpPr>
-          <p:cNvPr id="10" name="TextBox 9"/>
+          <p:cNvPr id="12" name="TextBox 11"/>
           <p:cNvSpPr txBox="1"/>
           <p:nvPr/>
         </p:nvSpPr>
         <p:spPr>
           <a:xfrm>
-            <a:off x="6461607" y="2103120"/>
-            <a:ext cx="5044287" cy="3749039"/>
+            <a:off x="6370167" y="5145024"/>
+            <a:ext cx="5227167" cy="1127760"/>
           </a:xfrm>
           <a:prstGeom prst="rect">
             <a:avLst/>
@@ -5942,7 +7966,7 @@
           <a:noFill/>
         </p:spPr>
         <p:txBody>
-          <a:bodyPr wrap="square">
+          <a:bodyPr wrap="square" lIns="45720" rIns="45720">
             <a:spAutoFit/>
           </a:bodyPr>
           <a:lstStyle/>
@@ -5953,27 +7977,27 @@
               </a:defRPr>
             </a:pPr>
             <a:r>
-              <a:rPr sz="1600" b="0">
+              <a:rPr sz="1200" b="0">
                 <a:solidFill>
                   <a:srgbClr val="25342A"/>
                 </a:solidFill>
                 <a:latin typeface="Roboto"/>
               </a:rPr>
-              <a:t>The full cost is $46,631 a month; $20,031 of it is shared cost the grant doesn't pay for. Worth asking for as much of it as the funder allows at renewal.</a:t>
-            </a:r>
-          </a:p>
-        </p:txBody>
-      </p:sp>
-      <p:sp>
-        <p:nvSpPr>
-          <p:cNvPr id="11" name="TextBox 10"/>
+              <a:t>The full cost is $21,563 a month; $9,263 of it is shared cost the grant doesn't pay for. Worth asking for as much of it as the funder allows at renewal.</a:t>
+            </a:r>
+          </a:p>
+        </p:txBody>
+      </p:sp>
+      <p:sp>
+        <p:nvSpPr>
+          <p:cNvPr id="13" name="TextBox 12"/>
           <p:cNvSpPr txBox="1"/>
           <p:nvPr/>
         </p:nvSpPr>
         <p:spPr>
           <a:xfrm>
             <a:off x="457200" y="6492240"/>
-            <a:ext cx="3657600" cy="274320"/>
+            <a:ext cx="2926080" cy="274320"/>
           </a:xfrm>
           <a:prstGeom prst="rect">
             <a:avLst/>
@@ -5981,7 +8005,7 @@
           <a:noFill/>
         </p:spPr>
         <p:txBody>
-          <a:bodyPr wrap="square">
+          <a:bodyPr wrap="square" lIns="45720" rIns="45720">
             <a:spAutoFit/>
           </a:bodyPr>
           <a:lstStyle/>
@@ -6005,14 +8029,14 @@
       </p:sp>
       <p:sp>
         <p:nvSpPr>
-          <p:cNvPr id="12" name="TextBox 11"/>
+          <p:cNvPr id="14" name="TextBox 13"/>
           <p:cNvSpPr txBox="1"/>
           <p:nvPr/>
         </p:nvSpPr>
         <p:spPr>
           <a:xfrm>
-            <a:off x="4297680" y="6492240"/>
-            <a:ext cx="3657600" cy="274320"/>
+            <a:off x="3108960" y="6492240"/>
+            <a:ext cx="5943600" cy="274320"/>
           </a:xfrm>
           <a:prstGeom prst="rect">
             <a:avLst/>
@@ -6020,7 +8044,7 @@
           <a:noFill/>
         </p:spPr>
         <p:txBody>
-          <a:bodyPr wrap="square">
+          <a:bodyPr wrap="square" lIns="45720" rIns="45720">
             <a:spAutoFit/>
           </a:bodyPr>
           <a:lstStyle/>
@@ -6037,14 +8061,14 @@
                 </a:solidFill>
                 <a:latin typeface="Roboto"/>
               </a:rPr>
-              <a:t>Data retrieved 2pm, Tue 6 Oct 2026 · Sample data</a:t>
-            </a:r>
-          </a:p>
-        </p:txBody>
-      </p:sp>
-      <p:sp>
-        <p:nvSpPr>
-          <p:cNvPr id="13" name="TextBox 12"/>
+              <a:t>Data retrieved 2pm, Tue 6 Oct 2026 · Generated 8 Oct 2026, 9:35am · Sample data · Made with Python (python-pptx)</a:t>
+            </a:r>
+          </a:p>
+        </p:txBody>
+      </p:sp>
+      <p:sp>
+        <p:nvSpPr>
+          <p:cNvPr id="15" name="TextBox 14"/>
           <p:cNvSpPr txBox="1"/>
           <p:nvPr/>
         </p:nvSpPr>
@@ -6059,7 +8083,7 @@
           <a:noFill/>
         </p:spPr>
         <p:txBody>
-          <a:bodyPr wrap="square">
+          <a:bodyPr wrap="square" lIns="45720" rIns="45720">
             <a:spAutoFit/>
           </a:bodyPr>
           <a:lstStyle/>
@@ -6076,7 +8100,7 @@
                 </a:solidFill>
                 <a:latin typeface="Roboto"/>
               </a:rPr>
-              <a:t>Slide 5 of 10</a:t>
+              <a:t>Slide 5 of 7</a:t>
             </a:r>
           </a:p>
         </p:txBody>
@@ -6101,7 +8125,44 @@
       <p:grpSpPr/>
       <p:sp>
         <p:nvSpPr>
-          <p:cNvPr id="2" name="Rectangle 1"/>
+          <p:cNvPr id="2" name="Title 1"/>
+          <p:cNvSpPr>
+            <a:spLocks noGrp="1"/>
+          </p:cNvSpPr>
+          <p:nvPr>
+            <p:ph type="title"/>
+          </p:nvPr>
+        </p:nvSpPr>
+        <p:spPr>
+          <a:xfrm>
+            <a:off x="457200" y="384048"/>
+            <a:ext cx="11277295" cy="475488"/>
+          </a:xfrm>
+        </p:spPr>
+        <p:txBody>
+          <a:bodyPr wrap="square" lIns="45720" rIns="45720" tIns="0" bIns="0" anchor="t"/>
+          <a:lstStyle/>
+          <a:p>
+            <a:pPr algn="l">
+              <a:defRPr>
+                <a:latin typeface="Roboto"/>
+              </a:defRPr>
+            </a:pPr>
+            <a:r>
+              <a:rPr sz="2400" b="1">
+                <a:solidFill>
+                  <a:srgbClr val="25342A"/>
+                </a:solidFill>
+                <a:latin typeface="Roboto"/>
+              </a:rPr>
+              <a:t>Digital literacy</a:t>
+            </a:r>
+          </a:p>
+        </p:txBody>
+      </p:sp>
+      <p:sp>
+        <p:nvSpPr>
+          <p:cNvPr id="3" name="Rectangle 2"/>
           <p:cNvSpPr/>
           <p:nvPr/>
         </p:nvSpPr>
@@ -6148,14 +8209,14 @@
       </p:sp>
       <p:sp>
         <p:nvSpPr>
-          <p:cNvPr id="3" name="TextBox 2"/>
+          <p:cNvPr id="4" name="TextBox 3"/>
           <p:cNvSpPr txBox="1"/>
           <p:nvPr/>
         </p:nvSpPr>
         <p:spPr>
           <a:xfrm>
-            <a:off x="457200" y="164592"/>
-            <a:ext cx="7315200" cy="274320"/>
+            <a:off x="457200" y="146304"/>
+            <a:ext cx="8229600" cy="256032"/>
           </a:xfrm>
           <a:prstGeom prst="rect">
             <a:avLst/>
@@ -6163,7 +8224,7 @@
           <a:noFill/>
         </p:spPr>
         <p:txBody>
-          <a:bodyPr wrap="square">
+          <a:bodyPr wrap="square" lIns="45720" rIns="45720">
             <a:spAutoFit/>
           </a:bodyPr>
           <a:lstStyle/>
@@ -6187,14 +8248,14 @@
       </p:sp>
       <p:sp>
         <p:nvSpPr>
-          <p:cNvPr id="4" name="TextBox 3"/>
+          <p:cNvPr id="5" name="TextBox 4"/>
           <p:cNvSpPr txBox="1"/>
           <p:nvPr/>
         </p:nvSpPr>
         <p:spPr>
           <a:xfrm>
-            <a:off x="457200" y="411480"/>
-            <a:ext cx="11247120" cy="548640"/>
+            <a:off x="457200" y="914400"/>
+            <a:ext cx="11277295" cy="263652"/>
           </a:xfrm>
           <a:prstGeom prst="rect">
             <a:avLst/>
@@ -6202,7 +8263,7 @@
           <a:noFill/>
         </p:spPr>
         <p:txBody>
-          <a:bodyPr wrap="square">
+          <a:bodyPr wrap="square" lIns="45720" rIns="45720">
             <a:spAutoFit/>
           </a:bodyPr>
           <a:lstStyle/>
@@ -6213,27 +8274,45 @@
               </a:defRPr>
             </a:pPr>
             <a:r>
-              <a:rPr sz="2400" b="1">
+              <a:rPr sz="1200" b="0">
                 <a:solidFill>
-                  <a:srgbClr val="25342A"/>
+                  <a:srgbClr val="5F6F63"/>
                 </a:solidFill>
                 <a:latin typeface="Roboto"/>
               </a:rPr>
-              <a:t>What it shows · Program: Youth outreach</a:t>
-            </a:r>
-          </a:p>
-        </p:txBody>
-      </p:sp>
-      <p:sp>
-        <p:nvSpPr>
-          <p:cNvPr id="5" name="Rectangle 4"/>
+              <a:t>Grant spending, by month · Digital literacy</a:t>
+            </a:r>
+          </a:p>
+        </p:txBody>
+      </p:sp>
+      <p:graphicFrame>
+        <p:nvGraphicFramePr>
+          <p:cNvPr id="6" name="Chart 5"/>
+          <p:cNvGraphicFramePr>
+            <a:graphicFrameLocks noGrp="1"/>
+          </p:cNvGraphicFramePr>
+          <p:nvPr/>
+        </p:nvGraphicFramePr>
+        <p:xfrm>
+          <a:off x="457200" y="1278636"/>
+          <a:ext cx="11277295" cy="3643884"/>
+        </p:xfrm>
+        <a:graphic>
+          <a:graphicData uri="http://schemas.openxmlformats.org/drawingml/2006/chart">
+            <c:chart xmlns:c="http://schemas.openxmlformats.org/drawingml/2006/chart" r:id="rId3"/>
+          </a:graphicData>
+        </a:graphic>
+      </p:graphicFrame>
+      <p:sp>
+        <p:nvSpPr>
+          <p:cNvPr id="7" name="Rectangle 6"/>
           <p:cNvSpPr/>
           <p:nvPr/>
         </p:nvSpPr>
         <p:spPr>
           <a:xfrm>
-            <a:off x="457200" y="1554480"/>
-            <a:ext cx="5501487" cy="4389120"/>
+            <a:off x="457200" y="5013960"/>
+            <a:ext cx="5501487" cy="1295400"/>
           </a:xfrm>
           <a:prstGeom prst="rect">
             <a:avLst/>
@@ -6275,14 +8354,14 @@
       </p:sp>
       <p:sp>
         <p:nvSpPr>
-          <p:cNvPr id="6" name="TextBox 5"/>
+          <p:cNvPr id="8" name="TextBox 7"/>
           <p:cNvSpPr txBox="1"/>
           <p:nvPr/>
         </p:nvSpPr>
         <p:spPr>
           <a:xfrm>
-            <a:off x="685800" y="1691640"/>
-            <a:ext cx="5044287" cy="365760"/>
+            <a:off x="594360" y="5068824"/>
+            <a:ext cx="5227167" cy="274320"/>
           </a:xfrm>
           <a:prstGeom prst="rect">
             <a:avLst/>
@@ -6290,7 +8369,7 @@
           <a:noFill/>
         </p:spPr>
         <p:txBody>
-          <a:bodyPr wrap="square">
+          <a:bodyPr wrap="square" lIns="45720" rIns="45720">
             <a:spAutoFit/>
           </a:bodyPr>
           <a:lstStyle/>
@@ -6301,7 +8380,7 @@
               </a:defRPr>
             </a:pPr>
             <a:r>
-              <a:rPr sz="1100" b="1">
+              <a:rPr sz="1000" b="1">
                 <a:solidFill>
                   <a:srgbClr val="5F6F63"/>
                 </a:solidFill>
@@ -6314,14 +8393,14 @@
       </p:sp>
       <p:sp>
         <p:nvSpPr>
-          <p:cNvPr id="7" name="TextBox 6"/>
+          <p:cNvPr id="9" name="TextBox 8"/>
           <p:cNvSpPr txBox="1"/>
           <p:nvPr/>
         </p:nvSpPr>
         <p:spPr>
           <a:xfrm>
-            <a:off x="685800" y="2103120"/>
-            <a:ext cx="5044287" cy="3749039"/>
+            <a:off x="594360" y="5343144"/>
+            <a:ext cx="5227167" cy="929640"/>
           </a:xfrm>
           <a:prstGeom prst="rect">
             <a:avLst/>
@@ -6329,7 +8408,7 @@
           <a:noFill/>
         </p:spPr>
         <p:txBody>
-          <a:bodyPr wrap="square">
+          <a:bodyPr wrap="square" lIns="45720" rIns="45720">
             <a:spAutoFit/>
           </a:bodyPr>
           <a:lstStyle/>
@@ -6340,27 +8419,27 @@
               </a:defRPr>
             </a:pPr>
             <a:r>
-              <a:rPr sz="1600" b="0">
+              <a:rPr sz="1200" b="0">
                 <a:solidFill>
                   <a:srgbClr val="25342A"/>
                 </a:solidFill>
                 <a:latin typeface="Roboto"/>
               </a:rPr>
-              <a:t>Youth outreach cost $38,436 in full in October: $21,925 paid by the State Department of Families grant, and $16,511 of shared costs no grant covers. It has spent 97.5% of its budget to date, with $402,031 left and 20 months to go.</a:t>
-            </a:r>
-          </a:p>
-        </p:txBody>
-      </p:sp>
-      <p:sp>
-        <p:nvSpPr>
-          <p:cNvPr id="8" name="Rectangle 7"/>
+              <a:t>Digital literacy cost $9,046 in full in October: $5,160 paid by the Philanthropic foundation grant, and $3,886 of shared costs no grant covers. It has spent 103.2% of its budget to date, with $84,840 left and 17 months to go.</a:t>
+            </a:r>
+          </a:p>
+        </p:txBody>
+      </p:sp>
+      <p:sp>
+        <p:nvSpPr>
+          <p:cNvPr id="10" name="Rectangle 9"/>
           <p:cNvSpPr/>
           <p:nvPr/>
         </p:nvSpPr>
         <p:spPr>
           <a:xfrm>
-            <a:off x="6233007" y="1554480"/>
-            <a:ext cx="5501487" cy="4389120"/>
+            <a:off x="6233007" y="5013960"/>
+            <a:ext cx="5501487" cy="1295400"/>
           </a:xfrm>
           <a:prstGeom prst="rect">
             <a:avLst/>
@@ -6402,14 +8481,14 @@
       </p:sp>
       <p:sp>
         <p:nvSpPr>
-          <p:cNvPr id="9" name="TextBox 8"/>
+          <p:cNvPr id="11" name="TextBox 10"/>
           <p:cNvSpPr txBox="1"/>
           <p:nvPr/>
         </p:nvSpPr>
         <p:spPr>
           <a:xfrm>
-            <a:off x="6461607" y="1691640"/>
-            <a:ext cx="5044287" cy="365760"/>
+            <a:off x="6370167" y="5068824"/>
+            <a:ext cx="5227167" cy="274320"/>
           </a:xfrm>
           <a:prstGeom prst="rect">
             <a:avLst/>
@@ -6417,7 +8496,7 @@
           <a:noFill/>
         </p:spPr>
         <p:txBody>
-          <a:bodyPr wrap="square">
+          <a:bodyPr wrap="square" lIns="45720" rIns="45720">
             <a:spAutoFit/>
           </a:bodyPr>
           <a:lstStyle/>
@@ -6428,7 +8507,7 @@
               </a:defRPr>
             </a:pPr>
             <a:r>
-              <a:rPr sz="1100" b="1">
+              <a:rPr sz="1000" b="1">
                 <a:solidFill>
                   <a:srgbClr val="5F6F63"/>
                 </a:solidFill>
@@ -6441,14 +8520,14 @@
       </p:sp>
       <p:sp>
         <p:nvSpPr>
-          <p:cNvPr id="10" name="TextBox 9"/>
+          <p:cNvPr id="12" name="TextBox 11"/>
           <p:cNvSpPr txBox="1"/>
           <p:nvPr/>
         </p:nvSpPr>
         <p:spPr>
           <a:xfrm>
-            <a:off x="6461607" y="2103120"/>
-            <a:ext cx="5044287" cy="3749039"/>
+            <a:off x="6370167" y="5343144"/>
+            <a:ext cx="5227167" cy="929640"/>
           </a:xfrm>
           <a:prstGeom prst="rect">
             <a:avLst/>
@@ -6456,7 +8535,7 @@
           <a:noFill/>
         </p:spPr>
         <p:txBody>
-          <a:bodyPr wrap="square">
+          <a:bodyPr wrap="square" lIns="45720" rIns="45720">
             <a:spAutoFit/>
           </a:bodyPr>
           <a:lstStyle/>
@@ -6467,27 +8546,27 @@
               </a:defRPr>
             </a:pPr>
             <a:r>
-              <a:rPr sz="1600" b="0">
+              <a:rPr sz="1200" b="0">
                 <a:solidFill>
                   <a:srgbClr val="25342A"/>
                 </a:solidFill>
                 <a:latin typeface="Roboto"/>
               </a:rPr>
-              <a:t>The full cost is $38,436 a month; $16,511 of it is shared cost the grant doesn't pay for. Worth asking for as much of it as the funder allows at renewal.</a:t>
-            </a:r>
-          </a:p>
-        </p:txBody>
-      </p:sp>
-      <p:sp>
-        <p:nvSpPr>
-          <p:cNvPr id="11" name="TextBox 10"/>
+              <a:t>The full cost is $9,046 a month; $3,886 of it is shared cost the grant doesn't pay for. Worth asking for as much of it as the funder allows at renewal.</a:t>
+            </a:r>
+          </a:p>
+        </p:txBody>
+      </p:sp>
+      <p:sp>
+        <p:nvSpPr>
+          <p:cNvPr id="13" name="TextBox 12"/>
           <p:cNvSpPr txBox="1"/>
           <p:nvPr/>
         </p:nvSpPr>
         <p:spPr>
           <a:xfrm>
             <a:off x="457200" y="6492240"/>
-            <a:ext cx="3657600" cy="274320"/>
+            <a:ext cx="2926080" cy="274320"/>
           </a:xfrm>
           <a:prstGeom prst="rect">
             <a:avLst/>
@@ -6495,7 +8574,7 @@
           <a:noFill/>
         </p:spPr>
         <p:txBody>
-          <a:bodyPr wrap="square">
+          <a:bodyPr wrap="square" lIns="45720" rIns="45720">
             <a:spAutoFit/>
           </a:bodyPr>
           <a:lstStyle/>
@@ -6519,14 +8598,14 @@
       </p:sp>
       <p:sp>
         <p:nvSpPr>
-          <p:cNvPr id="12" name="TextBox 11"/>
+          <p:cNvPr id="14" name="TextBox 13"/>
           <p:cNvSpPr txBox="1"/>
           <p:nvPr/>
         </p:nvSpPr>
         <p:spPr>
           <a:xfrm>
-            <a:off x="4297680" y="6492240"/>
-            <a:ext cx="3657600" cy="274320"/>
+            <a:off x="3108960" y="6492240"/>
+            <a:ext cx="5943600" cy="274320"/>
           </a:xfrm>
           <a:prstGeom prst="rect">
             <a:avLst/>
@@ -6534,7 +8613,7 @@
           <a:noFill/>
         </p:spPr>
         <p:txBody>
-          <a:bodyPr wrap="square">
+          <a:bodyPr wrap="square" lIns="45720" rIns="45720">
             <a:spAutoFit/>
           </a:bodyPr>
           <a:lstStyle/>
@@ -6551,14 +8630,14 @@
                 </a:solidFill>
                 <a:latin typeface="Roboto"/>
               </a:rPr>
-              <a:t>Data retrieved 2pm, Tue 6 Oct 2026 · Sample data</a:t>
-            </a:r>
-          </a:p>
-        </p:txBody>
-      </p:sp>
-      <p:sp>
-        <p:nvSpPr>
-          <p:cNvPr id="13" name="TextBox 12"/>
+              <a:t>Data retrieved 2pm, Tue 6 Oct 2026 · Generated 8 Oct 2026, 9:35am · Sample data · Made with Python (python-pptx)</a:t>
+            </a:r>
+          </a:p>
+        </p:txBody>
+      </p:sp>
+      <p:sp>
+        <p:nvSpPr>
+          <p:cNvPr id="15" name="TextBox 14"/>
           <p:cNvSpPr txBox="1"/>
           <p:nvPr/>
         </p:nvSpPr>
@@ -6573,7 +8652,7 @@
           <a:noFill/>
         </p:spPr>
         <p:txBody>
-          <a:bodyPr wrap="square">
+          <a:bodyPr wrap="square" lIns="45720" rIns="45720">
             <a:spAutoFit/>
           </a:bodyPr>
           <a:lstStyle/>
@@ -6590,7 +8669,7 @@
                 </a:solidFill>
                 <a:latin typeface="Roboto"/>
               </a:rPr>
-              <a:t>Slide 6 of 10</a:t>
+              <a:t>Slide 6 of 7</a:t>
             </a:r>
           </a:p>
         </p:txBody>
@@ -6615,7 +8694,44 @@
       <p:grpSpPr/>
       <p:sp>
         <p:nvSpPr>
-          <p:cNvPr id="2" name="Rectangle 1"/>
+          <p:cNvPr id="2" name="Title 1"/>
+          <p:cNvSpPr>
+            <a:spLocks noGrp="1"/>
+          </p:cNvSpPr>
+          <p:nvPr>
+            <p:ph type="title"/>
+          </p:nvPr>
+        </p:nvSpPr>
+        <p:spPr>
+          <a:xfrm>
+            <a:off x="457200" y="384048"/>
+            <a:ext cx="11277295" cy="475488"/>
+          </a:xfrm>
+        </p:spPr>
+        <p:txBody>
+          <a:bodyPr wrap="square" lIns="45720" rIns="45720" tIns="0" bIns="0" anchor="t"/>
+          <a:lstStyle/>
+          <a:p>
+            <a:pPr algn="l">
+              <a:defRPr>
+                <a:latin typeface="Roboto"/>
+              </a:defRPr>
+            </a:pPr>
+            <a:r>
+              <a:rPr sz="2400" b="1">
+                <a:solidFill>
+                  <a:srgbClr val="25342A"/>
+                </a:solidFill>
+                <a:latin typeface="Roboto"/>
+              </a:rPr>
+              <a:t>Community meals (2025-26)</a:t>
+            </a:r>
+          </a:p>
+        </p:txBody>
+      </p:sp>
+      <p:sp>
+        <p:nvSpPr>
+          <p:cNvPr id="3" name="Rectangle 2"/>
           <p:cNvSpPr/>
           <p:nvPr/>
         </p:nvSpPr>
@@ -6662,14 +8778,14 @@
       </p:sp>
       <p:sp>
         <p:nvSpPr>
-          <p:cNvPr id="3" name="TextBox 2"/>
+          <p:cNvPr id="4" name="TextBox 3"/>
           <p:cNvSpPr txBox="1"/>
           <p:nvPr/>
         </p:nvSpPr>
         <p:spPr>
           <a:xfrm>
-            <a:off x="457200" y="164592"/>
-            <a:ext cx="7315200" cy="274320"/>
+            <a:off x="457200" y="146304"/>
+            <a:ext cx="8229600" cy="256032"/>
           </a:xfrm>
           <a:prstGeom prst="rect">
             <a:avLst/>
@@ -6677,7 +8793,7 @@
           <a:noFill/>
         </p:spPr>
         <p:txBody>
-          <a:bodyPr wrap="square">
+          <a:bodyPr wrap="square" lIns="45720" rIns="45720">
             <a:spAutoFit/>
           </a:bodyPr>
           <a:lstStyle/>
@@ -6701,14 +8817,14 @@
       </p:sp>
       <p:sp>
         <p:nvSpPr>
-          <p:cNvPr id="4" name="TextBox 3"/>
+          <p:cNvPr id="5" name="TextBox 4"/>
           <p:cNvSpPr txBox="1"/>
           <p:nvPr/>
         </p:nvSpPr>
         <p:spPr>
           <a:xfrm>
-            <a:off x="457200" y="411480"/>
-            <a:ext cx="11247120" cy="548640"/>
+            <a:off x="457200" y="914400"/>
+            <a:ext cx="11277295" cy="263652"/>
           </a:xfrm>
           <a:prstGeom prst="rect">
             <a:avLst/>
@@ -6716,7 +8832,7 @@
           <a:noFill/>
         </p:spPr>
         <p:txBody>
-          <a:bodyPr wrap="square">
+          <a:bodyPr wrap="square" lIns="45720" rIns="45720">
             <a:spAutoFit/>
           </a:bodyPr>
           <a:lstStyle/>
@@ -6727,27 +8843,45 @@
               </a:defRPr>
             </a:pPr>
             <a:r>
-              <a:rPr sz="2400" b="1">
+              <a:rPr sz="1200" b="0">
                 <a:solidFill>
-                  <a:srgbClr val="25342A"/>
+                  <a:srgbClr val="5F6F63"/>
                 </a:solidFill>
                 <a:latin typeface="Roboto"/>
               </a:rPr>
-              <a:t>What it shows · Program: Emergency relief</a:t>
-            </a:r>
-          </a:p>
-        </p:txBody>
-      </p:sp>
-      <p:sp>
-        <p:nvSpPr>
-          <p:cNvPr id="5" name="Rectangle 4"/>
+              <a:t>Grant spending, by month · Community meals (2025-26)</a:t>
+            </a:r>
+          </a:p>
+        </p:txBody>
+      </p:sp>
+      <p:graphicFrame>
+        <p:nvGraphicFramePr>
+          <p:cNvPr id="6" name="Chart 5"/>
+          <p:cNvGraphicFramePr>
+            <a:graphicFrameLocks noGrp="1"/>
+          </p:cNvGraphicFramePr>
+          <p:nvPr/>
+        </p:nvGraphicFramePr>
+        <p:xfrm>
+          <a:off x="457200" y="1278636"/>
+          <a:ext cx="11277295" cy="3643884"/>
+        </p:xfrm>
+        <a:graphic>
+          <a:graphicData uri="http://schemas.openxmlformats.org/drawingml/2006/chart">
+            <c:chart xmlns:c="http://schemas.openxmlformats.org/drawingml/2006/chart" r:id="rId3"/>
+          </a:graphicData>
+        </a:graphic>
+      </p:graphicFrame>
+      <p:sp>
+        <p:nvSpPr>
+          <p:cNvPr id="7" name="Rectangle 6"/>
           <p:cNvSpPr/>
           <p:nvPr/>
         </p:nvSpPr>
         <p:spPr>
           <a:xfrm>
-            <a:off x="457200" y="1554480"/>
-            <a:ext cx="5501487" cy="4389120"/>
+            <a:off x="457200" y="5013960"/>
+            <a:ext cx="5501487" cy="1295400"/>
           </a:xfrm>
           <a:prstGeom prst="rect">
             <a:avLst/>
@@ -6789,14 +8923,14 @@
       </p:sp>
       <p:sp>
         <p:nvSpPr>
-          <p:cNvPr id="6" name="TextBox 5"/>
+          <p:cNvPr id="8" name="TextBox 7"/>
           <p:cNvSpPr txBox="1"/>
           <p:nvPr/>
         </p:nvSpPr>
         <p:spPr>
           <a:xfrm>
-            <a:off x="685800" y="1691640"/>
-            <a:ext cx="5044287" cy="365760"/>
+            <a:off x="594360" y="5068824"/>
+            <a:ext cx="5227167" cy="274320"/>
           </a:xfrm>
           <a:prstGeom prst="rect">
             <a:avLst/>
@@ -6804,7 +8938,7 @@
           <a:noFill/>
         </p:spPr>
         <p:txBody>
-          <a:bodyPr wrap="square">
+          <a:bodyPr wrap="square" lIns="45720" rIns="45720">
             <a:spAutoFit/>
           </a:bodyPr>
           <a:lstStyle/>
@@ -6815,7 +8949,7 @@
               </a:defRPr>
             </a:pPr>
             <a:r>
-              <a:rPr sz="1100" b="1">
+              <a:rPr sz="1000" b="1">
                 <a:solidFill>
                   <a:srgbClr val="5F6F63"/>
                 </a:solidFill>
@@ -6828,14 +8962,14 @@
       </p:sp>
       <p:sp>
         <p:nvSpPr>
-          <p:cNvPr id="7" name="TextBox 6"/>
+          <p:cNvPr id="9" name="TextBox 8"/>
           <p:cNvSpPr txBox="1"/>
           <p:nvPr/>
         </p:nvSpPr>
         <p:spPr>
           <a:xfrm>
-            <a:off x="685800" y="2103120"/>
-            <a:ext cx="5044287" cy="3749039"/>
+            <a:off x="594360" y="5343144"/>
+            <a:ext cx="5227167" cy="929640"/>
           </a:xfrm>
           <a:prstGeom prst="rect">
             <a:avLst/>
@@ -6843,7 +8977,7 @@
           <a:noFill/>
         </p:spPr>
         <p:txBody>
-          <a:bodyPr wrap="square">
+          <a:bodyPr wrap="square" lIns="45720" rIns="45720">
             <a:spAutoFit/>
           </a:bodyPr>
           <a:lstStyle/>
@@ -6854,27 +8988,27 @@
               </a:defRPr>
             </a:pPr>
             <a:r>
-              <a:rPr sz="1600" b="0">
+              <a:rPr sz="1200" b="0">
                 <a:solidFill>
                   <a:srgbClr val="25342A"/>
                 </a:solidFill>
                 <a:latin typeface="Roboto"/>
               </a:rPr>
-              <a:t>Emergency relief cost $21,563 in full in October: $12,300 paid by the Federal community grant grant, and $9,263 of shared costs no grant covers. It has spent 99.9% of its budget to date (spending before October 2024 taken at budget), with $24,300 left and 2 months to go.</a:t>
-            </a:r>
-          </a:p>
-        </p:txBody>
-      </p:sp>
-      <p:sp>
-        <p:nvSpPr>
-          <p:cNvPr id="8" name="Rectangle 7"/>
+              <a:t>Community meals (2025-26) cost $5,610 in full in October: $3,200 paid by the Local council community grant grant, and $2,410 of shared costs no grant covers. It has spent 96.1% of its budget to date, with $29,900 left and 8 months to go.</a:t>
+            </a:r>
+          </a:p>
+        </p:txBody>
+      </p:sp>
+      <p:sp>
+        <p:nvSpPr>
+          <p:cNvPr id="10" name="Rectangle 9"/>
           <p:cNvSpPr/>
           <p:nvPr/>
         </p:nvSpPr>
         <p:spPr>
           <a:xfrm>
-            <a:off x="6233007" y="1554480"/>
-            <a:ext cx="5501487" cy="4389120"/>
+            <a:off x="6233007" y="5013960"/>
+            <a:ext cx="5501487" cy="1295400"/>
           </a:xfrm>
           <a:prstGeom prst="rect">
             <a:avLst/>
@@ -6916,14 +9050,14 @@
       </p:sp>
       <p:sp>
         <p:nvSpPr>
-          <p:cNvPr id="9" name="TextBox 8"/>
+          <p:cNvPr id="11" name="TextBox 10"/>
           <p:cNvSpPr txBox="1"/>
           <p:nvPr/>
         </p:nvSpPr>
         <p:spPr>
           <a:xfrm>
-            <a:off x="6461607" y="1691640"/>
-            <a:ext cx="5044287" cy="365760"/>
+            <a:off x="6370167" y="5068824"/>
+            <a:ext cx="5227167" cy="274320"/>
           </a:xfrm>
           <a:prstGeom prst="rect">
             <a:avLst/>
@@ -6931,7 +9065,7 @@
           <a:noFill/>
         </p:spPr>
         <p:txBody>
-          <a:bodyPr wrap="square">
+          <a:bodyPr wrap="square" lIns="45720" rIns="45720">
             <a:spAutoFit/>
           </a:bodyPr>
           <a:lstStyle/>
@@ -6942,7 +9076,7 @@
               </a:defRPr>
             </a:pPr>
             <a:r>
-              <a:rPr sz="1100" b="1">
+              <a:rPr sz="1000" b="1">
                 <a:solidFill>
                   <a:srgbClr val="5F6F63"/>
                 </a:solidFill>
@@ -6955,14 +9089,14 @@
       </p:sp>
       <p:sp>
         <p:nvSpPr>
-          <p:cNvPr id="10" name="TextBox 9"/>
+          <p:cNvPr id="12" name="TextBox 11"/>
           <p:cNvSpPr txBox="1"/>
           <p:nvPr/>
         </p:nvSpPr>
         <p:spPr>
           <a:xfrm>
-            <a:off x="6461607" y="2103120"/>
-            <a:ext cx="5044287" cy="3749039"/>
+            <a:off x="6370167" y="5343144"/>
+            <a:ext cx="5227167" cy="929640"/>
           </a:xfrm>
           <a:prstGeom prst="rect">
             <a:avLst/>
@@ -6970,7 +9104,7 @@
           <a:noFill/>
         </p:spPr>
         <p:txBody>
-          <a:bodyPr wrap="square">
+          <a:bodyPr wrap="square" lIns="45720" rIns="45720">
             <a:spAutoFit/>
           </a:bodyPr>
           <a:lstStyle/>
@@ -6981,27 +9115,27 @@
               </a:defRPr>
             </a:pPr>
             <a:r>
-              <a:rPr sz="1600" b="0">
+              <a:rPr sz="1200" b="0">
                 <a:solidFill>
                   <a:srgbClr val="25342A"/>
                 </a:solidFill>
                 <a:latin typeface="Roboto"/>
               </a:rPr>
-              <a:t>The full cost is $21,563 a month; $9,263 of it is shared cost the grant doesn't pay for. Worth asking for as much of it as the funder allows at renewal.</a:t>
-            </a:r>
-          </a:p>
-        </p:txBody>
-      </p:sp>
-      <p:sp>
-        <p:nvSpPr>
-          <p:cNvPr id="11" name="TextBox 10"/>
+              <a:t>The full cost is $5,610 a month; $2,410 of it is shared cost the grant doesn't pay for. Worth asking for as much of it as the funder allows at renewal.</a:t>
+            </a:r>
+          </a:p>
+        </p:txBody>
+      </p:sp>
+      <p:sp>
+        <p:nvSpPr>
+          <p:cNvPr id="13" name="TextBox 12"/>
           <p:cNvSpPr txBox="1"/>
           <p:nvPr/>
         </p:nvSpPr>
         <p:spPr>
           <a:xfrm>
             <a:off x="457200" y="6492240"/>
-            <a:ext cx="3657600" cy="274320"/>
+            <a:ext cx="2926080" cy="274320"/>
           </a:xfrm>
           <a:prstGeom prst="rect">
             <a:avLst/>
@@ -7009,7 +9143,7 @@
           <a:noFill/>
         </p:spPr>
         <p:txBody>
-          <a:bodyPr wrap="square">
+          <a:bodyPr wrap="square" lIns="45720" rIns="45720">
             <a:spAutoFit/>
           </a:bodyPr>
           <a:lstStyle/>
@@ -7033,14 +9167,14 @@
       </p:sp>
       <p:sp>
         <p:nvSpPr>
-          <p:cNvPr id="12" name="TextBox 11"/>
+          <p:cNvPr id="14" name="TextBox 13"/>
           <p:cNvSpPr txBox="1"/>
           <p:nvPr/>
         </p:nvSpPr>
         <p:spPr>
           <a:xfrm>
-            <a:off x="4297680" y="6492240"/>
-            <a:ext cx="3657600" cy="274320"/>
+            <a:off x="3108960" y="6492240"/>
+            <a:ext cx="5943600" cy="274320"/>
           </a:xfrm>
           <a:prstGeom prst="rect">
             <a:avLst/>
@@ -7048,7 +9182,7 @@
           <a:noFill/>
         </p:spPr>
         <p:txBody>
-          <a:bodyPr wrap="square">
+          <a:bodyPr wrap="square" lIns="45720" rIns="45720">
             <a:spAutoFit/>
           </a:bodyPr>
           <a:lstStyle/>
@@ -7065,14 +9199,14 @@
                 </a:solidFill>
                 <a:latin typeface="Roboto"/>
               </a:rPr>
-              <a:t>Data retrieved 2pm, Tue 6 Oct 2026 · Sample data</a:t>
-            </a:r>
-          </a:p>
-        </p:txBody>
-      </p:sp>
-      <p:sp>
-        <p:nvSpPr>
-          <p:cNvPr id="13" name="TextBox 12"/>
+              <a:t>Data retrieved 2pm, Tue 6 Oct 2026 · Generated 8 Oct 2026, 9:35am · Sample data · Made with Python (python-pptx)</a:t>
+            </a:r>
+          </a:p>
+        </p:txBody>
+      </p:sp>
+      <p:sp>
+        <p:nvSpPr>
+          <p:cNvPr id="15" name="TextBox 14"/>
           <p:cNvSpPr txBox="1"/>
           <p:nvPr/>
         </p:nvSpPr>
@@ -7087,7 +9221,7 @@
           <a:noFill/>
         </p:spPr>
         <p:txBody>
-          <a:bodyPr wrap="square">
+          <a:bodyPr wrap="square" lIns="45720" rIns="45720">
             <a:spAutoFit/>
           </a:bodyPr>
           <a:lstStyle/>
@@ -7104,1035 +9238,7 @@
                 </a:solidFill>
                 <a:latin typeface="Roboto"/>
               </a:rPr>
-              <a:t>Slide 7 of 10</a:t>
-            </a:r>
-          </a:p>
-        </p:txBody>
-      </p:sp>
-    </p:spTree>
-  </p:cSld>
-  <p:clrMapOvr>
-    <a:masterClrMapping/>
-  </p:clrMapOvr>
-</p:sld>
-</file>
-
-<file path=ppt/slides/slide8.xml><?xml version="1.0" encoding="utf-8"?>
-<p:sld xmlns:a="http://schemas.openxmlformats.org/drawingml/2006/main" xmlns:p="http://schemas.openxmlformats.org/presentationml/2006/main" xmlns:r="http://schemas.openxmlformats.org/officeDocument/2006/relationships">
-  <p:cSld>
-    <p:spTree>
-      <p:nvGrpSpPr>
-        <p:cNvPr id="1" name=""/>
-        <p:cNvGrpSpPr/>
-        <p:nvPr/>
-      </p:nvGrpSpPr>
-      <p:grpSpPr/>
-      <p:sp>
-        <p:nvSpPr>
-          <p:cNvPr id="2" name="Rectangle 1"/>
-          <p:cNvSpPr/>
-          <p:nvPr/>
-        </p:nvSpPr>
-        <p:spPr>
-          <a:xfrm>
-            <a:off x="0" y="0"/>
-            <a:ext cx="12191695" cy="73152"/>
-          </a:xfrm>
-          <a:prstGeom prst="rect">
-            <a:avLst/>
-          </a:prstGeom>
-          <a:solidFill>
-            <a:srgbClr val="2F7A5D"/>
-          </a:solidFill>
-          <a:ln>
-            <a:noFill/>
-          </a:ln>
-        </p:spPr>
-        <p:style>
-          <a:lnRef idx="1">
-            <a:schemeClr val="accent1"/>
-          </a:lnRef>
-          <a:fillRef idx="3">
-            <a:schemeClr val="accent1"/>
-          </a:fillRef>
-          <a:effectRef idx="2">
-            <a:schemeClr val="accent1"/>
-          </a:effectRef>
-          <a:fontRef idx="minor">
-            <a:schemeClr val="lt1"/>
-          </a:fontRef>
-        </p:style>
-        <p:txBody>
-          <a:bodyPr rtlCol="0" anchor="ctr"/>
-          <a:lstStyle/>
-          <a:p>
-            <a:pPr algn="ctr">
-              <a:defRPr>
-                <a:latin typeface="Roboto"/>
-              </a:defRPr>
-            </a:pPr>
-          </a:p>
-        </p:txBody>
-      </p:sp>
-      <p:sp>
-        <p:nvSpPr>
-          <p:cNvPr id="3" name="TextBox 2"/>
-          <p:cNvSpPr txBox="1"/>
-          <p:nvPr/>
-        </p:nvSpPr>
-        <p:spPr>
-          <a:xfrm>
-            <a:off x="457200" y="164592"/>
-            <a:ext cx="7315200" cy="274320"/>
-          </a:xfrm>
-          <a:prstGeom prst="rect">
-            <a:avLst/>
-          </a:prstGeom>
-          <a:noFill/>
-        </p:spPr>
-        <p:txBody>
-          <a:bodyPr wrap="square">
-            <a:spAutoFit/>
-          </a:bodyPr>
-          <a:lstStyle/>
-          <a:p>
-            <a:pPr>
-              <a:defRPr>
-                <a:latin typeface="Roboto"/>
-              </a:defRPr>
-            </a:pPr>
-            <a:r>
-              <a:rPr sz="1000" b="0">
-                <a:solidFill>
-                  <a:srgbClr val="5F6F63"/>
-                </a:solidFill>
-                <a:latin typeface="Roboto"/>
-              </a:rPr>
-              <a:t>Sample Community Services Ltd · What does each program really cost?</a:t>
-            </a:r>
-          </a:p>
-        </p:txBody>
-      </p:sp>
-      <p:sp>
-        <p:nvSpPr>
-          <p:cNvPr id="4" name="TextBox 3"/>
-          <p:cNvSpPr txBox="1"/>
-          <p:nvPr/>
-        </p:nvSpPr>
-        <p:spPr>
-          <a:xfrm>
-            <a:off x="457200" y="411480"/>
-            <a:ext cx="11247120" cy="548640"/>
-          </a:xfrm>
-          <a:prstGeom prst="rect">
-            <a:avLst/>
-          </a:prstGeom>
-          <a:noFill/>
-        </p:spPr>
-        <p:txBody>
-          <a:bodyPr wrap="square">
-            <a:spAutoFit/>
-          </a:bodyPr>
-          <a:lstStyle/>
-          <a:p>
-            <a:pPr>
-              <a:defRPr>
-                <a:latin typeface="Roboto"/>
-              </a:defRPr>
-            </a:pPr>
-            <a:r>
-              <a:rPr sz="2400" b="1">
-                <a:solidFill>
-                  <a:srgbClr val="25342A"/>
-                </a:solidFill>
-                <a:latin typeface="Roboto"/>
-              </a:rPr>
-              <a:t>What it shows · Program: Digital literacy</a:t>
-            </a:r>
-          </a:p>
-        </p:txBody>
-      </p:sp>
-      <p:sp>
-        <p:nvSpPr>
-          <p:cNvPr id="5" name="Rectangle 4"/>
-          <p:cNvSpPr/>
-          <p:nvPr/>
-        </p:nvSpPr>
-        <p:spPr>
-          <a:xfrm>
-            <a:off x="457200" y="1554480"/>
-            <a:ext cx="5501487" cy="4389120"/>
-          </a:xfrm>
-          <a:prstGeom prst="rect">
-            <a:avLst/>
-          </a:prstGeom>
-          <a:solidFill>
-            <a:srgbClr val="FFFFFF"/>
-          </a:solidFill>
-          <a:ln>
-            <a:solidFill>
-              <a:srgbClr val="DCE8DC"/>
-            </a:solidFill>
-          </a:ln>
-        </p:spPr>
-        <p:style>
-          <a:lnRef idx="1">
-            <a:schemeClr val="accent1"/>
-          </a:lnRef>
-          <a:fillRef idx="3">
-            <a:schemeClr val="accent1"/>
-          </a:fillRef>
-          <a:effectRef idx="2">
-            <a:schemeClr val="accent1"/>
-          </a:effectRef>
-          <a:fontRef idx="minor">
-            <a:schemeClr val="lt1"/>
-          </a:fontRef>
-        </p:style>
-        <p:txBody>
-          <a:bodyPr rtlCol="0" anchor="ctr"/>
-          <a:lstStyle/>
-          <a:p>
-            <a:pPr algn="ctr">
-              <a:defRPr>
-                <a:latin typeface="Roboto"/>
-              </a:defRPr>
-            </a:pPr>
-          </a:p>
-        </p:txBody>
-      </p:sp>
-      <p:sp>
-        <p:nvSpPr>
-          <p:cNvPr id="6" name="TextBox 5"/>
-          <p:cNvSpPr txBox="1"/>
-          <p:nvPr/>
-        </p:nvSpPr>
-        <p:spPr>
-          <a:xfrm>
-            <a:off x="685800" y="1691640"/>
-            <a:ext cx="5044287" cy="365760"/>
-          </a:xfrm>
-          <a:prstGeom prst="rect">
-            <a:avLst/>
-          </a:prstGeom>
-          <a:noFill/>
-        </p:spPr>
-        <p:txBody>
-          <a:bodyPr wrap="square">
-            <a:spAutoFit/>
-          </a:bodyPr>
-          <a:lstStyle/>
-          <a:p>
-            <a:pPr>
-              <a:defRPr>
-                <a:latin typeface="Roboto"/>
-              </a:defRPr>
-            </a:pPr>
-            <a:r>
-              <a:rPr sz="1100" b="1">
-                <a:solidFill>
-                  <a:srgbClr val="5F6F63"/>
-                </a:solidFill>
-                <a:latin typeface="Roboto"/>
-              </a:rPr>
-              <a:t>WHAT IT SHOWS</a:t>
-            </a:r>
-          </a:p>
-        </p:txBody>
-      </p:sp>
-      <p:sp>
-        <p:nvSpPr>
-          <p:cNvPr id="7" name="TextBox 6"/>
-          <p:cNvSpPr txBox="1"/>
-          <p:nvPr/>
-        </p:nvSpPr>
-        <p:spPr>
-          <a:xfrm>
-            <a:off x="685800" y="2103120"/>
-            <a:ext cx="5044287" cy="3749039"/>
-          </a:xfrm>
-          <a:prstGeom prst="rect">
-            <a:avLst/>
-          </a:prstGeom>
-          <a:noFill/>
-        </p:spPr>
-        <p:txBody>
-          <a:bodyPr wrap="square">
-            <a:spAutoFit/>
-          </a:bodyPr>
-          <a:lstStyle/>
-          <a:p>
-            <a:pPr>
-              <a:defRPr>
-                <a:latin typeface="Roboto"/>
-              </a:defRPr>
-            </a:pPr>
-            <a:r>
-              <a:rPr sz="1600" b="0">
-                <a:solidFill>
-                  <a:srgbClr val="25342A"/>
-                </a:solidFill>
-                <a:latin typeface="Roboto"/>
-              </a:rPr>
-              <a:t>Digital literacy cost $9,046 in full in October: $5,160 paid by the Philanthropic foundation grant, and $3,886 of shared costs no grant covers. It has spent 103.2% of its budget to date, with $84,840 left and 17 months to go.</a:t>
-            </a:r>
-          </a:p>
-        </p:txBody>
-      </p:sp>
-      <p:sp>
-        <p:nvSpPr>
-          <p:cNvPr id="8" name="Rectangle 7"/>
-          <p:cNvSpPr/>
-          <p:nvPr/>
-        </p:nvSpPr>
-        <p:spPr>
-          <a:xfrm>
-            <a:off x="6233007" y="1554480"/>
-            <a:ext cx="5501487" cy="4389120"/>
-          </a:xfrm>
-          <a:prstGeom prst="rect">
-            <a:avLst/>
-          </a:prstGeom>
-          <a:solidFill>
-            <a:srgbClr val="EEF5F0"/>
-          </a:solidFill>
-          <a:ln>
-            <a:solidFill>
-              <a:srgbClr val="DCE8DC"/>
-            </a:solidFill>
-          </a:ln>
-        </p:spPr>
-        <p:style>
-          <a:lnRef idx="1">
-            <a:schemeClr val="accent1"/>
-          </a:lnRef>
-          <a:fillRef idx="3">
-            <a:schemeClr val="accent1"/>
-          </a:fillRef>
-          <a:effectRef idx="2">
-            <a:schemeClr val="accent1"/>
-          </a:effectRef>
-          <a:fontRef idx="minor">
-            <a:schemeClr val="lt1"/>
-          </a:fontRef>
-        </p:style>
-        <p:txBody>
-          <a:bodyPr rtlCol="0" anchor="ctr"/>
-          <a:lstStyle/>
-          <a:p>
-            <a:pPr algn="ctr">
-              <a:defRPr>
-                <a:latin typeface="Roboto"/>
-              </a:defRPr>
-            </a:pPr>
-          </a:p>
-        </p:txBody>
-      </p:sp>
-      <p:sp>
-        <p:nvSpPr>
-          <p:cNvPr id="9" name="TextBox 8"/>
-          <p:cNvSpPr txBox="1"/>
-          <p:nvPr/>
-        </p:nvSpPr>
-        <p:spPr>
-          <a:xfrm>
-            <a:off x="6461607" y="1691640"/>
-            <a:ext cx="5044287" cy="365760"/>
-          </a:xfrm>
-          <a:prstGeom prst="rect">
-            <a:avLst/>
-          </a:prstGeom>
-          <a:noFill/>
-        </p:spPr>
-        <p:txBody>
-          <a:bodyPr wrap="square">
-            <a:spAutoFit/>
-          </a:bodyPr>
-          <a:lstStyle/>
-          <a:p>
-            <a:pPr>
-              <a:defRPr>
-                <a:latin typeface="Roboto"/>
-              </a:defRPr>
-            </a:pPr>
-            <a:r>
-              <a:rPr sz="1100" b="1">
-                <a:solidFill>
-                  <a:srgbClr val="5F6F63"/>
-                </a:solidFill>
-                <a:latin typeface="Roboto"/>
-              </a:rPr>
-              <a:t>WHAT YOU'D DO ABOUT IT</a:t>
-            </a:r>
-          </a:p>
-        </p:txBody>
-      </p:sp>
-      <p:sp>
-        <p:nvSpPr>
-          <p:cNvPr id="10" name="TextBox 9"/>
-          <p:cNvSpPr txBox="1"/>
-          <p:nvPr/>
-        </p:nvSpPr>
-        <p:spPr>
-          <a:xfrm>
-            <a:off x="6461607" y="2103120"/>
-            <a:ext cx="5044287" cy="3749039"/>
-          </a:xfrm>
-          <a:prstGeom prst="rect">
-            <a:avLst/>
-          </a:prstGeom>
-          <a:noFill/>
-        </p:spPr>
-        <p:txBody>
-          <a:bodyPr wrap="square">
-            <a:spAutoFit/>
-          </a:bodyPr>
-          <a:lstStyle/>
-          <a:p>
-            <a:pPr>
-              <a:defRPr>
-                <a:latin typeface="Roboto"/>
-              </a:defRPr>
-            </a:pPr>
-            <a:r>
-              <a:rPr sz="1600" b="0">
-                <a:solidFill>
-                  <a:srgbClr val="25342A"/>
-                </a:solidFill>
-                <a:latin typeface="Roboto"/>
-              </a:rPr>
-              <a:t>The full cost is $9,046 a month; $3,886 of it is shared cost the grant doesn't pay for. Worth asking for as much of it as the funder allows at renewal.</a:t>
-            </a:r>
-          </a:p>
-        </p:txBody>
-      </p:sp>
-      <p:sp>
-        <p:nvSpPr>
-          <p:cNvPr id="11" name="TextBox 10"/>
-          <p:cNvSpPr txBox="1"/>
-          <p:nvPr/>
-        </p:nvSpPr>
-        <p:spPr>
-          <a:xfrm>
-            <a:off x="457200" y="6492240"/>
-            <a:ext cx="3657600" cy="274320"/>
-          </a:xfrm>
-          <a:prstGeom prst="rect">
-            <a:avLst/>
-          </a:prstGeom>
-          <a:noFill/>
-        </p:spPr>
-        <p:txBody>
-          <a:bodyPr wrap="square">
-            <a:spAutoFit/>
-          </a:bodyPr>
-          <a:lstStyle/>
-          <a:p>
-            <a:pPr>
-              <a:defRPr>
-                <a:latin typeface="Roboto"/>
-              </a:defRPr>
-            </a:pPr>
-            <a:r>
-              <a:rPr sz="900" b="0">
-                <a:solidFill>
-                  <a:srgbClr val="5F6F63"/>
-                </a:solidFill>
-                <a:latin typeface="Roboto"/>
-              </a:rPr>
-              <a:t>program-cost.pptx</a:t>
-            </a:r>
-          </a:p>
-        </p:txBody>
-      </p:sp>
-      <p:sp>
-        <p:nvSpPr>
-          <p:cNvPr id="12" name="TextBox 11"/>
-          <p:cNvSpPr txBox="1"/>
-          <p:nvPr/>
-        </p:nvSpPr>
-        <p:spPr>
-          <a:xfrm>
-            <a:off x="4297680" y="6492240"/>
-            <a:ext cx="3657600" cy="274320"/>
-          </a:xfrm>
-          <a:prstGeom prst="rect">
-            <a:avLst/>
-          </a:prstGeom>
-          <a:noFill/>
-        </p:spPr>
-        <p:txBody>
-          <a:bodyPr wrap="square">
-            <a:spAutoFit/>
-          </a:bodyPr>
-          <a:lstStyle/>
-          <a:p>
-            <a:pPr algn="ctr">
-              <a:defRPr>
-                <a:latin typeface="Roboto"/>
-              </a:defRPr>
-            </a:pPr>
-            <a:r>
-              <a:rPr sz="900" b="0">
-                <a:solidFill>
-                  <a:srgbClr val="5F6F63"/>
-                </a:solidFill>
-                <a:latin typeface="Roboto"/>
-              </a:rPr>
-              <a:t>Data retrieved 2pm, Tue 6 Oct 2026 · Sample data</a:t>
-            </a:r>
-          </a:p>
-        </p:txBody>
-      </p:sp>
-      <p:sp>
-        <p:nvSpPr>
-          <p:cNvPr id="13" name="TextBox 12"/>
-          <p:cNvSpPr txBox="1"/>
-          <p:nvPr/>
-        </p:nvSpPr>
-        <p:spPr>
-          <a:xfrm>
-            <a:off x="8503920" y="6492240"/>
-            <a:ext cx="3200400" cy="274320"/>
-          </a:xfrm>
-          <a:prstGeom prst="rect">
-            <a:avLst/>
-          </a:prstGeom>
-          <a:noFill/>
-        </p:spPr>
-        <p:txBody>
-          <a:bodyPr wrap="square">
-            <a:spAutoFit/>
-          </a:bodyPr>
-          <a:lstStyle/>
-          <a:p>
-            <a:pPr algn="r">
-              <a:defRPr>
-                <a:latin typeface="Roboto"/>
-              </a:defRPr>
-            </a:pPr>
-            <a:r>
-              <a:rPr sz="900" b="0">
-                <a:solidFill>
-                  <a:srgbClr val="5F6F63"/>
-                </a:solidFill>
-                <a:latin typeface="Roboto"/>
-              </a:rPr>
-              <a:t>Slide 8 of 10</a:t>
-            </a:r>
-          </a:p>
-        </p:txBody>
-      </p:sp>
-    </p:spTree>
-  </p:cSld>
-  <p:clrMapOvr>
-    <a:masterClrMapping/>
-  </p:clrMapOvr>
-</p:sld>
-</file>
-
-<file path=ppt/slides/slide9.xml><?xml version="1.0" encoding="utf-8"?>
-<p:sld xmlns:a="http://schemas.openxmlformats.org/drawingml/2006/main" xmlns:p="http://schemas.openxmlformats.org/presentationml/2006/main" xmlns:r="http://schemas.openxmlformats.org/officeDocument/2006/relationships">
-  <p:cSld>
-    <p:spTree>
-      <p:nvGrpSpPr>
-        <p:cNvPr id="1" name=""/>
-        <p:cNvGrpSpPr/>
-        <p:nvPr/>
-      </p:nvGrpSpPr>
-      <p:grpSpPr/>
-      <p:sp>
-        <p:nvSpPr>
-          <p:cNvPr id="2" name="Rectangle 1"/>
-          <p:cNvSpPr/>
-          <p:nvPr/>
-        </p:nvSpPr>
-        <p:spPr>
-          <a:xfrm>
-            <a:off x="0" y="0"/>
-            <a:ext cx="12191695" cy="73152"/>
-          </a:xfrm>
-          <a:prstGeom prst="rect">
-            <a:avLst/>
-          </a:prstGeom>
-          <a:solidFill>
-            <a:srgbClr val="2F7A5D"/>
-          </a:solidFill>
-          <a:ln>
-            <a:noFill/>
-          </a:ln>
-        </p:spPr>
-        <p:style>
-          <a:lnRef idx="1">
-            <a:schemeClr val="accent1"/>
-          </a:lnRef>
-          <a:fillRef idx="3">
-            <a:schemeClr val="accent1"/>
-          </a:fillRef>
-          <a:effectRef idx="2">
-            <a:schemeClr val="accent1"/>
-          </a:effectRef>
-          <a:fontRef idx="minor">
-            <a:schemeClr val="lt1"/>
-          </a:fontRef>
-        </p:style>
-        <p:txBody>
-          <a:bodyPr rtlCol="0" anchor="ctr"/>
-          <a:lstStyle/>
-          <a:p>
-            <a:pPr algn="ctr">
-              <a:defRPr>
-                <a:latin typeface="Roboto"/>
-              </a:defRPr>
-            </a:pPr>
-          </a:p>
-        </p:txBody>
-      </p:sp>
-      <p:sp>
-        <p:nvSpPr>
-          <p:cNvPr id="3" name="TextBox 2"/>
-          <p:cNvSpPr txBox="1"/>
-          <p:nvPr/>
-        </p:nvSpPr>
-        <p:spPr>
-          <a:xfrm>
-            <a:off x="457200" y="164592"/>
-            <a:ext cx="7315200" cy="274320"/>
-          </a:xfrm>
-          <a:prstGeom prst="rect">
-            <a:avLst/>
-          </a:prstGeom>
-          <a:noFill/>
-        </p:spPr>
-        <p:txBody>
-          <a:bodyPr wrap="square">
-            <a:spAutoFit/>
-          </a:bodyPr>
-          <a:lstStyle/>
-          <a:p>
-            <a:pPr>
-              <a:defRPr>
-                <a:latin typeface="Roboto"/>
-              </a:defRPr>
-            </a:pPr>
-            <a:r>
-              <a:rPr sz="1000" b="0">
-                <a:solidFill>
-                  <a:srgbClr val="5F6F63"/>
-                </a:solidFill>
-                <a:latin typeface="Roboto"/>
-              </a:rPr>
-              <a:t>Sample Community Services Ltd · What does each program really cost?</a:t>
-            </a:r>
-          </a:p>
-        </p:txBody>
-      </p:sp>
-      <p:sp>
-        <p:nvSpPr>
-          <p:cNvPr id="4" name="TextBox 3"/>
-          <p:cNvSpPr txBox="1"/>
-          <p:nvPr/>
-        </p:nvSpPr>
-        <p:spPr>
-          <a:xfrm>
-            <a:off x="457200" y="411480"/>
-            <a:ext cx="11247120" cy="548640"/>
-          </a:xfrm>
-          <a:prstGeom prst="rect">
-            <a:avLst/>
-          </a:prstGeom>
-          <a:noFill/>
-        </p:spPr>
-        <p:txBody>
-          <a:bodyPr wrap="square">
-            <a:spAutoFit/>
-          </a:bodyPr>
-          <a:lstStyle/>
-          <a:p>
-            <a:pPr>
-              <a:defRPr>
-                <a:latin typeface="Roboto"/>
-              </a:defRPr>
-            </a:pPr>
-            <a:r>
-              <a:rPr sz="2400" b="1">
-                <a:solidFill>
-                  <a:srgbClr val="25342A"/>
-                </a:solidFill>
-                <a:latin typeface="Roboto"/>
-              </a:rPr>
-              <a:t>What it shows · Program: Community meals (2025-26)</a:t>
-            </a:r>
-          </a:p>
-        </p:txBody>
-      </p:sp>
-      <p:sp>
-        <p:nvSpPr>
-          <p:cNvPr id="5" name="Rectangle 4"/>
-          <p:cNvSpPr/>
-          <p:nvPr/>
-        </p:nvSpPr>
-        <p:spPr>
-          <a:xfrm>
-            <a:off x="457200" y="1554480"/>
-            <a:ext cx="5501487" cy="4389120"/>
-          </a:xfrm>
-          <a:prstGeom prst="rect">
-            <a:avLst/>
-          </a:prstGeom>
-          <a:solidFill>
-            <a:srgbClr val="FFFFFF"/>
-          </a:solidFill>
-          <a:ln>
-            <a:solidFill>
-              <a:srgbClr val="DCE8DC"/>
-            </a:solidFill>
-          </a:ln>
-        </p:spPr>
-        <p:style>
-          <a:lnRef idx="1">
-            <a:schemeClr val="accent1"/>
-          </a:lnRef>
-          <a:fillRef idx="3">
-            <a:schemeClr val="accent1"/>
-          </a:fillRef>
-          <a:effectRef idx="2">
-            <a:schemeClr val="accent1"/>
-          </a:effectRef>
-          <a:fontRef idx="minor">
-            <a:schemeClr val="lt1"/>
-          </a:fontRef>
-        </p:style>
-        <p:txBody>
-          <a:bodyPr rtlCol="0" anchor="ctr"/>
-          <a:lstStyle/>
-          <a:p>
-            <a:pPr algn="ctr">
-              <a:defRPr>
-                <a:latin typeface="Roboto"/>
-              </a:defRPr>
-            </a:pPr>
-          </a:p>
-        </p:txBody>
-      </p:sp>
-      <p:sp>
-        <p:nvSpPr>
-          <p:cNvPr id="6" name="TextBox 5"/>
-          <p:cNvSpPr txBox="1"/>
-          <p:nvPr/>
-        </p:nvSpPr>
-        <p:spPr>
-          <a:xfrm>
-            <a:off x="685800" y="1691640"/>
-            <a:ext cx="5044287" cy="365760"/>
-          </a:xfrm>
-          <a:prstGeom prst="rect">
-            <a:avLst/>
-          </a:prstGeom>
-          <a:noFill/>
-        </p:spPr>
-        <p:txBody>
-          <a:bodyPr wrap="square">
-            <a:spAutoFit/>
-          </a:bodyPr>
-          <a:lstStyle/>
-          <a:p>
-            <a:pPr>
-              <a:defRPr>
-                <a:latin typeface="Roboto"/>
-              </a:defRPr>
-            </a:pPr>
-            <a:r>
-              <a:rPr sz="1100" b="1">
-                <a:solidFill>
-                  <a:srgbClr val="5F6F63"/>
-                </a:solidFill>
-                <a:latin typeface="Roboto"/>
-              </a:rPr>
-              <a:t>WHAT IT SHOWS</a:t>
-            </a:r>
-          </a:p>
-        </p:txBody>
-      </p:sp>
-      <p:sp>
-        <p:nvSpPr>
-          <p:cNvPr id="7" name="TextBox 6"/>
-          <p:cNvSpPr txBox="1"/>
-          <p:nvPr/>
-        </p:nvSpPr>
-        <p:spPr>
-          <a:xfrm>
-            <a:off x="685800" y="2103120"/>
-            <a:ext cx="5044287" cy="3749039"/>
-          </a:xfrm>
-          <a:prstGeom prst="rect">
-            <a:avLst/>
-          </a:prstGeom>
-          <a:noFill/>
-        </p:spPr>
-        <p:txBody>
-          <a:bodyPr wrap="square">
-            <a:spAutoFit/>
-          </a:bodyPr>
-          <a:lstStyle/>
-          <a:p>
-            <a:pPr>
-              <a:defRPr>
-                <a:latin typeface="Roboto"/>
-              </a:defRPr>
-            </a:pPr>
-            <a:r>
-              <a:rPr sz="1600" b="0">
-                <a:solidFill>
-                  <a:srgbClr val="25342A"/>
-                </a:solidFill>
-                <a:latin typeface="Roboto"/>
-              </a:rPr>
-              <a:t>Community meals (2025-26) cost $5,610 in full in October: $3,200 paid by the Local council community grant grant, and $2,410 of shared costs no grant covers. It has spent 96.1% of its budget to date, with $29,900 left and 8 months to go.</a:t>
-            </a:r>
-          </a:p>
-        </p:txBody>
-      </p:sp>
-      <p:sp>
-        <p:nvSpPr>
-          <p:cNvPr id="8" name="Rectangle 7"/>
-          <p:cNvSpPr/>
-          <p:nvPr/>
-        </p:nvSpPr>
-        <p:spPr>
-          <a:xfrm>
-            <a:off x="6233007" y="1554480"/>
-            <a:ext cx="5501487" cy="4389120"/>
-          </a:xfrm>
-          <a:prstGeom prst="rect">
-            <a:avLst/>
-          </a:prstGeom>
-          <a:solidFill>
-            <a:srgbClr val="EEF5F0"/>
-          </a:solidFill>
-          <a:ln>
-            <a:solidFill>
-              <a:srgbClr val="DCE8DC"/>
-            </a:solidFill>
-          </a:ln>
-        </p:spPr>
-        <p:style>
-          <a:lnRef idx="1">
-            <a:schemeClr val="accent1"/>
-          </a:lnRef>
-          <a:fillRef idx="3">
-            <a:schemeClr val="accent1"/>
-          </a:fillRef>
-          <a:effectRef idx="2">
-            <a:schemeClr val="accent1"/>
-          </a:effectRef>
-          <a:fontRef idx="minor">
-            <a:schemeClr val="lt1"/>
-          </a:fontRef>
-        </p:style>
-        <p:txBody>
-          <a:bodyPr rtlCol="0" anchor="ctr"/>
-          <a:lstStyle/>
-          <a:p>
-            <a:pPr algn="ctr">
-              <a:defRPr>
-                <a:latin typeface="Roboto"/>
-              </a:defRPr>
-            </a:pPr>
-          </a:p>
-        </p:txBody>
-      </p:sp>
-      <p:sp>
-        <p:nvSpPr>
-          <p:cNvPr id="9" name="TextBox 8"/>
-          <p:cNvSpPr txBox="1"/>
-          <p:nvPr/>
-        </p:nvSpPr>
-        <p:spPr>
-          <a:xfrm>
-            <a:off x="6461607" y="1691640"/>
-            <a:ext cx="5044287" cy="365760"/>
-          </a:xfrm>
-          <a:prstGeom prst="rect">
-            <a:avLst/>
-          </a:prstGeom>
-          <a:noFill/>
-        </p:spPr>
-        <p:txBody>
-          <a:bodyPr wrap="square">
-            <a:spAutoFit/>
-          </a:bodyPr>
-          <a:lstStyle/>
-          <a:p>
-            <a:pPr>
-              <a:defRPr>
-                <a:latin typeface="Roboto"/>
-              </a:defRPr>
-            </a:pPr>
-            <a:r>
-              <a:rPr sz="1100" b="1">
-                <a:solidFill>
-                  <a:srgbClr val="5F6F63"/>
-                </a:solidFill>
-                <a:latin typeface="Roboto"/>
-              </a:rPr>
-              <a:t>WHAT YOU'D DO ABOUT IT</a:t>
-            </a:r>
-          </a:p>
-        </p:txBody>
-      </p:sp>
-      <p:sp>
-        <p:nvSpPr>
-          <p:cNvPr id="10" name="TextBox 9"/>
-          <p:cNvSpPr txBox="1"/>
-          <p:nvPr/>
-        </p:nvSpPr>
-        <p:spPr>
-          <a:xfrm>
-            <a:off x="6461607" y="2103120"/>
-            <a:ext cx="5044287" cy="3749039"/>
-          </a:xfrm>
-          <a:prstGeom prst="rect">
-            <a:avLst/>
-          </a:prstGeom>
-          <a:noFill/>
-        </p:spPr>
-        <p:txBody>
-          <a:bodyPr wrap="square">
-            <a:spAutoFit/>
-          </a:bodyPr>
-          <a:lstStyle/>
-          <a:p>
-            <a:pPr>
-              <a:defRPr>
-                <a:latin typeface="Roboto"/>
-              </a:defRPr>
-            </a:pPr>
-            <a:r>
-              <a:rPr sz="1600" b="0">
-                <a:solidFill>
-                  <a:srgbClr val="25342A"/>
-                </a:solidFill>
-                <a:latin typeface="Roboto"/>
-              </a:rPr>
-              <a:t>The full cost is $5,610 a month; $2,410 of it is shared cost the grant doesn't pay for. Worth asking for as much of it as the funder allows at renewal.</a:t>
-            </a:r>
-          </a:p>
-        </p:txBody>
-      </p:sp>
-      <p:sp>
-        <p:nvSpPr>
-          <p:cNvPr id="11" name="TextBox 10"/>
-          <p:cNvSpPr txBox="1"/>
-          <p:nvPr/>
-        </p:nvSpPr>
-        <p:spPr>
-          <a:xfrm>
-            <a:off x="457200" y="6492240"/>
-            <a:ext cx="3657600" cy="274320"/>
-          </a:xfrm>
-          <a:prstGeom prst="rect">
-            <a:avLst/>
-          </a:prstGeom>
-          <a:noFill/>
-        </p:spPr>
-        <p:txBody>
-          <a:bodyPr wrap="square">
-            <a:spAutoFit/>
-          </a:bodyPr>
-          <a:lstStyle/>
-          <a:p>
-            <a:pPr>
-              <a:defRPr>
-                <a:latin typeface="Roboto"/>
-              </a:defRPr>
-            </a:pPr>
-            <a:r>
-              <a:rPr sz="900" b="0">
-                <a:solidFill>
-                  <a:srgbClr val="5F6F63"/>
-                </a:solidFill>
-                <a:latin typeface="Roboto"/>
-              </a:rPr>
-              <a:t>program-cost.pptx</a:t>
-            </a:r>
-          </a:p>
-        </p:txBody>
-      </p:sp>
-      <p:sp>
-        <p:nvSpPr>
-          <p:cNvPr id="12" name="TextBox 11"/>
-          <p:cNvSpPr txBox="1"/>
-          <p:nvPr/>
-        </p:nvSpPr>
-        <p:spPr>
-          <a:xfrm>
-            <a:off x="4297680" y="6492240"/>
-            <a:ext cx="3657600" cy="274320"/>
-          </a:xfrm>
-          <a:prstGeom prst="rect">
-            <a:avLst/>
-          </a:prstGeom>
-          <a:noFill/>
-        </p:spPr>
-        <p:txBody>
-          <a:bodyPr wrap="square">
-            <a:spAutoFit/>
-          </a:bodyPr>
-          <a:lstStyle/>
-          <a:p>
-            <a:pPr algn="ctr">
-              <a:defRPr>
-                <a:latin typeface="Roboto"/>
-              </a:defRPr>
-            </a:pPr>
-            <a:r>
-              <a:rPr sz="900" b="0">
-                <a:solidFill>
-                  <a:srgbClr val="5F6F63"/>
-                </a:solidFill>
-                <a:latin typeface="Roboto"/>
-              </a:rPr>
-              <a:t>Data retrieved 2pm, Tue 6 Oct 2026 · Sample data</a:t>
-            </a:r>
-          </a:p>
-        </p:txBody>
-      </p:sp>
-      <p:sp>
-        <p:nvSpPr>
-          <p:cNvPr id="13" name="TextBox 12"/>
-          <p:cNvSpPr txBox="1"/>
-          <p:nvPr/>
-        </p:nvSpPr>
-        <p:spPr>
-          <a:xfrm>
-            <a:off x="8503920" y="6492240"/>
-            <a:ext cx="3200400" cy="274320"/>
-          </a:xfrm>
-          <a:prstGeom prst="rect">
-            <a:avLst/>
-          </a:prstGeom>
-          <a:noFill/>
-        </p:spPr>
-        <p:txBody>
-          <a:bodyPr wrap="square">
-            <a:spAutoFit/>
-          </a:bodyPr>
-          <a:lstStyle/>
-          <a:p>
-            <a:pPr algn="r">
-              <a:defRPr>
-                <a:latin typeface="Roboto"/>
-              </a:defRPr>
-            </a:pPr>
-            <a:r>
-              <a:rPr sz="900" b="0">
-                <a:solidFill>
-                  <a:srgbClr val="5F6F63"/>
-                </a:solidFill>
-                <a:latin typeface="Roboto"/>
-              </a:rPr>
-              <a:t>Slide 9 of 10</a:t>
+              <a:t>Slide 7 of 7</a:t>
             </a:r>
           </a:p>
         </p:txBody>
@@ -8146,6 +9252,326 @@
 </file>
 
 <file path=ppt/theme/theme1.xml><?xml version="1.0" encoding="utf-8"?>
+<a:theme xmlns:a="http://schemas.openxmlformats.org/drawingml/2006/main" name="Office Theme">
+  <a:themeElements>
+    <a:clrScheme name="Office">
+      <a:dk1>
+        <a:sysClr val="windowText" lastClr="000000"/>
+      </a:dk1>
+      <a:lt1>
+        <a:sysClr val="window" lastClr="FFFFFF"/>
+      </a:lt1>
+      <a:dk2>
+        <a:srgbClr val="25342A"/>
+      </a:dk2>
+      <a:lt2>
+        <a:srgbClr val="F4F7F2"/>
+      </a:lt2>
+      <a:accent1>
+        <a:srgbClr val="2F7A5D"/>
+      </a:accent1>
+      <a:accent2>
+        <a:srgbClr val="0E9F6E"/>
+      </a:accent2>
+      <a:accent3>
+        <a:srgbClr val="7D8790"/>
+      </a:accent3>
+      <a:accent4>
+        <a:srgbClr val="8A6D3B"/>
+      </a:accent4>
+      <a:accent5>
+        <a:srgbClr val="B42318"/>
+      </a:accent5>
+      <a:accent6>
+        <a:srgbClr val="8E9CAB"/>
+      </a:accent6>
+      <a:hlink>
+        <a:srgbClr val="0000FF"/>
+      </a:hlink>
+      <a:folHlink>
+        <a:srgbClr val="800080"/>
+      </a:folHlink>
+    </a:clrScheme>
+    <a:fontScheme name="Office">
+      <a:majorFont>
+        <a:latin typeface="Roboto"/>
+        <a:ea typeface=""/>
+        <a:cs typeface=""/>
+        <a:font script="Jpan" typeface="ＭＳ Ｐゴシック"/>
+        <a:font script="Hang" typeface="맑은 고딕"/>
+        <a:font script="Hans" typeface="宋体"/>
+        <a:font script="Hant" typeface="新細明體"/>
+        <a:font script="Arab" typeface="Times New Roman"/>
+        <a:font script="Hebr" typeface="Times New Roman"/>
+        <a:font script="Thai" typeface="Angsana New"/>
+        <a:font script="Ethi" typeface="Nyala"/>
+        <a:font script="Beng" typeface="Vrinda"/>
+        <a:font script="Gujr" typeface="Shruti"/>
+        <a:font script="Khmr" typeface="MoolBoran"/>
+        <a:font script="Knda" typeface="Tunga"/>
+        <a:font script="Guru" typeface="Raavi"/>
+        <a:font script="Cans" typeface="Euphemia"/>
+        <a:font script="Cher" typeface="Plantagenet Cherokee"/>
+        <a:font script="Yiii" typeface="Microsoft Yi Baiti"/>
+        <a:font script="Tibt" typeface="Microsoft Himalaya"/>
+        <a:font script="Thaa" typeface="MV Boli"/>
+        <a:font script="Deva" typeface="Mangal"/>
+        <a:font script="Telu" typeface="Gautami"/>
+        <a:font script="Taml" typeface="Latha"/>
+        <a:font script="Syrc" typeface="Estrangelo Edessa"/>
+        <a:font script="Orya" typeface="Kalinga"/>
+        <a:font script="Mlym" typeface="Kartika"/>
+        <a:font script="Laoo" typeface="DokChampa"/>
+        <a:font script="Sinh" typeface="Iskoola Pota"/>
+        <a:font script="Mong" typeface="Mongolian Baiti"/>
+        <a:font script="Viet" typeface="Times New Roman"/>
+        <a:font script="Uigh" typeface="Microsoft Uighur"/>
+        <a:font script="Geor" typeface="Sylfaen"/>
+      </a:majorFont>
+      <a:minorFont>
+        <a:latin typeface="Roboto"/>
+        <a:ea typeface=""/>
+        <a:cs typeface=""/>
+        <a:font script="Jpan" typeface="ＭＳ Ｐゴシック"/>
+        <a:font script="Hang" typeface="맑은 고딕"/>
+        <a:font script="Hans" typeface="宋体"/>
+        <a:font script="Hant" typeface="新細明體"/>
+        <a:font script="Arab" typeface="Arial"/>
+        <a:font script="Hebr" typeface="Arial"/>
+        <a:font script="Thai" typeface="Cordia New"/>
+        <a:font script="Ethi" typeface="Nyala"/>
+        <a:font script="Beng" typeface="Vrinda"/>
+        <a:font script="Gujr" typeface="Shruti"/>
+        <a:font script="Khmr" typeface="DaunPenh"/>
+        <a:font script="Knda" typeface="Tunga"/>
+        <a:font script="Guru" typeface="Raavi"/>
+        <a:font script="Cans" typeface="Euphemia"/>
+        <a:font script="Cher" typeface="Plantagenet Cherokee"/>
+        <a:font script="Yiii" typeface="Microsoft Yi Baiti"/>
+        <a:font script="Tibt" typeface="Microsoft Himalaya"/>
+        <a:font script="Thaa" typeface="MV Boli"/>
+        <a:font script="Deva" typeface="Mangal"/>
+        <a:font script="Telu" typeface="Gautami"/>
+        <a:font script="Taml" typeface="Latha"/>
+        <a:font script="Syrc" typeface="Estrangelo Edessa"/>
+        <a:font script="Orya" typeface="Kalinga"/>
+        <a:font script="Mlym" typeface="Kartika"/>
+        <a:font script="Laoo" typeface="DokChampa"/>
+        <a:font script="Sinh" typeface="Iskoola Pota"/>
+        <a:font script="Mong" typeface="Mongolian Baiti"/>
+        <a:font script="Viet" typeface="Arial"/>
+        <a:font script="Uigh" typeface="Microsoft Uighur"/>
+        <a:font script="Geor" typeface="Sylfaen"/>
+      </a:minorFont>
+    </a:fontScheme>
+    <a:fmtScheme name="Office">
+      <a:fillStyleLst>
+        <a:solidFill>
+          <a:schemeClr val="phClr"/>
+        </a:solidFill>
+        <a:gradFill rotWithShape="1">
+          <a:gsLst>
+            <a:gs pos="0">
+              <a:schemeClr val="phClr">
+                <a:tint val="50000"/>
+                <a:satMod val="300000"/>
+              </a:schemeClr>
+            </a:gs>
+            <a:gs pos="35000">
+              <a:schemeClr val="phClr">
+                <a:tint val="37000"/>
+                <a:satMod val="300000"/>
+              </a:schemeClr>
+            </a:gs>
+            <a:gs pos="100000">
+              <a:schemeClr val="phClr">
+                <a:tint val="15000"/>
+                <a:satMod val="350000"/>
+              </a:schemeClr>
+            </a:gs>
+          </a:gsLst>
+          <a:lin ang="16200000" scaled="1"/>
+        </a:gradFill>
+        <a:gradFill rotWithShape="1">
+          <a:gsLst>
+            <a:gs pos="0">
+              <a:schemeClr val="phClr">
+                <a:tint val="100000"/>
+                <a:shade val="100000"/>
+                <a:satMod val="130000"/>
+              </a:schemeClr>
+            </a:gs>
+            <a:gs pos="100000">
+              <a:schemeClr val="phClr">
+                <a:tint val="50000"/>
+                <a:shade val="100000"/>
+                <a:satMod val="350000"/>
+              </a:schemeClr>
+            </a:gs>
+          </a:gsLst>
+          <a:lin ang="16200000" scaled="0"/>
+        </a:gradFill>
+      </a:fillStyleLst>
+      <a:lnStyleLst>
+        <a:ln w="9525" cap="flat" cmpd="sng" algn="ctr">
+          <a:solidFill>
+            <a:schemeClr val="phClr">
+              <a:shade val="95000"/>
+              <a:satMod val="105000"/>
+            </a:schemeClr>
+          </a:solidFill>
+          <a:prstDash val="solid"/>
+        </a:ln>
+        <a:ln w="25400" cap="flat" cmpd="sng" algn="ctr">
+          <a:solidFill>
+            <a:schemeClr val="phClr"/>
+          </a:solidFill>
+          <a:prstDash val="solid"/>
+        </a:ln>
+        <a:ln w="38100" cap="flat" cmpd="sng" algn="ctr">
+          <a:solidFill>
+            <a:schemeClr val="phClr"/>
+          </a:solidFill>
+          <a:prstDash val="solid"/>
+        </a:ln>
+      </a:lnStyleLst>
+      <a:effectStyleLst>
+        <a:effectStyle>
+          <a:effectLst>
+            <a:outerShdw blurRad="40000" dist="20000" dir="5400000" rotWithShape="0">
+              <a:srgbClr val="000000">
+                <a:alpha val="38000"/>
+              </a:srgbClr>
+            </a:outerShdw>
+          </a:effectLst>
+        </a:effectStyle>
+        <a:effectStyle>
+          <a:effectLst>
+            <a:outerShdw blurRad="40000" dist="23000" dir="5400000" rotWithShape="0">
+              <a:srgbClr val="000000">
+                <a:alpha val="35000"/>
+              </a:srgbClr>
+            </a:outerShdw>
+          </a:effectLst>
+        </a:effectStyle>
+        <a:effectStyle>
+          <a:effectLst>
+            <a:outerShdw blurRad="40000" dist="23000" dir="5400000" rotWithShape="0">
+              <a:srgbClr val="000000">
+                <a:alpha val="35000"/>
+              </a:srgbClr>
+            </a:outerShdw>
+          </a:effectLst>
+          <a:scene3d>
+            <a:camera prst="orthographicFront">
+              <a:rot lat="0" lon="0" rev="0"/>
+            </a:camera>
+            <a:lightRig rig="threePt" dir="t">
+              <a:rot lat="0" lon="0" rev="1200000"/>
+            </a:lightRig>
+          </a:scene3d>
+          <a:sp3d>
+            <a:bevelT w="63500" h="25400"/>
+          </a:sp3d>
+        </a:effectStyle>
+      </a:effectStyleLst>
+      <a:bgFillStyleLst>
+        <a:solidFill>
+          <a:schemeClr val="phClr"/>
+        </a:solidFill>
+        <a:gradFill rotWithShape="1">
+          <a:gsLst>
+            <a:gs pos="0">
+              <a:schemeClr val="phClr">
+                <a:tint val="40000"/>
+                <a:satMod val="350000"/>
+              </a:schemeClr>
+            </a:gs>
+            <a:gs pos="40000">
+              <a:schemeClr val="phClr">
+                <a:tint val="45000"/>
+                <a:shade val="99000"/>
+                <a:satMod val="350000"/>
+              </a:schemeClr>
+            </a:gs>
+            <a:gs pos="100000">
+              <a:schemeClr val="phClr">
+                <a:shade val="20000"/>
+                <a:satMod val="255000"/>
+              </a:schemeClr>
+            </a:gs>
+          </a:gsLst>
+          <a:path path="circle">
+            <a:fillToRect l="50000" t="-80000" r="50000" b="180000"/>
+          </a:path>
+        </a:gradFill>
+        <a:gradFill rotWithShape="1">
+          <a:gsLst>
+            <a:gs pos="0">
+              <a:schemeClr val="phClr">
+                <a:tint val="80000"/>
+                <a:satMod val="300000"/>
+              </a:schemeClr>
+            </a:gs>
+            <a:gs pos="100000">
+              <a:schemeClr val="phClr">
+                <a:shade val="30000"/>
+                <a:satMod val="200000"/>
+              </a:schemeClr>
+            </a:gs>
+          </a:gsLst>
+          <a:path path="circle">
+            <a:fillToRect l="50000" t="50000" r="50000" b="50000"/>
+          </a:path>
+        </a:gradFill>
+      </a:bgFillStyleLst>
+    </a:fmtScheme>
+  </a:themeElements>
+  <a:objectDefaults>
+    <a:spDef>
+      <a:spPr/>
+      <a:bodyPr/>
+      <a:lstStyle/>
+      <a:style>
+        <a:lnRef idx="1">
+          <a:schemeClr val="accent1"/>
+        </a:lnRef>
+        <a:fillRef idx="3">
+          <a:schemeClr val="accent1"/>
+        </a:fillRef>
+        <a:effectRef idx="2">
+          <a:schemeClr val="accent1"/>
+        </a:effectRef>
+        <a:fontRef idx="minor">
+          <a:schemeClr val="lt1"/>
+        </a:fontRef>
+      </a:style>
+    </a:spDef>
+    <a:lnDef>
+      <a:spPr/>
+      <a:bodyPr/>
+      <a:lstStyle/>
+      <a:style>
+        <a:lnRef idx="2">
+          <a:schemeClr val="accent1"/>
+        </a:lnRef>
+        <a:fillRef idx="0">
+          <a:schemeClr val="accent1"/>
+        </a:fillRef>
+        <a:effectRef idx="1">
+          <a:schemeClr val="accent1"/>
+        </a:effectRef>
+        <a:fontRef idx="minor">
+          <a:schemeClr val="tx1"/>
+        </a:fontRef>
+      </a:style>
+    </a:lnDef>
+  </a:objectDefaults>
+  <a:extraClrSchemeLst/>
+</a:theme>
+</file>
+
+<file path=ppt/theme/theme2.xml><?xml version="1.0" encoding="utf-8"?>
 <a:theme xmlns:a="http://schemas.openxmlformats.org/drawingml/2006/main" name="Office Theme">
   <a:themeElements>
     <a:clrScheme name="Office">

--- a/media/exports/reports/2025-10/program-cost.pptx
+++ b/media/exports/reports/2025-10/program-cost.pptx
@@ -1950,7 +1950,7 @@
           <a:lstStyle/>
           <a:p>
             <a:r>
-              <a:t>What does each program really cost?. Sample Community Services Ltd. Period: October 2025. Each program's full cost: what its grant pays for, plus its fair share of the costs no single grant covers (untied program costs and administration, shared by grant spending). Pick a program and every chart and note follows it.</a:t>
+              <a:t>What does each program really cost?. Sample Community Services Ltd. Period: October 2025. In short: Housing support (2025) costs $46,631 in full in October: $20,031 more than its grant spending, once its share of shared costs is added. Each program's full cost: what its grant pays for, plus its fair share of the costs no single grant covers (untied program costs and administration, shared by grant spending). Pick a program and every chart and note follows it.</a:t>
             </a:r>
           </a:p>
         </p:txBody>
@@ -5595,7 +5595,7 @@
         <p:spPr>
           <a:xfrm>
             <a:off x="457200" y="3703320"/>
-            <a:ext cx="11277295" cy="535940"/>
+            <a:ext cx="11277295" cy="980440"/>
           </a:xfrm>
           <a:prstGeom prst="rect">
             <a:avLst/>
@@ -5620,7 +5620,7 @@
                 </a:solidFill>
                 <a:latin typeface="Roboto"/>
               </a:rPr>
-              <a:t>Period: October 2025. Each program's full cost: what its grant pays for, plus its fair share of the costs no single grant covers (untied program costs and administration, shared by grant spending). Pick a program and every chart and note follows it.</a:t>
+              <a:t>Period: October 2025. In short: Housing support (2025) costs $46,631 in full in October: $20,031 more than its grant spending, once its share of shared costs is added. Each program's full cost: what its grant pays for, plus its fair share of the costs no single grant covers (untied program costs and administration, shared by grant spending). Pick a program and every chart and note follows it.</a:t>
             </a:r>
           </a:p>
         </p:txBody>
@@ -5633,7 +5633,7 @@
         </p:nvSpPr>
         <p:spPr>
           <a:xfrm>
-            <a:off x="457200" y="4330700"/>
+            <a:off x="457200" y="4775200"/>
             <a:ext cx="11277295" cy="1097280"/>
           </a:xfrm>
           <a:prstGeom prst="rect">
@@ -5785,7 +5785,7 @@
                 </a:solidFill>
                 <a:latin typeface="Roboto"/>
               </a:rPr>
-              <a:t>Data retrieved 2pm, Tue 6 Oct 2026 · Generated 8 Oct 2026, 9:35am · Sample data · Made with Python (python-pptx)</a:t>
+              <a:t>Data retrieved 2pm, Tue 6 Oct 2026 · Generated 10 Oct 2026, 9:55pm · Sample data · Made with Python (python-pptx)</a:t>
             </a:r>
           </a:p>
         </p:txBody>
@@ -6354,7 +6354,7 @@
                 </a:solidFill>
                 <a:latin typeface="Roboto"/>
               </a:rPr>
-              <a:t>Data retrieved 2pm, Tue 6 Oct 2026 · Generated 8 Oct 2026, 9:35am · Sample data · Made with Python (python-pptx)</a:t>
+              <a:t>Data retrieved 2pm, Tue 6 Oct 2026 · Generated 10 Oct 2026, 9:55pm · Sample data · Made with Python (python-pptx)</a:t>
             </a:r>
           </a:p>
         </p:txBody>
@@ -6923,7 +6923,7 @@
                 </a:solidFill>
                 <a:latin typeface="Roboto"/>
               </a:rPr>
-              <a:t>Data retrieved 2pm, Tue 6 Oct 2026 · Generated 8 Oct 2026, 9:35am · Sample data · Made with Python (python-pptx)</a:t>
+              <a:t>Data retrieved 2pm, Tue 6 Oct 2026 · Generated 10 Oct 2026, 9:55pm · Sample data · Made with Python (python-pptx)</a:t>
             </a:r>
           </a:p>
         </p:txBody>
@@ -7492,7 +7492,7 @@
                 </a:solidFill>
                 <a:latin typeface="Roboto"/>
               </a:rPr>
-              <a:t>Data retrieved 2pm, Tue 6 Oct 2026 · Generated 8 Oct 2026, 9:35am · Sample data · Made with Python (python-pptx)</a:t>
+              <a:t>Data retrieved 2pm, Tue 6 Oct 2026 · Generated 10 Oct 2026, 9:55pm · Sample data · Made with Python (python-pptx)</a:t>
             </a:r>
           </a:p>
         </p:txBody>
@@ -8061,7 +8061,7 @@
                 </a:solidFill>
                 <a:latin typeface="Roboto"/>
               </a:rPr>
-              <a:t>Data retrieved 2pm, Tue 6 Oct 2026 · Generated 8 Oct 2026, 9:35am · Sample data · Made with Python (python-pptx)</a:t>
+              <a:t>Data retrieved 2pm, Tue 6 Oct 2026 · Generated 10 Oct 2026, 9:55pm · Sample data · Made with Python (python-pptx)</a:t>
             </a:r>
           </a:p>
         </p:txBody>
@@ -8630,7 +8630,7 @@
                 </a:solidFill>
                 <a:latin typeface="Roboto"/>
               </a:rPr>
-              <a:t>Data retrieved 2pm, Tue 6 Oct 2026 · Generated 8 Oct 2026, 9:35am · Sample data · Made with Python (python-pptx)</a:t>
+              <a:t>Data retrieved 2pm, Tue 6 Oct 2026 · Generated 10 Oct 2026, 9:55pm · Sample data · Made with Python (python-pptx)</a:t>
             </a:r>
           </a:p>
         </p:txBody>
@@ -9199,7 +9199,7 @@
                 </a:solidFill>
                 <a:latin typeface="Roboto"/>
               </a:rPr>
-              <a:t>Data retrieved 2pm, Tue 6 Oct 2026 · Generated 8 Oct 2026, 9:35am · Sample data · Made with Python (python-pptx)</a:t>
+              <a:t>Data retrieved 2pm, Tue 6 Oct 2026 · Generated 10 Oct 2026, 9:55pm · Sample data · Made with Python (python-pptx)</a:t>
             </a:r>
           </a:p>
         </p:txBody>
